--- a/dashboard/public/downloads/dev-transformation-summary-fdp.pptx
+++ b/dashboard/public/downloads/dev-transformation-summary-fdp.pptx
@@ -7,9 +7,10 @@
   <p:sldIdLst>
     <p:sldId id="256" r:id="rId2"/>
     <p:sldId id="257" r:id="rId3"/>
+    <p:sldId id="258" r:id="rId4"/>
   </p:sldIdLst>
   <p:notesMasterIdLst>
-    <p:notesMasterId r:id="rId4"/>
+    <p:notesMasterId r:id="rId5"/>
   </p:notesMasterIdLst>
   <p:sldSz cx="12192000" cy="6858000"/>
   <p:notesSz cx="6858000" cy="12192000"/>
@@ -633,6 +634,94 @@
 </p:notes>
 </file>
 
+<file path=ppt/notesSlides/notesSlide3.xml><?xml version="1.0" encoding="utf-8"?>
+<p:notes xmlns:a="http://schemas.openxmlformats.org/drawingml/2006/main" xmlns:r="http://schemas.openxmlformats.org/officeDocument/2006/relationships" xmlns:p="http://schemas.openxmlformats.org/presentationml/2006/main">
+  <p:cSld>
+    <p:spTree>
+      <p:nvGrpSpPr>
+        <p:cNvPr id="1" name=""/>
+        <p:cNvGrpSpPr/>
+        <p:nvPr/>
+      </p:nvGrpSpPr>
+      <p:grpSpPr>
+        <a:xfrm>
+          <a:off x="0" y="0"/>
+          <a:ext cx="0" cy="0"/>
+          <a:chOff x="0" y="0"/>
+          <a:chExt cx="0" cy="0"/>
+        </a:xfrm>
+      </p:grpSpPr>
+      <p:sp>
+        <p:nvSpPr>
+          <p:cNvPr id="2" name="Slide Image Placeholder 1"/>
+          <p:cNvSpPr>
+            <a:spLocks noGrp="1" noRot="1" noChangeAspect="1"/>
+          </p:cNvSpPr>
+          <p:nvPr>
+            <p:ph type="sldImg"/>
+          </p:nvPr>
+        </p:nvSpPr>
+        <p:spPr/>
+      </p:sp>
+      <p:sp>
+        <p:nvSpPr>
+          <p:cNvPr id="3" name="Notes Placeholder 2"/>
+          <p:cNvSpPr>
+            <a:spLocks noGrp="1"/>
+          </p:cNvSpPr>
+          <p:nvPr>
+            <p:ph type="body" idx="1"/>
+          </p:nvPr>
+        </p:nvSpPr>
+        <p:spPr/>
+        <p:txBody>
+          <a:bodyPr/>
+          <a:lstStyle/>
+          <a:p>
+            <a:r>
+              <a:rPr lang="en-US" dirty="0"/>
+              <a:t/>
+            </a:r>
+            <a:endParaRPr lang="en-US" dirty="0"/>
+          </a:p>
+        </p:txBody>
+      </p:sp>
+      <p:sp>
+        <p:nvSpPr>
+          <p:cNvPr id="4" name="Slide Number Placeholder 3"/>
+          <p:cNvSpPr>
+            <a:spLocks noGrp="1"/>
+          </p:cNvSpPr>
+          <p:nvPr>
+            <p:ph type="sldNum" sz="quarter" idx="10"/>
+          </p:nvPr>
+        </p:nvSpPr>
+        <p:spPr/>
+        <p:txBody>
+          <a:bodyPr/>
+          <a:lstStyle/>
+          <a:p>
+            <a:fld id="{F7021451-1387-4CA6-816F-3879F97B5CBC}" type="slidenum">
+              <a:rPr lang="en-US"/>
+              <a:t>3</a:t>
+            </a:fld>
+            <a:endParaRPr lang="en-US"/>
+          </a:p>
+        </p:txBody>
+      </p:sp>
+    </p:spTree>
+    <p:extLst>
+      <p:ext uri="{BB962C8B-B14F-4D97-AF65-F5344CB8AC3E}">
+        <p14:creationId xmlns:p14="http://schemas.microsoft.com/office/powerpoint/2010/main" val="1024086991"/>
+      </p:ext>
+    </p:extLst>
+  </p:cSld>
+  <p:clrMapOvr>
+    <a:masterClrMapping/>
+  </p:clrMapOvr>
+</p:notes>
+</file>
+
 <file path=ppt/slideLayouts/slideLayout1.xml><?xml version="1.0" encoding="utf-8"?>
 <p:sldLayout xmlns:a="http://schemas.openxmlformats.org/drawingml/2006/main" xmlns:r="http://schemas.openxmlformats.org/officeDocument/2006/relationships" xmlns:p="http://schemas.openxmlformats.org/presentationml/2006/main" preserve="1">
   <p:cSld name="DEFAULT">
@@ -1125,433 +1214,12 @@
         </p:nvSpPr>
         <p:spPr>
           <a:xfrm>
-            <a:off x="457200" y="859536"/>
-            <a:ext cx="11274552" cy="512064"/>
+            <a:off x="457200" y="877824"/>
+            <a:ext cx="3602736" cy="914400"/>
           </a:xfrm>
           <a:prstGeom prst="roundRect">
             <a:avLst>
-              <a:gd name="adj" fmla="val 16071"/>
-            </a:avLst>
-          </a:prstGeom>
-          <a:solidFill>
-            <a:srgbClr val="F5F7F8"/>
-          </a:solidFill>
-          <a:ln/>
-        </p:spPr>
-        <p:txBody>
-          <a:bodyPr wrap="square" lIns="0" tIns="0" rIns="0" bIns="0" rtlCol="0" anchor="ctr"/>
-          <a:lstStyle/>
-          <a:p>
-            <a:pPr algn="ctr" indent="0" marL="0">
-              <a:buNone/>
-            </a:pPr>
-            <a:r>
-              <a:rPr lang="en-US" sz="1650" i="1" dirty="0">
-                <a:solidFill>
-                  <a:srgbClr val="17313B"/>
-                </a:solidFill>
-                <a:latin typeface="Malgun Gothic" pitchFamily="34" charset="0"/>
-                <a:ea typeface="Malgun Gothic" pitchFamily="34" charset="-122"/>
-                <a:cs typeface="Malgun Gothic" pitchFamily="34" charset="-120"/>
-              </a:rPr>
-              <a:t>“Binding으로 수요를 확보하고, FDP로 제품을 표준화하며, 시스템 소프트웨어로 고객 워크로드를 연결한다”</a:t>
-            </a:r>
-            <a:endParaRPr lang="en-US" sz="1650" dirty="0"/>
-          </a:p>
-        </p:txBody>
-      </p:sp>
-      <p:sp>
-        <p:nvSpPr>
-          <p:cNvPr id="7" name="Shape 5"/>
-          <p:cNvSpPr/>
-          <p:nvPr/>
-        </p:nvSpPr>
-        <p:spPr>
-          <a:xfrm>
-            <a:off x="2011680" y="1517904"/>
-            <a:ext cx="3200400" cy="1371600"/>
-          </a:xfrm>
-          <a:prstGeom prst="roundRect">
-            <a:avLst>
-              <a:gd name="adj" fmla="val 6667"/>
-            </a:avLst>
-          </a:prstGeom>
-          <a:solidFill>
-            <a:srgbClr val="F5F7F8"/>
-          </a:solidFill>
-          <a:ln w="15875">
-            <a:solidFill>
-              <a:srgbClr val="DCE4E9"/>
-            </a:solidFill>
-            <a:prstDash val="solid"/>
-          </a:ln>
-        </p:spPr>
-      </p:sp>
-      <p:sp>
-        <p:nvSpPr>
-          <p:cNvPr id="8" name="Shape 6"/>
-          <p:cNvSpPr/>
-          <p:nvPr/>
-        </p:nvSpPr>
-        <p:spPr>
-          <a:xfrm>
-            <a:off x="3401568" y="1645920"/>
-            <a:ext cx="420624" cy="420624"/>
-          </a:xfrm>
-          <a:prstGeom prst="ellipse">
-            <a:avLst/>
-          </a:prstGeom>
-          <a:solidFill>
-            <a:srgbClr val="5A7184"/>
-          </a:solidFill>
-          <a:ln/>
-        </p:spPr>
-      </p:sp>
-      <p:pic>
-        <p:nvPicPr>
-          <p:cNvPr id="9" name="Image 0" descr="preencoded.png">    </p:cNvPr>
-          <p:cNvPicPr>
-            <a:picLocks noChangeAspect="1"/>
-          </p:cNvPicPr>
-          <p:nvPr/>
-        </p:nvPicPr>
-        <p:blipFill>
-          <a:blip r:embed="rId1"/>
-          <a:stretch>
-            <a:fillRect/>
-          </a:stretch>
-        </p:blipFill>
-        <p:spPr>
-          <a:xfrm>
-            <a:off x="3502518" y="1746870"/>
-            <a:ext cx="218724" cy="218724"/>
-          </a:xfrm>
-          <a:prstGeom prst="rect">
-            <a:avLst/>
-          </a:prstGeom>
-        </p:spPr>
-      </p:pic>
-      <p:sp>
-        <p:nvSpPr>
-          <p:cNvPr id="10" name="Text 7"/>
-          <p:cNvSpPr/>
-          <p:nvPr/>
-        </p:nvSpPr>
-        <p:spPr>
-          <a:xfrm>
-            <a:off x="2103120" y="2103120"/>
-            <a:ext cx="3017520" cy="329184"/>
-          </a:xfrm>
-          <a:prstGeom prst="rect">
-            <a:avLst/>
-          </a:prstGeom>
-          <a:noFill/>
-          <a:ln/>
-        </p:spPr>
-        <p:txBody>
-          <a:bodyPr wrap="square" lIns="0" tIns="0" rIns="0" bIns="0" rtlCol="0" anchor="ctr"/>
-          <a:lstStyle/>
-          <a:p>
-            <a:pPr algn="ctr" indent="0" marL="0">
-              <a:buNone/>
-            </a:pPr>
-            <a:r>
-              <a:rPr lang="en-US" sz="1900" b="1" dirty="0">
-                <a:solidFill>
-                  <a:srgbClr val="5A7184"/>
-                </a:solidFill>
-                <a:latin typeface="Malgun Gothic" pitchFamily="34" charset="0"/>
-                <a:ea typeface="Malgun Gothic" pitchFamily="34" charset="-122"/>
-                <a:cs typeface="Malgun Gothic" pitchFamily="34" charset="-120"/>
-              </a:rPr>
-              <a:t>FDP SSD 공급자</a:t>
-            </a:r>
-            <a:endParaRPr lang="en-US" sz="1900" dirty="0"/>
-          </a:p>
-        </p:txBody>
-      </p:sp>
-      <p:sp>
-        <p:nvSpPr>
-          <p:cNvPr id="11" name="Text 8"/>
-          <p:cNvSpPr/>
-          <p:nvPr/>
-        </p:nvSpPr>
-        <p:spPr>
-          <a:xfrm>
-            <a:off x="2103120" y="2468880"/>
-            <a:ext cx="3017520" cy="256032"/>
-          </a:xfrm>
-          <a:prstGeom prst="rect">
-            <a:avLst/>
-          </a:prstGeom>
-          <a:noFill/>
-          <a:ln/>
-        </p:spPr>
-        <p:txBody>
-          <a:bodyPr wrap="square" lIns="0" tIns="0" rIns="0" bIns="0" rtlCol="0" anchor="ctr"/>
-          <a:lstStyle/>
-          <a:p>
-            <a:pPr algn="ctr" indent="0" marL="0">
-              <a:buNone/>
-            </a:pPr>
-            <a:r>
-              <a:rPr lang="en-US" sz="1150" dirty="0">
-                <a:solidFill>
-                  <a:srgbClr val="5A7184"/>
-                </a:solidFill>
-                <a:latin typeface="Malgun Gothic" pitchFamily="34" charset="0"/>
-                <a:ea typeface="Malgun Gothic" pitchFamily="34" charset="-122"/>
-                <a:cs typeface="Malgun Gothic" pitchFamily="34" charset="-120"/>
-              </a:rPr>
-              <a:t>여러 공급사 중 하나 · 가격 경쟁 노출</a:t>
-            </a:r>
-            <a:endParaRPr lang="en-US" sz="1150" dirty="0"/>
-          </a:p>
-        </p:txBody>
-      </p:sp>
-      <p:sp>
-        <p:nvSpPr>
-          <p:cNvPr id="12" name="Text 9"/>
-          <p:cNvSpPr/>
-          <p:nvPr/>
-        </p:nvSpPr>
-        <p:spPr>
-          <a:xfrm>
-            <a:off x="5285232" y="1792224"/>
-            <a:ext cx="1591056" cy="822960"/>
-          </a:xfrm>
-          <a:prstGeom prst="rightArrow">
-            <a:avLst/>
-          </a:prstGeom>
-          <a:solidFill>
-            <a:srgbClr val="028090"/>
-          </a:solidFill>
-          <a:ln/>
-        </p:spPr>
-        <p:txBody>
-          <a:bodyPr wrap="square" lIns="0" tIns="0" rIns="0" bIns="0" rtlCol="0" anchor="ctr"/>
-          <a:lstStyle/>
-          <a:p>
-            <a:pPr algn="ctr" indent="0" marL="0">
-              <a:buNone/>
-            </a:pPr>
-            <a:r>
-              <a:rPr lang="en-US" sz="1200" b="1" dirty="0">
-                <a:solidFill>
-                  <a:srgbClr val="FFFFFF"/>
-                </a:solidFill>
-                <a:latin typeface="Malgun Gothic" pitchFamily="34" charset="0"/>
-                <a:ea typeface="Malgun Gothic" pitchFamily="34" charset="-122"/>
-                <a:cs typeface="Malgun Gothic" pitchFamily="34" charset="-120"/>
-              </a:rPr>
-              <a:t>+ 시스템 SW</a:t>
-            </a:r>
-            <a:endParaRPr lang="en-US" sz="1200" dirty="0"/>
-          </a:p>
-        </p:txBody>
-      </p:sp>
-      <p:sp>
-        <p:nvSpPr>
-          <p:cNvPr id="13" name="Shape 10"/>
-          <p:cNvSpPr/>
-          <p:nvPr/>
-        </p:nvSpPr>
-        <p:spPr>
-          <a:xfrm>
-            <a:off x="6949440" y="1517904"/>
-            <a:ext cx="3200400" cy="1371600"/>
-          </a:xfrm>
-          <a:prstGeom prst="roundRect">
-            <a:avLst>
-              <a:gd name="adj" fmla="val 6667"/>
-            </a:avLst>
-          </a:prstGeom>
-          <a:solidFill>
-            <a:srgbClr val="E8F6F0"/>
-          </a:solidFill>
-          <a:ln w="19050">
-            <a:solidFill>
-              <a:srgbClr val="02A878"/>
-            </a:solidFill>
-            <a:prstDash val="solid"/>
-          </a:ln>
-        </p:spPr>
-      </p:sp>
-      <p:sp>
-        <p:nvSpPr>
-          <p:cNvPr id="14" name="Shape 11"/>
-          <p:cNvSpPr/>
-          <p:nvPr/>
-        </p:nvSpPr>
-        <p:spPr>
-          <a:xfrm>
-            <a:off x="8339328" y="1645920"/>
-            <a:ext cx="420624" cy="420624"/>
-          </a:xfrm>
-          <a:prstGeom prst="ellipse">
-            <a:avLst/>
-          </a:prstGeom>
-          <a:solidFill>
-            <a:srgbClr val="02A878"/>
-          </a:solidFill>
-          <a:ln/>
-        </p:spPr>
-      </p:sp>
-      <p:pic>
-        <p:nvPicPr>
-          <p:cNvPr id="15" name="Image 1" descr="preencoded.png">    </p:cNvPr>
-          <p:cNvPicPr>
-            <a:picLocks noChangeAspect="1"/>
-          </p:cNvPicPr>
-          <p:nvPr/>
-        </p:nvPicPr>
-        <p:blipFill>
-          <a:blip r:embed="rId2"/>
-          <a:stretch>
-            <a:fillRect/>
-          </a:stretch>
-        </p:blipFill>
-        <p:spPr>
-          <a:xfrm>
-            <a:off x="8440278" y="1746870"/>
-            <a:ext cx="218724" cy="218724"/>
-          </a:xfrm>
-          <a:prstGeom prst="rect">
-            <a:avLst/>
-          </a:prstGeom>
-        </p:spPr>
-      </p:pic>
-      <p:sp>
-        <p:nvSpPr>
-          <p:cNvPr id="16" name="Text 12"/>
-          <p:cNvSpPr/>
-          <p:nvPr/>
-        </p:nvSpPr>
-        <p:spPr>
-          <a:xfrm>
-            <a:off x="7040880" y="2103120"/>
-            <a:ext cx="3017520" cy="329184"/>
-          </a:xfrm>
-          <a:prstGeom prst="rect">
-            <a:avLst/>
-          </a:prstGeom>
-          <a:noFill/>
-          <a:ln/>
-        </p:spPr>
-        <p:txBody>
-          <a:bodyPr wrap="square" lIns="0" tIns="0" rIns="0" bIns="0" rtlCol="0" anchor="ctr"/>
-          <a:lstStyle/>
-          <a:p>
-            <a:pPr algn="ctr" indent="0" marL="0">
-              <a:buNone/>
-            </a:pPr>
-            <a:r>
-              <a:rPr lang="en-US" sz="1900" b="1" dirty="0">
-                <a:solidFill>
-                  <a:srgbClr val="02A878"/>
-                </a:solidFill>
-                <a:latin typeface="Malgun Gothic" pitchFamily="34" charset="0"/>
-                <a:ea typeface="Malgun Gothic" pitchFamily="34" charset="-122"/>
-                <a:cs typeface="Malgun Gothic" pitchFamily="34" charset="-120"/>
-              </a:rPr>
-              <a:t>통합 솔루션 제공자</a:t>
-            </a:r>
-            <a:endParaRPr lang="en-US" sz="1900" dirty="0"/>
-          </a:p>
-        </p:txBody>
-      </p:sp>
-      <p:sp>
-        <p:nvSpPr>
-          <p:cNvPr id="17" name="Text 13"/>
-          <p:cNvSpPr/>
-          <p:nvPr/>
-        </p:nvSpPr>
-        <p:spPr>
-          <a:xfrm>
-            <a:off x="6949440" y="2468880"/>
-            <a:ext cx="3200400" cy="256032"/>
-          </a:xfrm>
-          <a:prstGeom prst="rect">
-            <a:avLst/>
-          </a:prstGeom>
-          <a:noFill/>
-          <a:ln/>
-        </p:spPr>
-        <p:txBody>
-          <a:bodyPr wrap="square" lIns="0" tIns="0" rIns="0" bIns="0" rtlCol="0" anchor="ctr"/>
-          <a:lstStyle/>
-          <a:p>
-            <a:pPr algn="ctr" indent="0" marL="0">
-              <a:buNone/>
-            </a:pPr>
-            <a:r>
-              <a:rPr lang="en-US" sz="1150" dirty="0">
-                <a:solidFill>
-                  <a:srgbClr val="17313B"/>
-                </a:solidFill>
-                <a:latin typeface="Malgun Gothic" pitchFamily="34" charset="0"/>
-                <a:ea typeface="Malgun Gothic" pitchFamily="34" charset="-122"/>
-                <a:cs typeface="Malgun Gothic" pitchFamily="34" charset="-120"/>
-              </a:rPr>
-              <a:t>Host SDK · Profiler · End-to-End 검증</a:t>
-            </a:r>
-            <a:endParaRPr lang="en-US" sz="1150" dirty="0"/>
-          </a:p>
-        </p:txBody>
-      </p:sp>
-      <p:sp>
-        <p:nvSpPr>
-          <p:cNvPr id="18" name="Text 14"/>
-          <p:cNvSpPr/>
-          <p:nvPr/>
-        </p:nvSpPr>
-        <p:spPr>
-          <a:xfrm>
-            <a:off x="457200" y="3035808"/>
-            <a:ext cx="5486400" cy="256032"/>
-          </a:xfrm>
-          <a:prstGeom prst="rect">
-            <a:avLst/>
-          </a:prstGeom>
-          <a:noFill/>
-          <a:ln/>
-        </p:spPr>
-        <p:txBody>
-          <a:bodyPr wrap="square" lIns="0" tIns="0" rIns="0" bIns="0" rtlCol="0" anchor="ctr"/>
-          <a:lstStyle/>
-          <a:p>
-            <a:pPr indent="0" marL="0">
-              <a:buNone/>
-            </a:pPr>
-            <a:r>
-              <a:rPr lang="en-US" sz="1400" b="1" dirty="0">
-                <a:solidFill>
-                  <a:srgbClr val="17313B"/>
-                </a:solidFill>
-                <a:latin typeface="Malgun Gothic" pitchFamily="34" charset="0"/>
-                <a:ea typeface="Malgun Gothic" pitchFamily="34" charset="-122"/>
-                <a:cs typeface="Malgun Gothic" pitchFamily="34" charset="-120"/>
-              </a:rPr>
-              <a:t>왜 시스템 소프트웨어인가</a:t>
-            </a:r>
-            <a:endParaRPr lang="en-US" sz="1400" dirty="0"/>
-          </a:p>
-        </p:txBody>
-      </p:sp>
-      <p:sp>
-        <p:nvSpPr>
-          <p:cNvPr id="19" name="Text 15"/>
-          <p:cNvSpPr/>
-          <p:nvPr/>
-        </p:nvSpPr>
-        <p:spPr>
-          <a:xfrm>
-            <a:off x="457200" y="3328416"/>
-            <a:ext cx="3602736" cy="877824"/>
-          </a:xfrm>
-          <a:prstGeom prst="roundRect">
-            <a:avLst>
-              <a:gd name="adj" fmla="val 8333"/>
+              <a:gd name="adj" fmla="val 8000"/>
             </a:avLst>
           </a:prstGeom>
           <a:solidFill>
@@ -1578,7 +1246,7 @@
                 <a:ea typeface="Malgun Gothic" pitchFamily="34" charset="-122"/>
                 <a:cs typeface="Malgun Gothic" pitchFamily="34" charset="-120"/>
               </a:rPr>
-              <a:t>FDP는 인터페이스일 뿐</a:t>
+              <a:t>수주산업화 — Binding</a:t>
             </a:r>
             <a:endParaRPr lang="en-US" sz="1350" dirty="0"/>
           </a:p>
@@ -1598,7 +1266,7 @@
                 <a:ea typeface="Malgun Gothic" pitchFamily="34" charset="-122"/>
                 <a:cs typeface="Malgun Gothic" pitchFamily="34" charset="-120"/>
               </a:rPr>
-              <a:t>SSD는 hot/cold·수명·테넌트를 모른다 — 정보는 DB·캐시 등 상위 SW에 있다</a:t>
+              <a:t>5년 take-or-pay·선수금 수백억$ — “메모리가 처음으로 바인딩” (이창수 인터뷰)</a:t>
             </a:r>
             <a:endParaRPr lang="en-US" sz="1350" dirty="0"/>
           </a:p>
@@ -1606,18 +1274,18 @@
       </p:sp>
       <p:sp>
         <p:nvSpPr>
-          <p:cNvPr id="20" name="Text 16"/>
-          <p:cNvSpPr/>
-          <p:nvPr/>
-        </p:nvSpPr>
-        <p:spPr>
-          <a:xfrm>
-            <a:off x="4297680" y="3328416"/>
-            <a:ext cx="3602736" cy="877824"/>
+          <p:cNvPr id="7" name="Text 5"/>
+          <p:cNvSpPr/>
+          <p:nvPr/>
+        </p:nvSpPr>
+        <p:spPr>
+          <a:xfrm>
+            <a:off x="4297680" y="877824"/>
+            <a:ext cx="3602736" cy="914400"/>
           </a:xfrm>
           <a:prstGeom prst="roundRect">
             <a:avLst>
-              <a:gd name="adj" fmla="val 8333"/>
+              <a:gd name="adj" fmla="val 8000"/>
             </a:avLst>
           </a:prstGeom>
           <a:solidFill>
@@ -1644,7 +1312,7 @@
                 <a:ea typeface="Malgun Gothic" pitchFamily="34" charset="-122"/>
                 <a:cs typeface="Malgun Gothic" pitchFamily="34" charset="-120"/>
               </a:rPr>
-              <a:t>Captive SSD 확대</a:t>
+              <a:t>수요 지배</a:t>
             </a:r>
             <a:endParaRPr lang="en-US" sz="1350" dirty="0"/>
           </a:p>
@@ -1664,7 +1332,7 @@
                 <a:ea typeface="Malgun Gothic" pitchFamily="34" charset="-122"/>
                 <a:cs typeface="Malgun Gothic" pitchFamily="34" charset="-120"/>
               </a:rPr>
-              <a:t>NAND 공급에만 머물면 완제품 SSD의 부가가치를 잃는다</a:t>
+              <a:t>하이퍼스케일러가 글로벌 enterprise SSD의 ~55% 소비 — 소수 고객이 규칙을 정한다</a:t>
             </a:r>
             <a:endParaRPr lang="en-US" sz="1350" dirty="0"/>
           </a:p>
@@ -1672,18 +1340,18 @@
       </p:sp>
       <p:sp>
         <p:nvSpPr>
-          <p:cNvPr id="21" name="Text 17"/>
-          <p:cNvSpPr/>
-          <p:nvPr/>
-        </p:nvSpPr>
-        <p:spPr>
-          <a:xfrm>
-            <a:off x="8138160" y="3328416"/>
-            <a:ext cx="3602736" cy="877824"/>
+          <p:cNvPr id="8" name="Text 6"/>
+          <p:cNvSpPr/>
+          <p:nvPr/>
+        </p:nvSpPr>
+        <p:spPr>
+          <a:xfrm>
+            <a:off x="8138160" y="877824"/>
+            <a:ext cx="3602736" cy="914400"/>
           </a:xfrm>
           <a:prstGeom prst="roundRect">
             <a:avLst>
-              <a:gd name="adj" fmla="val 8333"/>
+              <a:gd name="adj" fmla="val 8000"/>
             </a:avLst>
           </a:prstGeom>
           <a:solidFill>
@@ -1710,7 +1378,7 @@
                 <a:ea typeface="Malgun Gothic" pitchFamily="34" charset="-122"/>
                 <a:cs typeface="Malgun Gothic" pitchFamily="34" charset="-120"/>
               </a:rPr>
-              <a:t>커스텀 파편화</a:t>
+              <a:t>통제권 상승</a:t>
             </a:r>
             <a:endParaRPr lang="en-US" sz="1350" dirty="0"/>
           </a:p>
@@ -1730,7 +1398,7 @@
                 <a:ea typeface="Malgun Gothic" pitchFamily="34" charset="-122"/>
                 <a:cs typeface="Malgun Gothic" pitchFamily="34" charset="-120"/>
               </a:rPr>
-              <a:t>고객별 커스텀 SSD 개발은 제품·펌웨어를 파편화시킨다</a:t>
+              <a:t>고객이 완제품 → 펌웨어 → 컨트롤러 → 표준·웨이퍼로 스토리지를 내재화</a:t>
             </a:r>
             <a:endParaRPr lang="en-US" sz="1350" dirty="0"/>
           </a:p>
@@ -1738,14 +1406,14 @@
       </p:sp>
       <p:sp>
         <p:nvSpPr>
-          <p:cNvPr id="22" name="Text 18"/>
-          <p:cNvSpPr/>
-          <p:nvPr/>
-        </p:nvSpPr>
-        <p:spPr>
-          <a:xfrm>
-            <a:off x="457200" y="4425696"/>
-            <a:ext cx="5486400" cy="256032"/>
+          <p:cNvPr id="9" name="Text 7"/>
+          <p:cNvSpPr/>
+          <p:nvPr/>
+        </p:nvSpPr>
+        <p:spPr>
+          <a:xfrm>
+            <a:off x="457200" y="1956816"/>
+            <a:ext cx="8229600" cy="274320"/>
           </a:xfrm>
           <a:prstGeom prst="rect">
             <a:avLst/>
@@ -1761,7 +1429,7 @@
               <a:buNone/>
             </a:pPr>
             <a:r>
-              <a:rPr lang="en-US" sz="1400" b="1" dirty="0">
+              <a:rPr lang="en-US" sz="1500" b="1" dirty="0">
                 <a:solidFill>
                   <a:srgbClr val="17313B"/>
                 </a:solidFill>
@@ -1769,49 +1437,661 @@
                 <a:ea typeface="Malgun Gothic" pitchFamily="34" charset="-122"/>
                 <a:cs typeface="Malgun Gothic" pitchFamily="34" charset="-120"/>
               </a:rPr>
-              <a:t>전체 전략 구조 — 6요소</a:t>
-            </a:r>
-            <a:endParaRPr lang="en-US" sz="1400" dirty="0"/>
-          </a:p>
-        </p:txBody>
-      </p:sp>
-      <p:sp>
-        <p:nvSpPr>
-          <p:cNvPr id="23" name="Text 19"/>
-          <p:cNvSpPr/>
-          <p:nvPr/>
-        </p:nvSpPr>
-        <p:spPr>
-          <a:xfrm>
-            <a:off x="457200" y="4718304"/>
-            <a:ext cx="1682496" cy="731520"/>
+              <a:t>Captive SSD 위상 변화 — 고객 통제권의 단계 상승 (불가역)</a:t>
+            </a:r>
+            <a:endParaRPr lang="en-US" sz="1500" dirty="0"/>
+          </a:p>
+        </p:txBody>
+      </p:sp>
+      <p:sp>
+        <p:nvSpPr>
+          <p:cNvPr id="10" name="Shape 8"/>
+          <p:cNvSpPr/>
+          <p:nvPr/>
+        </p:nvSpPr>
+        <p:spPr>
+          <a:xfrm>
+            <a:off x="640080" y="4407408"/>
+            <a:ext cx="1225296" cy="621792"/>
           </a:xfrm>
           <a:prstGeom prst="roundRect">
             <a:avLst>
-              <a:gd name="adj" fmla="val 8750"/>
+              <a:gd name="adj" fmla="val 7353"/>
             </a:avLst>
           </a:prstGeom>
           <a:solidFill>
-            <a:srgbClr val="FFFFFF"/>
-          </a:solidFill>
-          <a:ln w="12700">
+            <a:srgbClr val="C7D3DB"/>
+          </a:solidFill>
+          <a:ln/>
+        </p:spPr>
+      </p:sp>
+      <p:sp>
+        <p:nvSpPr>
+          <p:cNvPr id="11" name="Text 9"/>
+          <p:cNvSpPr/>
+          <p:nvPr/>
+        </p:nvSpPr>
+        <p:spPr>
+          <a:xfrm>
+            <a:off x="640080" y="4443984"/>
+            <a:ext cx="1225296" cy="274320"/>
+          </a:xfrm>
+          <a:prstGeom prst="rect">
+            <a:avLst/>
+          </a:prstGeom>
+          <a:noFill/>
+          <a:ln/>
+        </p:spPr>
+        <p:txBody>
+          <a:bodyPr wrap="square" lIns="0" tIns="0" rIns="0" bIns="0" rtlCol="0" anchor="ctr"/>
+          <a:lstStyle/>
+          <a:p>
+            <a:pPr algn="ctr" indent="0" marL="0">
+              <a:buNone/>
+            </a:pPr>
+            <a:r>
+              <a:rPr lang="en-US" sz="1300" b="1" dirty="0">
+                <a:solidFill>
+                  <a:srgbClr val="17313B"/>
+                </a:solidFill>
+                <a:latin typeface="Malgun Gothic" pitchFamily="34" charset="0"/>
+                <a:ea typeface="Malgun Gothic" pitchFamily="34" charset="-122"/>
+                <a:cs typeface="Malgun Gothic" pitchFamily="34" charset="-120"/>
+              </a:rPr>
+              <a:t>1</a:t>
+            </a:r>
+            <a:endParaRPr lang="en-US" sz="1300" dirty="0"/>
+          </a:p>
+        </p:txBody>
+      </p:sp>
+      <p:sp>
+        <p:nvSpPr>
+          <p:cNvPr id="12" name="Text 10"/>
+          <p:cNvSpPr/>
+          <p:nvPr/>
+        </p:nvSpPr>
+        <p:spPr>
+          <a:xfrm>
+            <a:off x="512064" y="4114800"/>
+            <a:ext cx="1481328" cy="256032"/>
+          </a:xfrm>
+          <a:prstGeom prst="rect">
+            <a:avLst/>
+          </a:prstGeom>
+          <a:noFill/>
+          <a:ln/>
+        </p:spPr>
+        <p:txBody>
+          <a:bodyPr wrap="square" lIns="0" tIns="0" rIns="0" bIns="0" rtlCol="0" anchor="ctr"/>
+          <a:lstStyle/>
+          <a:p>
+            <a:pPr algn="ctr" indent="0" marL="0">
+              <a:buNone/>
+            </a:pPr>
+            <a:r>
+              <a:rPr lang="en-US" sz="1100" b="1" dirty="0">
+                <a:solidFill>
+                  <a:srgbClr val="17313B"/>
+                </a:solidFill>
+                <a:latin typeface="Malgun Gothic" pitchFamily="34" charset="0"/>
+                <a:ea typeface="Malgun Gothic" pitchFamily="34" charset="-122"/>
+                <a:cs typeface="Malgun Gothic" pitchFamily="34" charset="-120"/>
+              </a:rPr>
+              <a:t>완제품 구매</a:t>
+            </a:r>
+            <a:endParaRPr lang="en-US" sz="1100" dirty="0"/>
+          </a:p>
+        </p:txBody>
+      </p:sp>
+      <p:sp>
+        <p:nvSpPr>
+          <p:cNvPr id="13" name="Text 11"/>
+          <p:cNvSpPr/>
+          <p:nvPr/>
+        </p:nvSpPr>
+        <p:spPr>
+          <a:xfrm>
+            <a:off x="640080" y="5084064"/>
+            <a:ext cx="1225296" cy="237744"/>
+          </a:xfrm>
+          <a:prstGeom prst="rect">
+            <a:avLst/>
+          </a:prstGeom>
+          <a:noFill/>
+          <a:ln/>
+        </p:spPr>
+        <p:txBody>
+          <a:bodyPr wrap="square" lIns="0" tIns="0" rIns="0" bIns="0" rtlCol="0" anchor="ctr"/>
+          <a:lstStyle/>
+          <a:p>
+            <a:pPr algn="ctr" indent="0" marL="0">
+              <a:buNone/>
+            </a:pPr>
+            <a:r>
+              <a:rPr lang="en-US" sz="1050" dirty="0">
+                <a:solidFill>
+                  <a:srgbClr val="5A7184"/>
+                </a:solidFill>
+                <a:latin typeface="Malgun Gothic" pitchFamily="34" charset="0"/>
+                <a:ea typeface="Malgun Gothic" pitchFamily="34" charset="-122"/>
+                <a:cs typeface="Malgun Gothic" pitchFamily="34" charset="-120"/>
+              </a:rPr>
+              <a:t>~2016</a:t>
+            </a:r>
+            <a:endParaRPr lang="en-US" sz="1050" dirty="0"/>
+          </a:p>
+        </p:txBody>
+      </p:sp>
+      <p:sp>
+        <p:nvSpPr>
+          <p:cNvPr id="14" name="Shape 12"/>
+          <p:cNvSpPr/>
+          <p:nvPr/>
+        </p:nvSpPr>
+        <p:spPr>
+          <a:xfrm>
+            <a:off x="2121408" y="3785616"/>
+            <a:ext cx="1225296" cy="1243584"/>
+          </a:xfrm>
+          <a:prstGeom prst="roundRect">
+            <a:avLst>
+              <a:gd name="adj" fmla="val 3731"/>
+            </a:avLst>
+          </a:prstGeom>
+          <a:solidFill>
+            <a:srgbClr val="9DBACB"/>
+          </a:solidFill>
+          <a:ln/>
+        </p:spPr>
+      </p:sp>
+      <p:sp>
+        <p:nvSpPr>
+          <p:cNvPr id="15" name="Text 13"/>
+          <p:cNvSpPr/>
+          <p:nvPr/>
+        </p:nvSpPr>
+        <p:spPr>
+          <a:xfrm>
+            <a:off x="2121408" y="3822192"/>
+            <a:ext cx="1225296" cy="274320"/>
+          </a:xfrm>
+          <a:prstGeom prst="rect">
+            <a:avLst/>
+          </a:prstGeom>
+          <a:noFill/>
+          <a:ln/>
+        </p:spPr>
+        <p:txBody>
+          <a:bodyPr wrap="square" lIns="0" tIns="0" rIns="0" bIns="0" rtlCol="0" anchor="ctr"/>
+          <a:lstStyle/>
+          <a:p>
+            <a:pPr algn="ctr" indent="0" marL="0">
+              <a:buNone/>
+            </a:pPr>
+            <a:r>
+              <a:rPr lang="en-US" sz="1300" b="1" dirty="0">
+                <a:solidFill>
+                  <a:srgbClr val="17313B"/>
+                </a:solidFill>
+                <a:latin typeface="Malgun Gothic" pitchFamily="34" charset="0"/>
+                <a:ea typeface="Malgun Gothic" pitchFamily="34" charset="-122"/>
+                <a:cs typeface="Malgun Gothic" pitchFamily="34" charset="-120"/>
+              </a:rPr>
+              <a:t>2</a:t>
+            </a:r>
+            <a:endParaRPr lang="en-US" sz="1300" dirty="0"/>
+          </a:p>
+        </p:txBody>
+      </p:sp>
+      <p:sp>
+        <p:nvSpPr>
+          <p:cNvPr id="16" name="Text 14"/>
+          <p:cNvSpPr/>
+          <p:nvPr/>
+        </p:nvSpPr>
+        <p:spPr>
+          <a:xfrm>
+            <a:off x="1993392" y="3493008"/>
+            <a:ext cx="1481328" cy="256032"/>
+          </a:xfrm>
+          <a:prstGeom prst="rect">
+            <a:avLst/>
+          </a:prstGeom>
+          <a:noFill/>
+          <a:ln/>
+        </p:spPr>
+        <p:txBody>
+          <a:bodyPr wrap="square" lIns="0" tIns="0" rIns="0" bIns="0" rtlCol="0" anchor="ctr"/>
+          <a:lstStyle/>
+          <a:p>
+            <a:pPr algn="ctr" indent="0" marL="0">
+              <a:buNone/>
+            </a:pPr>
+            <a:r>
+              <a:rPr lang="en-US" sz="1100" b="1" dirty="0">
+                <a:solidFill>
+                  <a:srgbClr val="17313B"/>
+                </a:solidFill>
+                <a:latin typeface="Malgun Gothic" pitchFamily="34" charset="0"/>
+                <a:ea typeface="Malgun Gothic" pitchFamily="34" charset="-122"/>
+                <a:cs typeface="Malgun Gothic" pitchFamily="34" charset="-120"/>
+              </a:rPr>
+              <a:t>커스텀 펌웨어</a:t>
+            </a:r>
+            <a:endParaRPr lang="en-US" sz="1100" dirty="0"/>
+          </a:p>
+        </p:txBody>
+      </p:sp>
+      <p:sp>
+        <p:nvSpPr>
+          <p:cNvPr id="17" name="Text 15"/>
+          <p:cNvSpPr/>
+          <p:nvPr/>
+        </p:nvSpPr>
+        <p:spPr>
+          <a:xfrm>
+            <a:off x="2121408" y="5084064"/>
+            <a:ext cx="1225296" cy="237744"/>
+          </a:xfrm>
+          <a:prstGeom prst="rect">
+            <a:avLst/>
+          </a:prstGeom>
+          <a:noFill/>
+          <a:ln/>
+        </p:spPr>
+        <p:txBody>
+          <a:bodyPr wrap="square" lIns="0" tIns="0" rIns="0" bIns="0" rtlCol="0" anchor="ctr"/>
+          <a:lstStyle/>
+          <a:p>
+            <a:pPr algn="ctr" indent="0" marL="0">
+              <a:buNone/>
+            </a:pPr>
+            <a:r>
+              <a:rPr lang="en-US" sz="1050" dirty="0">
+                <a:solidFill>
+                  <a:srgbClr val="5A7184"/>
+                </a:solidFill>
+                <a:latin typeface="Malgun Gothic" pitchFamily="34" charset="0"/>
+                <a:ea typeface="Malgun Gothic" pitchFamily="34" charset="-122"/>
+                <a:cs typeface="Malgun Gothic" pitchFamily="34" charset="-120"/>
+              </a:rPr>
+              <a:t>2017~20</a:t>
+            </a:r>
+            <a:endParaRPr lang="en-US" sz="1050" dirty="0"/>
+          </a:p>
+        </p:txBody>
+      </p:sp>
+      <p:sp>
+        <p:nvSpPr>
+          <p:cNvPr id="18" name="Shape 16"/>
+          <p:cNvSpPr/>
+          <p:nvPr/>
+        </p:nvSpPr>
+        <p:spPr>
+          <a:xfrm>
+            <a:off x="3602736" y="3163824"/>
+            <a:ext cx="1225296" cy="1865376"/>
+          </a:xfrm>
+          <a:prstGeom prst="roundRect">
+            <a:avLst>
+              <a:gd name="adj" fmla="val 3731"/>
+            </a:avLst>
+          </a:prstGeom>
+          <a:solidFill>
+            <a:srgbClr val="4C7C94"/>
+          </a:solidFill>
+          <a:ln/>
+        </p:spPr>
+      </p:sp>
+      <p:sp>
+        <p:nvSpPr>
+          <p:cNvPr id="19" name="Text 17"/>
+          <p:cNvSpPr/>
+          <p:nvPr/>
+        </p:nvSpPr>
+        <p:spPr>
+          <a:xfrm>
+            <a:off x="3602736" y="3200400"/>
+            <a:ext cx="1225296" cy="274320"/>
+          </a:xfrm>
+          <a:prstGeom prst="rect">
+            <a:avLst/>
+          </a:prstGeom>
+          <a:noFill/>
+          <a:ln/>
+        </p:spPr>
+        <p:txBody>
+          <a:bodyPr wrap="square" lIns="0" tIns="0" rIns="0" bIns="0" rtlCol="0" anchor="ctr"/>
+          <a:lstStyle/>
+          <a:p>
+            <a:pPr algn="ctr" indent="0" marL="0">
+              <a:buNone/>
+            </a:pPr>
+            <a:r>
+              <a:rPr lang="en-US" sz="1300" b="1" dirty="0">
+                <a:solidFill>
+                  <a:srgbClr val="FFFFFF"/>
+                </a:solidFill>
+                <a:latin typeface="Malgun Gothic" pitchFamily="34" charset="0"/>
+                <a:ea typeface="Malgun Gothic" pitchFamily="34" charset="-122"/>
+                <a:cs typeface="Malgun Gothic" pitchFamily="34" charset="-120"/>
+              </a:rPr>
+              <a:t>3</a:t>
+            </a:r>
+            <a:endParaRPr lang="en-US" sz="1300" dirty="0"/>
+          </a:p>
+        </p:txBody>
+      </p:sp>
+      <p:sp>
+        <p:nvSpPr>
+          <p:cNvPr id="20" name="Text 18"/>
+          <p:cNvSpPr/>
+          <p:nvPr/>
+        </p:nvSpPr>
+        <p:spPr>
+          <a:xfrm>
+            <a:off x="3474720" y="2871216"/>
+            <a:ext cx="1481328" cy="256032"/>
+          </a:xfrm>
+          <a:prstGeom prst="rect">
+            <a:avLst/>
+          </a:prstGeom>
+          <a:noFill/>
+          <a:ln/>
+        </p:spPr>
+        <p:txBody>
+          <a:bodyPr wrap="square" lIns="0" tIns="0" rIns="0" bIns="0" rtlCol="0" anchor="ctr"/>
+          <a:lstStyle/>
+          <a:p>
+            <a:pPr algn="ctr" indent="0" marL="0">
+              <a:buNone/>
+            </a:pPr>
+            <a:r>
+              <a:rPr lang="en-US" sz="1100" b="1" dirty="0">
+                <a:solidFill>
+                  <a:srgbClr val="17313B"/>
+                </a:solidFill>
+                <a:latin typeface="Malgun Gothic" pitchFamily="34" charset="0"/>
+                <a:ea typeface="Malgun Gothic" pitchFamily="34" charset="-122"/>
+                <a:cs typeface="Malgun Gothic" pitchFamily="34" charset="-120"/>
+              </a:rPr>
+              <a:t>자체 컨트롤러</a:t>
+            </a:r>
+            <a:endParaRPr lang="en-US" sz="1100" dirty="0"/>
+          </a:p>
+        </p:txBody>
+      </p:sp>
+      <p:sp>
+        <p:nvSpPr>
+          <p:cNvPr id="21" name="Text 19"/>
+          <p:cNvSpPr/>
+          <p:nvPr/>
+        </p:nvSpPr>
+        <p:spPr>
+          <a:xfrm>
+            <a:off x="3602736" y="5084064"/>
+            <a:ext cx="1225296" cy="237744"/>
+          </a:xfrm>
+          <a:prstGeom prst="rect">
+            <a:avLst/>
+          </a:prstGeom>
+          <a:noFill/>
+          <a:ln/>
+        </p:spPr>
+        <p:txBody>
+          <a:bodyPr wrap="square" lIns="0" tIns="0" rIns="0" bIns="0" rtlCol="0" anchor="ctr"/>
+          <a:lstStyle/>
+          <a:p>
+            <a:pPr algn="ctr" indent="0" marL="0">
+              <a:buNone/>
+            </a:pPr>
+            <a:r>
+              <a:rPr lang="en-US" sz="1050" dirty="0">
+                <a:solidFill>
+                  <a:srgbClr val="5A7184"/>
+                </a:solidFill>
+                <a:latin typeface="Malgun Gothic" pitchFamily="34" charset="0"/>
+                <a:ea typeface="Malgun Gothic" pitchFamily="34" charset="-122"/>
+                <a:cs typeface="Malgun Gothic" pitchFamily="34" charset="-120"/>
+              </a:rPr>
+              <a:t>2021~</a:t>
+            </a:r>
+            <a:endParaRPr lang="en-US" sz="1050" dirty="0"/>
+          </a:p>
+        </p:txBody>
+      </p:sp>
+      <p:sp>
+        <p:nvSpPr>
+          <p:cNvPr id="22" name="Shape 20"/>
+          <p:cNvSpPr/>
+          <p:nvPr/>
+        </p:nvSpPr>
+        <p:spPr>
+          <a:xfrm>
+            <a:off x="5084064" y="2542032"/>
+            <a:ext cx="1225296" cy="2487168"/>
+          </a:xfrm>
+          <a:prstGeom prst="roundRect">
+            <a:avLst>
+              <a:gd name="adj" fmla="val 3731"/>
+            </a:avLst>
+          </a:prstGeom>
+          <a:solidFill>
+            <a:srgbClr val="028090"/>
+          </a:solidFill>
+          <a:ln/>
+        </p:spPr>
+      </p:sp>
+      <p:sp>
+        <p:nvSpPr>
+          <p:cNvPr id="23" name="Text 21"/>
+          <p:cNvSpPr/>
+          <p:nvPr/>
+        </p:nvSpPr>
+        <p:spPr>
+          <a:xfrm>
+            <a:off x="5084064" y="2578608"/>
+            <a:ext cx="1225296" cy="274320"/>
+          </a:xfrm>
+          <a:prstGeom prst="rect">
+            <a:avLst/>
+          </a:prstGeom>
+          <a:noFill/>
+          <a:ln/>
+        </p:spPr>
+        <p:txBody>
+          <a:bodyPr wrap="square" lIns="0" tIns="0" rIns="0" bIns="0" rtlCol="0" anchor="ctr"/>
+          <a:lstStyle/>
+          <a:p>
+            <a:pPr algn="ctr" indent="0" marL="0">
+              <a:buNone/>
+            </a:pPr>
+            <a:r>
+              <a:rPr lang="en-US" sz="1300" b="1" dirty="0">
+                <a:solidFill>
+                  <a:srgbClr val="FFFFFF"/>
+                </a:solidFill>
+                <a:latin typeface="Malgun Gothic" pitchFamily="34" charset="0"/>
+                <a:ea typeface="Malgun Gothic" pitchFamily="34" charset="-122"/>
+                <a:cs typeface="Malgun Gothic" pitchFamily="34" charset="-120"/>
+              </a:rPr>
+              <a:t>4</a:t>
+            </a:r>
+            <a:endParaRPr lang="en-US" sz="1300" dirty="0"/>
+          </a:p>
+        </p:txBody>
+      </p:sp>
+      <p:sp>
+        <p:nvSpPr>
+          <p:cNvPr id="24" name="Text 22"/>
+          <p:cNvSpPr/>
+          <p:nvPr/>
+        </p:nvSpPr>
+        <p:spPr>
+          <a:xfrm>
+            <a:off x="4956048" y="2249424"/>
+            <a:ext cx="1481328" cy="256032"/>
+          </a:xfrm>
+          <a:prstGeom prst="rect">
+            <a:avLst/>
+          </a:prstGeom>
+          <a:noFill/>
+          <a:ln/>
+        </p:spPr>
+        <p:txBody>
+          <a:bodyPr wrap="square" lIns="0" tIns="0" rIns="0" bIns="0" rtlCol="0" anchor="ctr"/>
+          <a:lstStyle/>
+          <a:p>
+            <a:pPr algn="ctr" indent="0" marL="0">
+              <a:buNone/>
+            </a:pPr>
+            <a:r>
+              <a:rPr lang="en-US" sz="1100" b="1" dirty="0">
+                <a:solidFill>
+                  <a:srgbClr val="17313B"/>
+                </a:solidFill>
+                <a:latin typeface="Malgun Gothic" pitchFamily="34" charset="0"/>
+                <a:ea typeface="Malgun Gothic" pitchFamily="34" charset="-122"/>
+                <a:cs typeface="Malgun Gothic" pitchFamily="34" charset="-120"/>
+              </a:rPr>
+              <a:t>표준·웨이퍼</a:t>
+            </a:r>
+            <a:endParaRPr lang="en-US" sz="1100" dirty="0"/>
+          </a:p>
+        </p:txBody>
+      </p:sp>
+      <p:sp>
+        <p:nvSpPr>
+          <p:cNvPr id="25" name="Text 23"/>
+          <p:cNvSpPr/>
+          <p:nvPr/>
+        </p:nvSpPr>
+        <p:spPr>
+          <a:xfrm>
+            <a:off x="5084064" y="5084064"/>
+            <a:ext cx="1225296" cy="237744"/>
+          </a:xfrm>
+          <a:prstGeom prst="rect">
+            <a:avLst/>
+          </a:prstGeom>
+          <a:noFill/>
+          <a:ln/>
+        </p:spPr>
+        <p:txBody>
+          <a:bodyPr wrap="square" lIns="0" tIns="0" rIns="0" bIns="0" rtlCol="0" anchor="ctr"/>
+          <a:lstStyle/>
+          <a:p>
+            <a:pPr algn="ctr" indent="0" marL="0">
+              <a:buNone/>
+            </a:pPr>
+            <a:r>
+              <a:rPr lang="en-US" sz="1050" dirty="0">
+                <a:solidFill>
+                  <a:srgbClr val="5A7184"/>
+                </a:solidFill>
+                <a:latin typeface="Malgun Gothic" pitchFamily="34" charset="0"/>
+                <a:ea typeface="Malgun Gothic" pitchFamily="34" charset="-122"/>
+                <a:cs typeface="Malgun Gothic" pitchFamily="34" charset="-120"/>
+              </a:rPr>
+              <a:t>2022~26</a:t>
+            </a:r>
+            <a:endParaRPr lang="en-US" sz="1050" dirty="0"/>
+          </a:p>
+        </p:txBody>
+      </p:sp>
+      <p:sp>
+        <p:nvSpPr>
+          <p:cNvPr id="26" name="Shape 24"/>
+          <p:cNvSpPr/>
+          <p:nvPr/>
+        </p:nvSpPr>
+        <p:spPr>
+          <a:xfrm>
+            <a:off x="548640" y="5029200"/>
+            <a:ext cx="6126480" cy="0"/>
+          </a:xfrm>
+          <a:prstGeom prst="line">
+            <a:avLst/>
+          </a:prstGeom>
+          <a:noFill/>
+          <a:ln w="19050">
             <a:solidFill>
-              <a:srgbClr val="DCE4E9"/>
+              <a:srgbClr val="C4CFD6"/>
             </a:solidFill>
+            <a:prstDash val="solid"/>
           </a:ln>
         </p:spPr>
+      </p:sp>
+      <p:sp>
+        <p:nvSpPr>
+          <p:cNvPr id="27" name="Text 25"/>
+          <p:cNvSpPr/>
+          <p:nvPr/>
+        </p:nvSpPr>
+        <p:spPr>
+          <a:xfrm>
+            <a:off x="7040880" y="2441448"/>
+            <a:ext cx="274320" cy="274320"/>
+          </a:xfrm>
+          <a:prstGeom prst="ellipse">
+            <a:avLst/>
+          </a:prstGeom>
+          <a:solidFill>
+            <a:srgbClr val="5A7184"/>
+          </a:solidFill>
+          <a:ln/>
+        </p:spPr>
         <p:txBody>
           <a:bodyPr wrap="square" lIns="0" tIns="0" rIns="0" bIns="0" rtlCol="0" anchor="ctr"/>
           <a:lstStyle/>
           <a:p>
             <a:pPr algn="ctr" indent="0" marL="0">
+              <a:buNone/>
+            </a:pPr>
+            <a:r>
+              <a:rPr lang="en-US" sz="1100" b="1" dirty="0">
+                <a:solidFill>
+                  <a:srgbClr val="FFFFFF"/>
+                </a:solidFill>
+                <a:latin typeface="Malgun Gothic" pitchFamily="34" charset="0"/>
+                <a:ea typeface="Malgun Gothic" pitchFamily="34" charset="-122"/>
+                <a:cs typeface="Malgun Gothic" pitchFamily="34" charset="-120"/>
+              </a:rPr>
+              <a:t>1</a:t>
+            </a:r>
+            <a:endParaRPr lang="en-US" sz="1100" dirty="0"/>
+          </a:p>
+        </p:txBody>
+      </p:sp>
+      <p:sp>
+        <p:nvSpPr>
+          <p:cNvPr id="28" name="Text 26"/>
+          <p:cNvSpPr/>
+          <p:nvPr/>
+        </p:nvSpPr>
+        <p:spPr>
+          <a:xfrm>
+            <a:off x="7424928" y="2395728"/>
+            <a:ext cx="4206240" cy="603504"/>
+          </a:xfrm>
+          <a:prstGeom prst="rect">
+            <a:avLst/>
+          </a:prstGeom>
+          <a:noFill/>
+          <a:ln/>
+        </p:spPr>
+        <p:txBody>
+          <a:bodyPr wrap="square" lIns="0" tIns="0" rIns="0" bIns="0" rtlCol="0" anchor="ctr"/>
+          <a:lstStyle/>
+          <a:p>
+            <a:pPr indent="0" marL="0">
               <a:lnSpc>
                 <a:spcPct val="105000"/>
               </a:lnSpc>
               <a:buNone/>
             </a:pPr>
             <a:r>
-              <a:rPr lang="en-US" sz="1200" b="1" dirty="0">
+              <a:rPr lang="en-US" sz="1100" dirty="0">
                 <a:solidFill>
                   <a:srgbClr val="17313B"/>
                 </a:solidFill>
@@ -1819,47 +2099,112 @@
                 <a:ea typeface="Malgun Gothic" pitchFamily="34" charset="-122"/>
                 <a:cs typeface="Malgun Gothic" pitchFamily="34" charset="-120"/>
               </a:rPr>
-              <a:t>Binding 계약</a:t>
-            </a:r>
-            <a:endParaRPr lang="en-US" sz="1200" dirty="0"/>
-          </a:p>
+              <a:t>벤더 표준품 조달 — 통제권 없음</a:t>
+            </a:r>
+            <a:endParaRPr lang="en-US" sz="1100" dirty="0"/>
+          </a:p>
+        </p:txBody>
+      </p:sp>
+      <p:sp>
+        <p:nvSpPr>
+          <p:cNvPr id="29" name="Text 27"/>
+          <p:cNvSpPr/>
+          <p:nvPr/>
+        </p:nvSpPr>
+        <p:spPr>
+          <a:xfrm>
+            <a:off x="7040880" y="3118104"/>
+            <a:ext cx="274320" cy="274320"/>
+          </a:xfrm>
+          <a:prstGeom prst="ellipse">
+            <a:avLst/>
+          </a:prstGeom>
+          <a:solidFill>
+            <a:srgbClr val="5A7184"/>
+          </a:solidFill>
+          <a:ln/>
+        </p:spPr>
+        <p:txBody>
+          <a:bodyPr wrap="square" lIns="0" tIns="0" rIns="0" bIns="0" rtlCol="0" anchor="ctr"/>
+          <a:lstStyle/>
           <a:p>
             <a:pPr algn="ctr" indent="0" marL="0">
+              <a:buNone/>
+            </a:pPr>
+            <a:r>
+              <a:rPr lang="en-US" sz="1100" b="1" dirty="0">
+                <a:solidFill>
+                  <a:srgbClr val="FFFFFF"/>
+                </a:solidFill>
+                <a:latin typeface="Malgun Gothic" pitchFamily="34" charset="0"/>
+                <a:ea typeface="Malgun Gothic" pitchFamily="34" charset="-122"/>
+                <a:cs typeface="Malgun Gothic" pitchFamily="34" charset="-120"/>
+              </a:rPr>
+              <a:t>2</a:t>
+            </a:r>
+            <a:endParaRPr lang="en-US" sz="1100" dirty="0"/>
+          </a:p>
+        </p:txBody>
+      </p:sp>
+      <p:sp>
+        <p:nvSpPr>
+          <p:cNvPr id="30" name="Text 28"/>
+          <p:cNvSpPr/>
+          <p:nvPr/>
+        </p:nvSpPr>
+        <p:spPr>
+          <a:xfrm>
+            <a:off x="7424928" y="3072384"/>
+            <a:ext cx="4206240" cy="603504"/>
+          </a:xfrm>
+          <a:prstGeom prst="rect">
+            <a:avLst/>
+          </a:prstGeom>
+          <a:noFill/>
+          <a:ln/>
+        </p:spPr>
+        <p:txBody>
+          <a:bodyPr wrap="square" lIns="0" tIns="0" rIns="0" bIns="0" rtlCol="0" anchor="ctr"/>
+          <a:lstStyle/>
+          <a:p>
+            <a:pPr indent="0" marL="0">
               <a:lnSpc>
                 <a:spcPct val="105000"/>
               </a:lnSpc>
               <a:buNone/>
             </a:pPr>
             <a:r>
-              <a:rPr lang="en-US" sz="950" dirty="0">
-                <a:solidFill>
-                  <a:srgbClr val="5A7184"/>
-                </a:solidFill>
-                <a:latin typeface="Malgun Gothic" pitchFamily="34" charset="0"/>
-                <a:ea typeface="Malgun Gothic" pitchFamily="34" charset="-122"/>
-                <a:cs typeface="Malgun Gothic" pitchFamily="34" charset="-120"/>
-              </a:rPr>
-              <a:t>장기 물량 확보</a:t>
-            </a:r>
-            <a:endParaRPr lang="en-US" sz="1200" dirty="0"/>
-          </a:p>
-        </p:txBody>
-      </p:sp>
-      <p:sp>
-        <p:nvSpPr>
-          <p:cNvPr id="24" name="Text 20"/>
-          <p:cNvSpPr/>
-          <p:nvPr/>
-        </p:nvSpPr>
-        <p:spPr>
-          <a:xfrm>
-            <a:off x="2139696" y="4718304"/>
-            <a:ext cx="201168" cy="731520"/>
-          </a:xfrm>
-          <a:prstGeom prst="rect">
-            <a:avLst/>
-          </a:prstGeom>
-          <a:noFill/>
+              <a:rPr lang="en-US" sz="1100" dirty="0">
+                <a:solidFill>
+                  <a:srgbClr val="17313B"/>
+                </a:solidFill>
+                <a:latin typeface="Malgun Gothic" pitchFamily="34" charset="0"/>
+                <a:ea typeface="Malgun Gothic" pitchFamily="34" charset="-122"/>
+                <a:cs typeface="Malgun Gothic" pitchFamily="34" charset="-120"/>
+              </a:rPr>
+              <a:t>OCP 스토리지 스펙 · 고객별 펌웨어 브랜치 관행</a:t>
+            </a:r>
+            <a:endParaRPr lang="en-US" sz="1100" dirty="0"/>
+          </a:p>
+        </p:txBody>
+      </p:sp>
+      <p:sp>
+        <p:nvSpPr>
+          <p:cNvPr id="31" name="Text 29"/>
+          <p:cNvSpPr/>
+          <p:nvPr/>
+        </p:nvSpPr>
+        <p:spPr>
+          <a:xfrm>
+            <a:off x="7040880" y="3794760"/>
+            <a:ext cx="274320" cy="274320"/>
+          </a:xfrm>
+          <a:prstGeom prst="ellipse">
+            <a:avLst/>
+          </a:prstGeom>
+          <a:solidFill>
+            <a:srgbClr val="5A7184"/>
+          </a:solidFill>
           <a:ln/>
         </p:spPr>
         <p:txBody>
@@ -1870,57 +2215,49 @@
               <a:buNone/>
             </a:pPr>
             <a:r>
-              <a:rPr lang="en-US" sz="1050" dirty="0">
-                <a:solidFill>
-                  <a:srgbClr val="5A7184"/>
-                </a:solidFill>
-                <a:latin typeface="Malgun Gothic" pitchFamily="34" charset="0"/>
-                <a:ea typeface="Malgun Gothic" pitchFamily="34" charset="-122"/>
-                <a:cs typeface="Malgun Gothic" pitchFamily="34" charset="-120"/>
-              </a:rPr>
-              <a:t>▶</a:t>
-            </a:r>
-            <a:endParaRPr lang="en-US" sz="1050" dirty="0"/>
-          </a:p>
-        </p:txBody>
-      </p:sp>
-      <p:sp>
-        <p:nvSpPr>
-          <p:cNvPr id="25" name="Text 21"/>
-          <p:cNvSpPr/>
-          <p:nvPr/>
-        </p:nvSpPr>
-        <p:spPr>
-          <a:xfrm>
-            <a:off x="2340864" y="4718304"/>
-            <a:ext cx="1682496" cy="731520"/>
-          </a:xfrm>
-          <a:prstGeom prst="roundRect">
-            <a:avLst>
-              <a:gd name="adj" fmla="val 8750"/>
-            </a:avLst>
-          </a:prstGeom>
-          <a:solidFill>
-            <a:srgbClr val="FFFFFF"/>
-          </a:solidFill>
-          <a:ln w="12700">
-            <a:solidFill>
-              <a:srgbClr val="DCE4E9"/>
-            </a:solidFill>
-          </a:ln>
-        </p:spPr>
-        <p:txBody>
-          <a:bodyPr wrap="square" lIns="0" tIns="0" rIns="0" bIns="0" rtlCol="0" anchor="ctr"/>
-          <a:lstStyle/>
-          <a:p>
-            <a:pPr algn="ctr" indent="0" marL="0">
+              <a:rPr lang="en-US" sz="1100" b="1" dirty="0">
+                <a:solidFill>
+                  <a:srgbClr val="FFFFFF"/>
+                </a:solidFill>
+                <a:latin typeface="Malgun Gothic" pitchFamily="34" charset="0"/>
+                <a:ea typeface="Malgun Gothic" pitchFamily="34" charset="-122"/>
+                <a:cs typeface="Malgun Gothic" pitchFamily="34" charset="-120"/>
+              </a:rPr>
+              <a:t>3</a:t>
+            </a:r>
+            <a:endParaRPr lang="en-US" sz="1100" dirty="0"/>
+          </a:p>
+        </p:txBody>
+      </p:sp>
+      <p:sp>
+        <p:nvSpPr>
+          <p:cNvPr id="32" name="Text 30"/>
+          <p:cNvSpPr/>
+          <p:nvPr/>
+        </p:nvSpPr>
+        <p:spPr>
+          <a:xfrm>
+            <a:off x="7424928" y="3749040"/>
+            <a:ext cx="4206240" cy="603504"/>
+          </a:xfrm>
+          <a:prstGeom prst="rect">
+            <a:avLst/>
+          </a:prstGeom>
+          <a:noFill/>
+          <a:ln/>
+        </p:spPr>
+        <p:txBody>
+          <a:bodyPr wrap="square" lIns="0" tIns="0" rIns="0" bIns="0" rtlCol="0" anchor="ctr"/>
+          <a:lstStyle/>
+          <a:p>
+            <a:pPr indent="0" marL="0">
               <a:lnSpc>
                 <a:spcPct val="105000"/>
               </a:lnSpc>
               <a:buNone/>
             </a:pPr>
             <a:r>
-              <a:rPr lang="en-US" sz="1200" b="1" dirty="0">
+              <a:rPr lang="en-US" sz="1100" dirty="0">
                 <a:solidFill>
                   <a:srgbClr val="17313B"/>
                 </a:solidFill>
@@ -1928,19 +2265,160 @@
                 <a:ea typeface="Malgun Gothic" pitchFamily="34" charset="-122"/>
                 <a:cs typeface="Malgun Gothic" pitchFamily="34" charset="-120"/>
               </a:rPr>
-              <a:t>FDP 표준 SSD</a:t>
-            </a:r>
-            <a:endParaRPr lang="en-US" sz="1200" dirty="0"/>
-          </a:p>
+              <a:t>AWS Nitro SSD(’21) — 자체 컨트롤러 자작 SSD</a:t>
+            </a:r>
+            <a:endParaRPr lang="en-US" sz="1100" dirty="0"/>
+          </a:p>
+        </p:txBody>
+      </p:sp>
+      <p:sp>
+        <p:nvSpPr>
+          <p:cNvPr id="33" name="Text 31"/>
+          <p:cNvSpPr/>
+          <p:nvPr/>
+        </p:nvSpPr>
+        <p:spPr>
+          <a:xfrm>
+            <a:off x="7040880" y="4471416"/>
+            <a:ext cx="274320" cy="274320"/>
+          </a:xfrm>
+          <a:prstGeom prst="ellipse">
+            <a:avLst/>
+          </a:prstGeom>
+          <a:solidFill>
+            <a:srgbClr val="028090"/>
+          </a:solidFill>
+          <a:ln/>
+        </p:spPr>
+        <p:txBody>
+          <a:bodyPr wrap="square" lIns="0" tIns="0" rIns="0" bIns="0" rtlCol="0" anchor="ctr"/>
+          <a:lstStyle/>
           <a:p>
             <a:pPr algn="ctr" indent="0" marL="0">
+              <a:buNone/>
+            </a:pPr>
+            <a:r>
+              <a:rPr lang="en-US" sz="1100" b="1" dirty="0">
+                <a:solidFill>
+                  <a:srgbClr val="FFFFFF"/>
+                </a:solidFill>
+                <a:latin typeface="Malgun Gothic" pitchFamily="34" charset="0"/>
+                <a:ea typeface="Malgun Gothic" pitchFamily="34" charset="-122"/>
+                <a:cs typeface="Malgun Gothic" pitchFamily="34" charset="-120"/>
+              </a:rPr>
+              <a:t>4</a:t>
+            </a:r>
+            <a:endParaRPr lang="en-US" sz="1100" dirty="0"/>
+          </a:p>
+        </p:txBody>
+      </p:sp>
+      <p:sp>
+        <p:nvSpPr>
+          <p:cNvPr id="34" name="Text 32"/>
+          <p:cNvSpPr/>
+          <p:nvPr/>
+        </p:nvSpPr>
+        <p:spPr>
+          <a:xfrm>
+            <a:off x="7424928" y="4425696"/>
+            <a:ext cx="4206240" cy="603504"/>
+          </a:xfrm>
+          <a:prstGeom prst="rect">
+            <a:avLst/>
+          </a:prstGeom>
+          <a:noFill/>
+          <a:ln/>
+        </p:spPr>
+        <p:txBody>
+          <a:bodyPr wrap="square" lIns="0" tIns="0" rIns="0" bIns="0" rtlCol="0" anchor="ctr"/>
+          <a:lstStyle/>
+          <a:p>
+            <a:pPr indent="0" marL="0">
               <a:lnSpc>
                 <a:spcPct val="105000"/>
               </a:lnSpc>
               <a:buNone/>
             </a:pPr>
             <a:r>
-              <a:rPr lang="en-US" sz="950" dirty="0">
+              <a:rPr lang="en-US" sz="1100" dirty="0">
+                <a:solidFill>
+                  <a:srgbClr val="17313B"/>
+                </a:solidFill>
+                <a:latin typeface="Malgun Gothic" pitchFamily="34" charset="0"/>
+                <a:ea typeface="Malgun Gothic" pitchFamily="34" charset="-122"/>
+                <a:cs typeface="Malgun Gothic" pitchFamily="34" charset="-120"/>
+              </a:rPr>
+              <a:t>FDP 표준 비준(’23) — Meta·Google 주도·삼성 공동 · NAND 웨이퍼 다년 계약</a:t>
+            </a:r>
+            <a:endParaRPr lang="en-US" sz="1100" dirty="0"/>
+          </a:p>
+        </p:txBody>
+      </p:sp>
+      <p:sp>
+        <p:nvSpPr>
+          <p:cNvPr id="35" name="Text 33"/>
+          <p:cNvSpPr/>
+          <p:nvPr/>
+        </p:nvSpPr>
+        <p:spPr>
+          <a:xfrm>
+            <a:off x="457200" y="5541264"/>
+            <a:ext cx="3602736" cy="365760"/>
+          </a:xfrm>
+          <a:prstGeom prst="rect">
+            <a:avLst/>
+          </a:prstGeom>
+          <a:noFill/>
+          <a:ln/>
+        </p:spPr>
+        <p:txBody>
+          <a:bodyPr wrap="square" lIns="0" tIns="0" rIns="0" bIns="0" rtlCol="0" anchor="ctr"/>
+          <a:lstStyle/>
+          <a:p>
+            <a:pPr algn="ctr" indent="0" marL="0">
+              <a:buNone/>
+            </a:pPr>
+            <a:r>
+              <a:rPr lang="en-US" sz="2200" b="1" dirty="0">
+                <a:solidFill>
+                  <a:srgbClr val="17313B"/>
+                </a:solidFill>
+                <a:latin typeface="Malgun Gothic" pitchFamily="34" charset="0"/>
+                <a:ea typeface="Malgun Gothic" pitchFamily="34" charset="-122"/>
+                <a:cs typeface="Malgun Gothic" pitchFamily="34" charset="-120"/>
+              </a:rPr>
+              <a:t>~55%</a:t>
+            </a:r>
+            <a:endParaRPr lang="en-US" sz="2200" dirty="0"/>
+          </a:p>
+        </p:txBody>
+      </p:sp>
+      <p:sp>
+        <p:nvSpPr>
+          <p:cNvPr id="36" name="Text 34"/>
+          <p:cNvSpPr/>
+          <p:nvPr/>
+        </p:nvSpPr>
+        <p:spPr>
+          <a:xfrm>
+            <a:off x="457200" y="5925312"/>
+            <a:ext cx="3602736" cy="256032"/>
+          </a:xfrm>
+          <a:prstGeom prst="rect">
+            <a:avLst/>
+          </a:prstGeom>
+          <a:noFill/>
+          <a:ln/>
+        </p:spPr>
+        <p:txBody>
+          <a:bodyPr wrap="square" lIns="0" tIns="0" rIns="0" bIns="0" rtlCol="0" anchor="ctr"/>
+          <a:lstStyle/>
+          <a:p>
+            <a:pPr algn="ctr" indent="0" marL="0">
+              <a:buNone/>
+            </a:pPr>
+            <a:r>
+              <a:rPr lang="en-US" sz="1050" dirty="0">
                 <a:solidFill>
                   <a:srgbClr val="5A7184"/>
                 </a:solidFill>
@@ -1948,22 +2426,22 @@
                 <a:ea typeface="Malgun Gothic" pitchFamily="34" charset="-122"/>
                 <a:cs typeface="Malgun Gothic" pitchFamily="34" charset="-120"/>
               </a:rPr>
-              <a:t>공통 인터페이스</a:t>
-            </a:r>
-            <a:endParaRPr lang="en-US" sz="1200" dirty="0"/>
-          </a:p>
-        </p:txBody>
-      </p:sp>
-      <p:sp>
-        <p:nvSpPr>
-          <p:cNvPr id="26" name="Text 22"/>
-          <p:cNvSpPr/>
-          <p:nvPr/>
-        </p:nvSpPr>
-        <p:spPr>
-          <a:xfrm>
-            <a:off x="4023360" y="4718304"/>
-            <a:ext cx="201168" cy="731520"/>
+              <a:t>하이퍼스케일러의 enterprise SSD 수요 비중</a:t>
+            </a:r>
+            <a:endParaRPr lang="en-US" sz="1050" dirty="0"/>
+          </a:p>
+        </p:txBody>
+      </p:sp>
+      <p:sp>
+        <p:nvSpPr>
+          <p:cNvPr id="37" name="Text 35"/>
+          <p:cNvSpPr/>
+          <p:nvPr/>
+        </p:nvSpPr>
+        <p:spPr>
+          <a:xfrm>
+            <a:off x="4297680" y="5541264"/>
+            <a:ext cx="3602736" cy="365760"/>
           </a:xfrm>
           <a:prstGeom prst="rect">
             <a:avLst/>
@@ -1979,6 +2457,45 @@
               <a:buNone/>
             </a:pPr>
             <a:r>
+              <a:rPr lang="en-US" sz="2200" b="1" dirty="0">
+                <a:solidFill>
+                  <a:srgbClr val="17313B"/>
+                </a:solidFill>
+                <a:latin typeface="Malgun Gothic" pitchFamily="34" charset="0"/>
+                <a:ea typeface="Malgun Gothic" pitchFamily="34" charset="-122"/>
+                <a:cs typeface="Malgun Gothic" pitchFamily="34" charset="-120"/>
+              </a:rPr>
+              <a:t>+246%</a:t>
+            </a:r>
+            <a:endParaRPr lang="en-US" sz="2200" dirty="0"/>
+          </a:p>
+        </p:txBody>
+      </p:sp>
+      <p:sp>
+        <p:nvSpPr>
+          <p:cNvPr id="38" name="Text 36"/>
+          <p:cNvSpPr/>
+          <p:nvPr/>
+        </p:nvSpPr>
+        <p:spPr>
+          <a:xfrm>
+            <a:off x="4297680" y="5925312"/>
+            <a:ext cx="3602736" cy="256032"/>
+          </a:xfrm>
+          <a:prstGeom prst="rect">
+            <a:avLst/>
+          </a:prstGeom>
+          <a:noFill/>
+          <a:ln/>
+        </p:spPr>
+        <p:txBody>
+          <a:bodyPr wrap="square" lIns="0" tIns="0" rIns="0" bIns="0" rtlCol="0" anchor="ctr"/>
+          <a:lstStyle/>
+          <a:p>
+            <a:pPr algn="ctr" indent="0" marL="0">
+              <a:buNone/>
+            </a:pPr>
+            <a:r>
               <a:rPr lang="en-US" sz="1050" dirty="0">
                 <a:solidFill>
                   <a:srgbClr val="5A7184"/>
@@ -1987,7 +2504,7 @@
                 <a:ea typeface="Malgun Gothic" pitchFamily="34" charset="-122"/>
                 <a:cs typeface="Malgun Gothic" pitchFamily="34" charset="-120"/>
               </a:rPr>
-              <a:t>▶</a:t>
+              <a:t>NAND 웨이퍼 가격 (vs Q1’25) — 웨이퍼 직구매 경쟁</a:t>
             </a:r>
             <a:endParaRPr lang="en-US" sz="1050" dirty="0"/>
           </a:p>
@@ -1995,61 +2512,69 @@
       </p:sp>
       <p:sp>
         <p:nvSpPr>
-          <p:cNvPr id="27" name="Text 23"/>
-          <p:cNvSpPr/>
-          <p:nvPr/>
-        </p:nvSpPr>
-        <p:spPr>
-          <a:xfrm>
-            <a:off x="4224528" y="4718304"/>
-            <a:ext cx="1682496" cy="731520"/>
-          </a:xfrm>
-          <a:prstGeom prst="roundRect">
-            <a:avLst>
-              <a:gd name="adj" fmla="val 8750"/>
-            </a:avLst>
-          </a:prstGeom>
-          <a:solidFill>
-            <a:srgbClr val="E8F6F0"/>
-          </a:solidFill>
-          <a:ln w="15875">
-            <a:solidFill>
-              <a:srgbClr val="02A878"/>
-            </a:solidFill>
-          </a:ln>
+          <p:cNvPr id="39" name="Text 37"/>
+          <p:cNvSpPr/>
+          <p:nvPr/>
+        </p:nvSpPr>
+        <p:spPr>
+          <a:xfrm>
+            <a:off x="8138160" y="5541264"/>
+            <a:ext cx="3602736" cy="365760"/>
+          </a:xfrm>
+          <a:prstGeom prst="rect">
+            <a:avLst/>
+          </a:prstGeom>
+          <a:noFill/>
+          <a:ln/>
         </p:spPr>
         <p:txBody>
           <a:bodyPr wrap="square" lIns="0" tIns="0" rIns="0" bIns="0" rtlCol="0" anchor="ctr"/>
           <a:lstStyle/>
           <a:p>
             <a:pPr algn="ctr" indent="0" marL="0">
-              <a:lnSpc>
-                <a:spcPct val="105000"/>
-              </a:lnSpc>
-              <a:buNone/>
-            </a:pPr>
-            <a:r>
-              <a:rPr lang="en-US" sz="1200" b="1" dirty="0">
-                <a:solidFill>
-                  <a:srgbClr val="02A878"/>
-                </a:solidFill>
-                <a:latin typeface="Malgun Gothic" pitchFamily="34" charset="0"/>
-                <a:ea typeface="Malgun Gothic" pitchFamily="34" charset="-122"/>
-                <a:cs typeface="Malgun Gothic" pitchFamily="34" charset="-120"/>
-              </a:rPr>
-              <a:t>시스템 SW</a:t>
-            </a:r>
-            <a:endParaRPr lang="en-US" sz="1200" dirty="0"/>
-          </a:p>
+              <a:buNone/>
+            </a:pPr>
+            <a:r>
+              <a:rPr lang="en-US" sz="2200" b="1" dirty="0">
+                <a:solidFill>
+                  <a:srgbClr val="028090"/>
+                </a:solidFill>
+                <a:latin typeface="Malgun Gothic" pitchFamily="34" charset="0"/>
+                <a:ea typeface="Malgun Gothic" pitchFamily="34" charset="-122"/>
+                <a:cs typeface="Malgun Gothic" pitchFamily="34" charset="-120"/>
+              </a:rPr>
+              <a:t>6개월</a:t>
+            </a:r>
+            <a:endParaRPr lang="en-US" sz="2200" dirty="0"/>
+          </a:p>
+        </p:txBody>
+      </p:sp>
+      <p:sp>
+        <p:nvSpPr>
+          <p:cNvPr id="40" name="Text 38"/>
+          <p:cNvSpPr/>
+          <p:nvPr/>
+        </p:nvSpPr>
+        <p:spPr>
+          <a:xfrm>
+            <a:off x="8138160" y="5925312"/>
+            <a:ext cx="3602736" cy="256032"/>
+          </a:xfrm>
+          <a:prstGeom prst="rect">
+            <a:avLst/>
+          </a:prstGeom>
+          <a:noFill/>
+          <a:ln/>
+        </p:spPr>
+        <p:txBody>
+          <a:bodyPr wrap="square" lIns="0" tIns="0" rIns="0" bIns="0" rtlCol="0" anchor="ctr"/>
+          <a:lstStyle/>
           <a:p>
             <a:pPr algn="ctr" indent="0" marL="0">
-              <a:lnSpc>
-                <a:spcPct val="105000"/>
-              </a:lnSpc>
-              <a:buNone/>
-            </a:pPr>
-            <a:r>
-              <a:rPr lang="en-US" sz="950" dirty="0">
+              <a:buNone/>
+            </a:pPr>
+            <a:r>
+              <a:rPr lang="en-US" sz="1050" dirty="0">
                 <a:solidFill>
                   <a:srgbClr val="5A7184"/>
                 </a:solidFill>
@@ -2057,375 +2582,9 @@
                 <a:ea typeface="Malgun Gothic" pitchFamily="34" charset="-122"/>
                 <a:cs typeface="Malgun Gothic" pitchFamily="34" charset="-120"/>
               </a:rPr>
-              <a:t>워크로드→정책 변환</a:t>
-            </a:r>
-            <a:endParaRPr lang="en-US" sz="1200" dirty="0"/>
-          </a:p>
-        </p:txBody>
-      </p:sp>
-      <p:sp>
-        <p:nvSpPr>
-          <p:cNvPr id="28" name="Text 24"/>
-          <p:cNvSpPr/>
-          <p:nvPr/>
-        </p:nvSpPr>
-        <p:spPr>
-          <a:xfrm>
-            <a:off x="5907024" y="4718304"/>
-            <a:ext cx="201168" cy="731520"/>
-          </a:xfrm>
-          <a:prstGeom prst="rect">
-            <a:avLst/>
-          </a:prstGeom>
-          <a:noFill/>
-          <a:ln/>
-        </p:spPr>
-        <p:txBody>
-          <a:bodyPr wrap="square" lIns="0" tIns="0" rIns="0" bIns="0" rtlCol="0" anchor="ctr"/>
-          <a:lstStyle/>
-          <a:p>
-            <a:pPr algn="ctr" indent="0" marL="0">
-              <a:buNone/>
-            </a:pPr>
-            <a:r>
-              <a:rPr lang="en-US" sz="1050" dirty="0">
-                <a:solidFill>
-                  <a:srgbClr val="5A7184"/>
-                </a:solidFill>
-                <a:latin typeface="Malgun Gothic" pitchFamily="34" charset="0"/>
-                <a:ea typeface="Malgun Gothic" pitchFamily="34" charset="-122"/>
-                <a:cs typeface="Malgun Gothic" pitchFamily="34" charset="-120"/>
-              </a:rPr>
-              <a:t>▶</a:t>
+              <a:t>FDP 표준 비준 소요 — 고객(Meta·Google) 주도 속도</a:t>
             </a:r>
             <a:endParaRPr lang="en-US" sz="1050" dirty="0"/>
-          </a:p>
-        </p:txBody>
-      </p:sp>
-      <p:sp>
-        <p:nvSpPr>
-          <p:cNvPr id="29" name="Text 25"/>
-          <p:cNvSpPr/>
-          <p:nvPr/>
-        </p:nvSpPr>
-        <p:spPr>
-          <a:xfrm>
-            <a:off x="6108192" y="4718304"/>
-            <a:ext cx="1682496" cy="731520"/>
-          </a:xfrm>
-          <a:prstGeom prst="roundRect">
-            <a:avLst>
-              <a:gd name="adj" fmla="val 8750"/>
-            </a:avLst>
-          </a:prstGeom>
-          <a:solidFill>
-            <a:srgbClr val="FFFFFF"/>
-          </a:solidFill>
-          <a:ln w="12700">
-            <a:solidFill>
-              <a:srgbClr val="DCE4E9"/>
-            </a:solidFill>
-          </a:ln>
-        </p:spPr>
-        <p:txBody>
-          <a:bodyPr wrap="square" lIns="0" tIns="0" rIns="0" bIns="0" rtlCol="0" anchor="ctr"/>
-          <a:lstStyle/>
-          <a:p>
-            <a:pPr algn="ctr" indent="0" marL="0">
-              <a:lnSpc>
-                <a:spcPct val="105000"/>
-              </a:lnSpc>
-              <a:buNone/>
-            </a:pPr>
-            <a:r>
-              <a:rPr lang="en-US" sz="1200" b="1" dirty="0">
-                <a:solidFill>
-                  <a:srgbClr val="17313B"/>
-                </a:solidFill>
-                <a:latin typeface="Malgun Gothic" pitchFamily="34" charset="0"/>
-                <a:ea typeface="Malgun Gothic" pitchFamily="34" charset="-122"/>
-                <a:cs typeface="Malgun Gothic" pitchFamily="34" charset="-120"/>
-              </a:rPr>
-              <a:t>E2E 검증</a:t>
-            </a:r>
-            <a:endParaRPr lang="en-US" sz="1200" dirty="0"/>
-          </a:p>
-          <a:p>
-            <a:pPr algn="ctr" indent="0" marL="0">
-              <a:lnSpc>
-                <a:spcPct val="105000"/>
-              </a:lnSpc>
-              <a:buNone/>
-            </a:pPr>
-            <a:r>
-              <a:rPr lang="en-US" sz="950" dirty="0">
-                <a:solidFill>
-                  <a:srgbClr val="5A7184"/>
-                </a:solidFill>
-                <a:latin typeface="Malgun Gothic" pitchFamily="34" charset="0"/>
-                <a:ea typeface="Malgun Gothic" pitchFamily="34" charset="-122"/>
-                <a:cs typeface="Malgun Gothic" pitchFamily="34" charset="-120"/>
-              </a:rPr>
-              <a:t>TCO 개선 보장</a:t>
-            </a:r>
-            <a:endParaRPr lang="en-US" sz="1200" dirty="0"/>
-          </a:p>
-        </p:txBody>
-      </p:sp>
-      <p:sp>
-        <p:nvSpPr>
-          <p:cNvPr id="30" name="Text 26"/>
-          <p:cNvSpPr/>
-          <p:nvPr/>
-        </p:nvSpPr>
-        <p:spPr>
-          <a:xfrm>
-            <a:off x="7790688" y="4718304"/>
-            <a:ext cx="201168" cy="731520"/>
-          </a:xfrm>
-          <a:prstGeom prst="rect">
-            <a:avLst/>
-          </a:prstGeom>
-          <a:noFill/>
-          <a:ln/>
-        </p:spPr>
-        <p:txBody>
-          <a:bodyPr wrap="square" lIns="0" tIns="0" rIns="0" bIns="0" rtlCol="0" anchor="ctr"/>
-          <a:lstStyle/>
-          <a:p>
-            <a:pPr algn="ctr" indent="0" marL="0">
-              <a:buNone/>
-            </a:pPr>
-            <a:r>
-              <a:rPr lang="en-US" sz="1050" dirty="0">
-                <a:solidFill>
-                  <a:srgbClr val="5A7184"/>
-                </a:solidFill>
-                <a:latin typeface="Malgun Gothic" pitchFamily="34" charset="0"/>
-                <a:ea typeface="Malgun Gothic" pitchFamily="34" charset="-122"/>
-                <a:cs typeface="Malgun Gothic" pitchFamily="34" charset="-120"/>
-              </a:rPr>
-              <a:t>▶</a:t>
-            </a:r>
-            <a:endParaRPr lang="en-US" sz="1050" dirty="0"/>
-          </a:p>
-        </p:txBody>
-      </p:sp>
-      <p:sp>
-        <p:nvSpPr>
-          <p:cNvPr id="31" name="Text 27"/>
-          <p:cNvSpPr/>
-          <p:nvPr/>
-        </p:nvSpPr>
-        <p:spPr>
-          <a:xfrm>
-            <a:off x="7991856" y="4718304"/>
-            <a:ext cx="1682496" cy="731520"/>
-          </a:xfrm>
-          <a:prstGeom prst="roundRect">
-            <a:avLst>
-              <a:gd name="adj" fmla="val 8750"/>
-            </a:avLst>
-          </a:prstGeom>
-          <a:solidFill>
-            <a:srgbClr val="FFFFFF"/>
-          </a:solidFill>
-          <a:ln w="12700">
-            <a:solidFill>
-              <a:srgbClr val="DCE4E9"/>
-            </a:solidFill>
-          </a:ln>
-        </p:spPr>
-        <p:txBody>
-          <a:bodyPr wrap="square" lIns="0" tIns="0" rIns="0" bIns="0" rtlCol="0" anchor="ctr"/>
-          <a:lstStyle/>
-          <a:p>
-            <a:pPr algn="ctr" indent="0" marL="0">
-              <a:lnSpc>
-                <a:spcPct val="105000"/>
-              </a:lnSpc>
-              <a:buNone/>
-            </a:pPr>
-            <a:r>
-              <a:rPr lang="en-US" sz="1200" b="1" dirty="0">
-                <a:solidFill>
-                  <a:srgbClr val="17313B"/>
-                </a:solidFill>
-                <a:latin typeface="Malgun Gothic" pitchFamily="34" charset="0"/>
-                <a:ea typeface="Malgun Gothic" pitchFamily="34" charset="-122"/>
-                <a:cs typeface="Malgun Gothic" pitchFamily="34" charset="-120"/>
-              </a:rPr>
-              <a:t>고객 공동개발</a:t>
-            </a:r>
-            <a:endParaRPr lang="en-US" sz="1200" dirty="0"/>
-          </a:p>
-          <a:p>
-            <a:pPr algn="ctr" indent="0" marL="0">
-              <a:lnSpc>
-                <a:spcPct val="105000"/>
-              </a:lnSpc>
-              <a:buNone/>
-            </a:pPr>
-            <a:r>
-              <a:rPr lang="en-US" sz="950" dirty="0">
-                <a:solidFill>
-                  <a:srgbClr val="5A7184"/>
-                </a:solidFill>
-                <a:latin typeface="Malgun Gothic" pitchFamily="34" charset="0"/>
-                <a:ea typeface="Malgun Gothic" pitchFamily="34" charset="-122"/>
-                <a:cs typeface="Malgun Gothic" pitchFamily="34" charset="-120"/>
-              </a:rPr>
-              <a:t>장기 관계 구축</a:t>
-            </a:r>
-            <a:endParaRPr lang="en-US" sz="1200" dirty="0"/>
-          </a:p>
-        </p:txBody>
-      </p:sp>
-      <p:sp>
-        <p:nvSpPr>
-          <p:cNvPr id="32" name="Text 28"/>
-          <p:cNvSpPr/>
-          <p:nvPr/>
-        </p:nvSpPr>
-        <p:spPr>
-          <a:xfrm>
-            <a:off x="9674352" y="4718304"/>
-            <a:ext cx="201168" cy="731520"/>
-          </a:xfrm>
-          <a:prstGeom prst="rect">
-            <a:avLst/>
-          </a:prstGeom>
-          <a:noFill/>
-          <a:ln/>
-        </p:spPr>
-        <p:txBody>
-          <a:bodyPr wrap="square" lIns="0" tIns="0" rIns="0" bIns="0" rtlCol="0" anchor="ctr"/>
-          <a:lstStyle/>
-          <a:p>
-            <a:pPr algn="ctr" indent="0" marL="0">
-              <a:buNone/>
-            </a:pPr>
-            <a:r>
-              <a:rPr lang="en-US" sz="1050" dirty="0">
-                <a:solidFill>
-                  <a:srgbClr val="5A7184"/>
-                </a:solidFill>
-                <a:latin typeface="Malgun Gothic" pitchFamily="34" charset="0"/>
-                <a:ea typeface="Malgun Gothic" pitchFamily="34" charset="-122"/>
-                <a:cs typeface="Malgun Gothic" pitchFamily="34" charset="-120"/>
-              </a:rPr>
-              <a:t>▶</a:t>
-            </a:r>
-            <a:endParaRPr lang="en-US" sz="1050" dirty="0"/>
-          </a:p>
-        </p:txBody>
-      </p:sp>
-      <p:sp>
-        <p:nvSpPr>
-          <p:cNvPr id="33" name="Text 29"/>
-          <p:cNvSpPr/>
-          <p:nvPr/>
-        </p:nvSpPr>
-        <p:spPr>
-          <a:xfrm>
-            <a:off x="9875520" y="4718304"/>
-            <a:ext cx="1682496" cy="731520"/>
-          </a:xfrm>
-          <a:prstGeom prst="roundRect">
-            <a:avLst>
-              <a:gd name="adj" fmla="val 8750"/>
-            </a:avLst>
-          </a:prstGeom>
-          <a:solidFill>
-            <a:srgbClr val="FFFFFF"/>
-          </a:solidFill>
-          <a:ln w="12700">
-            <a:solidFill>
-              <a:srgbClr val="DCE4E9"/>
-            </a:solidFill>
-          </a:ln>
-        </p:spPr>
-        <p:txBody>
-          <a:bodyPr wrap="square" lIns="0" tIns="0" rIns="0" bIns="0" rtlCol="0" anchor="ctr"/>
-          <a:lstStyle/>
-          <a:p>
-            <a:pPr algn="ctr" indent="0" marL="0">
-              <a:lnSpc>
-                <a:spcPct val="105000"/>
-              </a:lnSpc>
-              <a:buNone/>
-            </a:pPr>
-            <a:r>
-              <a:rPr lang="en-US" sz="1200" b="1" dirty="0">
-                <a:solidFill>
-                  <a:srgbClr val="17313B"/>
-                </a:solidFill>
-                <a:latin typeface="Malgun Gothic" pitchFamily="34" charset="0"/>
-                <a:ea typeface="Malgun Gothic" pitchFamily="34" charset="-122"/>
-                <a:cs typeface="Malgun Gothic" pitchFamily="34" charset="-120"/>
-              </a:rPr>
-              <a:t>텔레메트리</a:t>
-            </a:r>
-            <a:endParaRPr lang="en-US" sz="1200" dirty="0"/>
-          </a:p>
-          <a:p>
-            <a:pPr algn="ctr" indent="0" marL="0">
-              <a:lnSpc>
-                <a:spcPct val="105000"/>
-              </a:lnSpc>
-              <a:buNone/>
-            </a:pPr>
-            <a:r>
-              <a:rPr lang="en-US" sz="950" dirty="0">
-                <a:solidFill>
-                  <a:srgbClr val="5A7184"/>
-                </a:solidFill>
-                <a:latin typeface="Malgun Gothic" pitchFamily="34" charset="0"/>
-                <a:ea typeface="Malgun Gothic" pitchFamily="34" charset="-122"/>
-                <a:cs typeface="Malgun Gothic" pitchFamily="34" charset="-120"/>
-              </a:rPr>
-              <a:t>지속 개선 루프</a:t>
-            </a:r>
-            <a:endParaRPr lang="en-US" sz="1200" dirty="0"/>
-          </a:p>
-        </p:txBody>
-      </p:sp>
-      <p:sp>
-        <p:nvSpPr>
-          <p:cNvPr id="34" name="Text 30"/>
-          <p:cNvSpPr/>
-          <p:nvPr/>
-        </p:nvSpPr>
-        <p:spPr>
-          <a:xfrm>
-            <a:off x="457200" y="5742432"/>
-            <a:ext cx="11274552" cy="274320"/>
-          </a:xfrm>
-          <a:prstGeom prst="rect">
-            <a:avLst/>
-          </a:prstGeom>
-          <a:noFill/>
-          <a:ln/>
-        </p:spPr>
-        <p:txBody>
-          <a:bodyPr wrap="square" lIns="0" tIns="0" rIns="0" bIns="0" rtlCol="0" anchor="ctr"/>
-          <a:lstStyle/>
-          <a:p>
-            <a:pPr algn="ctr" indent="0" marL="0">
-              <a:buNone/>
-            </a:pPr>
-            <a:r>
-              <a:rPr lang="en-US" sz="1200" i="1" dirty="0">
-                <a:solidFill>
-                  <a:srgbClr val="5A7184"/>
-                </a:solidFill>
-                <a:latin typeface="Malgun Gothic" pitchFamily="34" charset="0"/>
-                <a:ea typeface="Malgun Gothic" pitchFamily="34" charset="-122"/>
-                <a:cs typeface="Malgun Gothic" pitchFamily="34" charset="-120"/>
-              </a:rPr>
-              <a:t>Captive 고객의 요구를 삼성 완제품 생태계 안에 수용한다 — Binding secures demand · FDP standardizes · System SW creates value</a:t>
-            </a:r>
-            <a:endParaRPr lang="en-US" sz="1200" dirty="0"/>
           </a:p>
         </p:txBody>
       </p:sp>
@@ -2622,8 +2781,8 @@
         </p:nvSpPr>
         <p:spPr>
           <a:xfrm>
-            <a:off x="457200" y="859536"/>
-            <a:ext cx="7315200" cy="310896"/>
+            <a:off x="457200" y="841248"/>
+            <a:ext cx="11274552" cy="274320"/>
           </a:xfrm>
           <a:prstGeom prst="rect">
             <a:avLst/>
@@ -2639,17 +2798,17 @@
               <a:buNone/>
             </a:pPr>
             <a:r>
-              <a:rPr lang="en-US" sz="1600" b="1" dirty="0">
-                <a:solidFill>
-                  <a:srgbClr val="17313B"/>
-                </a:solidFill>
-                <a:latin typeface="Malgun Gothic" pitchFamily="34" charset="0"/>
-                <a:ea typeface="Malgun Gothic" pitchFamily="34" charset="-122"/>
-                <a:cs typeface="Malgun Gothic" pitchFamily="34" charset="-120"/>
-              </a:rPr>
-              <a:t>실행전략 6종 — Samsung FDP Enablement</a:t>
-            </a:r>
-            <a:endParaRPr lang="en-US" sz="1600" dirty="0"/>
+              <a:rPr lang="en-US" sz="1300" dirty="0">
+                <a:solidFill>
+                  <a:srgbClr val="5A7184"/>
+                </a:solidFill>
+                <a:latin typeface="Malgun Gothic" pitchFamily="34" charset="0"/>
+                <a:ea typeface="Malgun Gothic" pitchFamily="34" charset="-122"/>
+                <a:cs typeface="Malgun Gothic" pitchFamily="34" charset="-120"/>
+              </a:rPr>
+              <a:t>교차점에서 검토한 선택지 4개 — 평가 기준: 부가가치 방어 · 펌웨어 공통화 · 통제권 흐름 정합 · 차별화 지속성</a:t>
+            </a:r>
+            <a:endParaRPr lang="en-US" sz="1300" dirty="0"/>
           </a:p>
         </p:txBody>
       </p:sp>
@@ -2661,43 +2820,848 @@
         </p:nvSpPr>
         <p:spPr>
           <a:xfrm>
-            <a:off x="457200" y="1280160"/>
-            <a:ext cx="3602736" cy="1737360"/>
+            <a:off x="457200" y="1243584"/>
+            <a:ext cx="5541264" cy="1938528"/>
           </a:xfrm>
           <a:prstGeom prst="roundRect">
             <a:avLst>
-              <a:gd name="adj" fmla="val 4737"/>
+              <a:gd name="adj" fmla="val 4245"/>
             </a:avLst>
           </a:prstGeom>
           <a:solidFill>
             <a:srgbClr val="F5F7F8"/>
           </a:solidFill>
-          <a:ln/>
-        </p:spPr>
-      </p:sp>
-      <p:sp>
-        <p:nvSpPr>
-          <p:cNvPr id="8" name="Shape 6"/>
-          <p:cNvSpPr/>
-          <p:nvPr/>
-        </p:nvSpPr>
-        <p:spPr>
-          <a:xfrm>
-            <a:off x="640080" y="1444752"/>
-            <a:ext cx="402336" cy="402336"/>
+          <a:ln w="12700">
+            <a:solidFill>
+              <a:srgbClr val="DCE4E9"/>
+            </a:solidFill>
+            <a:prstDash val="solid"/>
+          </a:ln>
+        </p:spPr>
+      </p:sp>
+      <p:sp>
+        <p:nvSpPr>
+          <p:cNvPr id="8" name="Text 6"/>
+          <p:cNvSpPr/>
+          <p:nvPr/>
+        </p:nvSpPr>
+        <p:spPr>
+          <a:xfrm>
+            <a:off x="676656" y="1444752"/>
+            <a:ext cx="365760" cy="365760"/>
           </a:xfrm>
           <a:prstGeom prst="ellipse">
             <a:avLst/>
           </a:prstGeom>
           <a:solidFill>
-            <a:srgbClr val="0E6BA8"/>
-          </a:solidFill>
-          <a:ln/>
+            <a:srgbClr val="B9C7D1"/>
+          </a:solidFill>
+          <a:ln/>
+        </p:spPr>
+        <p:txBody>
+          <a:bodyPr wrap="square" lIns="0" tIns="0" rIns="0" bIns="0" rtlCol="0" anchor="ctr"/>
+          <a:lstStyle/>
+          <a:p>
+            <a:pPr algn="ctr" indent="0" marL="0">
+              <a:buNone/>
+            </a:pPr>
+            <a:r>
+              <a:rPr lang="en-US" sz="1600" b="1" dirty="0">
+                <a:solidFill>
+                  <a:srgbClr val="FFFFFF"/>
+                </a:solidFill>
+                <a:latin typeface="Malgun Gothic" pitchFamily="34" charset="0"/>
+                <a:ea typeface="Malgun Gothic" pitchFamily="34" charset="-122"/>
+                <a:cs typeface="Malgun Gothic" pitchFamily="34" charset="-120"/>
+              </a:rPr>
+              <a:t>✕</a:t>
+            </a:r>
+            <a:endParaRPr lang="en-US" sz="1600" dirty="0"/>
+          </a:p>
+        </p:txBody>
+      </p:sp>
+      <p:sp>
+        <p:nvSpPr>
+          <p:cNvPr id="9" name="Text 7"/>
+          <p:cNvSpPr/>
+          <p:nvPr/>
+        </p:nvSpPr>
+        <p:spPr>
+          <a:xfrm>
+            <a:off x="1170432" y="1444752"/>
+            <a:ext cx="4663440" cy="365760"/>
+          </a:xfrm>
+          <a:prstGeom prst="rect">
+            <a:avLst/>
+          </a:prstGeom>
+          <a:noFill/>
+          <a:ln/>
+        </p:spPr>
+        <p:txBody>
+          <a:bodyPr wrap="square" lIns="0" tIns="0" rIns="0" bIns="0" rtlCol="0" anchor="ctr"/>
+          <a:lstStyle/>
+          <a:p>
+            <a:pPr indent="0" marL="0">
+              <a:buNone/>
+            </a:pPr>
+            <a:r>
+              <a:rPr lang="en-US" sz="1650" b="1" dirty="0">
+                <a:solidFill>
+                  <a:srgbClr val="17313B"/>
+                </a:solidFill>
+                <a:latin typeface="Malgun Gothic" pitchFamily="34" charset="0"/>
+                <a:ea typeface="Malgun Gothic" pitchFamily="34" charset="-122"/>
+                <a:cs typeface="Malgun Gothic" pitchFamily="34" charset="-120"/>
+              </a:rPr>
+              <a:t>A. 컴포넌트 후퇴</a:t>
+            </a:r>
+            <a:endParaRPr lang="en-US" sz="1650" dirty="0"/>
+          </a:p>
+        </p:txBody>
+      </p:sp>
+      <p:sp>
+        <p:nvSpPr>
+          <p:cNvPr id="10" name="Text 8"/>
+          <p:cNvSpPr/>
+          <p:nvPr/>
+        </p:nvSpPr>
+        <p:spPr>
+          <a:xfrm>
+            <a:off x="713232" y="1938528"/>
+            <a:ext cx="5029200" cy="310896"/>
+          </a:xfrm>
+          <a:prstGeom prst="rect">
+            <a:avLst/>
+          </a:prstGeom>
+          <a:noFill/>
+          <a:ln/>
+        </p:spPr>
+        <p:txBody>
+          <a:bodyPr wrap="square" lIns="0" tIns="0" rIns="0" bIns="0" rtlCol="0" anchor="ctr"/>
+          <a:lstStyle/>
+          <a:p>
+            <a:pPr indent="0" marL="0">
+              <a:buNone/>
+            </a:pPr>
+            <a:r>
+              <a:rPr lang="en-US" sz="1200" dirty="0">
+                <a:solidFill>
+                  <a:srgbClr val="5A7184"/>
+                </a:solidFill>
+                <a:latin typeface="Malgun Gothic" pitchFamily="34" charset="0"/>
+                <a:ea typeface="Malgun Gothic" pitchFamily="34" charset="-122"/>
+                <a:cs typeface="Malgun Gothic" pitchFamily="34" charset="-120"/>
+              </a:rPr>
+              <a:t>NAND·웨이퍼 공급에 집중, 완제품은 고객에 위임</a:t>
+            </a:r>
+            <a:endParaRPr lang="en-US" sz="1200" dirty="0"/>
+          </a:p>
+        </p:txBody>
+      </p:sp>
+      <p:sp>
+        <p:nvSpPr>
+          <p:cNvPr id="11" name="Text 9"/>
+          <p:cNvSpPr/>
+          <p:nvPr/>
+        </p:nvSpPr>
+        <p:spPr>
+          <a:xfrm>
+            <a:off x="713232" y="2286000"/>
+            <a:ext cx="5029200" cy="804672"/>
+          </a:xfrm>
+          <a:prstGeom prst="rect">
+            <a:avLst/>
+          </a:prstGeom>
+          <a:noFill/>
+          <a:ln/>
+        </p:spPr>
+        <p:txBody>
+          <a:bodyPr wrap="square" lIns="0" tIns="0" rIns="0" bIns="0" rtlCol="0" anchor="t"/>
+          <a:lstStyle/>
+          <a:p>
+            <a:pPr indent="0" marL="0">
+              <a:lnSpc>
+                <a:spcPct val="112000"/>
+              </a:lnSpc>
+              <a:buNone/>
+            </a:pPr>
+            <a:r>
+              <a:rPr lang="en-US" sz="1200" b="1" dirty="0">
+                <a:solidFill>
+                  <a:srgbClr val="8A9BA8"/>
+                </a:solidFill>
+                <a:latin typeface="Malgun Gothic" pitchFamily="34" charset="0"/>
+                <a:ea typeface="Malgun Gothic" pitchFamily="34" charset="-122"/>
+                <a:cs typeface="Malgun Gothic" pitchFamily="34" charset="-120"/>
+              </a:rPr>
+              <a:t>탈락  </a:t>
+            </a:r>
+            <a:pPr indent="0" marL="0">
+              <a:lnSpc>
+                <a:spcPct val="112000"/>
+              </a:lnSpc>
+              <a:buNone/>
+            </a:pPr>
+            <a:r>
+              <a:rPr lang="en-US" sz="1200" dirty="0">
+                <a:solidFill>
+                  <a:srgbClr val="17313B"/>
+                </a:solidFill>
+                <a:latin typeface="Malgun Gothic" pitchFamily="34" charset="0"/>
+                <a:ea typeface="Malgun Gothic" pitchFamily="34" charset="-122"/>
+                <a:cs typeface="Malgun Gothic" pitchFamily="34" charset="-120"/>
+              </a:rPr>
+              <a:t>물량은 지키나 완제품 부가가치 영구 상실 — 커머디티 공급자 고착</a:t>
+            </a:r>
+            <a:endParaRPr lang="en-US" sz="1200" dirty="0"/>
+          </a:p>
+        </p:txBody>
+      </p:sp>
+      <p:sp>
+        <p:nvSpPr>
+          <p:cNvPr id="12" name="Shape 10"/>
+          <p:cNvSpPr/>
+          <p:nvPr/>
+        </p:nvSpPr>
+        <p:spPr>
+          <a:xfrm>
+            <a:off x="6190488" y="1243584"/>
+            <a:ext cx="5541264" cy="1938528"/>
+          </a:xfrm>
+          <a:prstGeom prst="roundRect">
+            <a:avLst>
+              <a:gd name="adj" fmla="val 4245"/>
+            </a:avLst>
+          </a:prstGeom>
+          <a:solidFill>
+            <a:srgbClr val="F5F7F8"/>
+          </a:solidFill>
+          <a:ln w="12700">
+            <a:solidFill>
+              <a:srgbClr val="DCE4E9"/>
+            </a:solidFill>
+            <a:prstDash val="solid"/>
+          </a:ln>
+        </p:spPr>
+      </p:sp>
+      <p:sp>
+        <p:nvSpPr>
+          <p:cNvPr id="13" name="Text 11"/>
+          <p:cNvSpPr/>
+          <p:nvPr/>
+        </p:nvSpPr>
+        <p:spPr>
+          <a:xfrm>
+            <a:off x="6409944" y="1444752"/>
+            <a:ext cx="365760" cy="365760"/>
+          </a:xfrm>
+          <a:prstGeom prst="ellipse">
+            <a:avLst/>
+          </a:prstGeom>
+          <a:solidFill>
+            <a:srgbClr val="B9C7D1"/>
+          </a:solidFill>
+          <a:ln/>
+        </p:spPr>
+        <p:txBody>
+          <a:bodyPr wrap="square" lIns="0" tIns="0" rIns="0" bIns="0" rtlCol="0" anchor="ctr"/>
+          <a:lstStyle/>
+          <a:p>
+            <a:pPr algn="ctr" indent="0" marL="0">
+              <a:buNone/>
+            </a:pPr>
+            <a:r>
+              <a:rPr lang="en-US" sz="1600" b="1" dirty="0">
+                <a:solidFill>
+                  <a:srgbClr val="FFFFFF"/>
+                </a:solidFill>
+                <a:latin typeface="Malgun Gothic" pitchFamily="34" charset="0"/>
+                <a:ea typeface="Malgun Gothic" pitchFamily="34" charset="-122"/>
+                <a:cs typeface="Malgun Gothic" pitchFamily="34" charset="-120"/>
+              </a:rPr>
+              <a:t>✕</a:t>
+            </a:r>
+            <a:endParaRPr lang="en-US" sz="1600" dirty="0"/>
+          </a:p>
+        </p:txBody>
+      </p:sp>
+      <p:sp>
+        <p:nvSpPr>
+          <p:cNvPr id="14" name="Text 12"/>
+          <p:cNvSpPr/>
+          <p:nvPr/>
+        </p:nvSpPr>
+        <p:spPr>
+          <a:xfrm>
+            <a:off x="6903720" y="1444752"/>
+            <a:ext cx="4663440" cy="365760"/>
+          </a:xfrm>
+          <a:prstGeom prst="rect">
+            <a:avLst/>
+          </a:prstGeom>
+          <a:noFill/>
+          <a:ln/>
+        </p:spPr>
+        <p:txBody>
+          <a:bodyPr wrap="square" lIns="0" tIns="0" rIns="0" bIns="0" rtlCol="0" anchor="ctr"/>
+          <a:lstStyle/>
+          <a:p>
+            <a:pPr indent="0" marL="0">
+              <a:buNone/>
+            </a:pPr>
+            <a:r>
+              <a:rPr lang="en-US" sz="1650" b="1" dirty="0">
+                <a:solidFill>
+                  <a:srgbClr val="17313B"/>
+                </a:solidFill>
+                <a:latin typeface="Malgun Gothic" pitchFamily="34" charset="0"/>
+                <a:ea typeface="Malgun Gothic" pitchFamily="34" charset="-122"/>
+                <a:cs typeface="Malgun Gothic" pitchFamily="34" charset="-120"/>
+              </a:rPr>
+              <a:t>B. 풀커스텀 대응</a:t>
+            </a:r>
+            <a:endParaRPr lang="en-US" sz="1650" dirty="0"/>
+          </a:p>
+        </p:txBody>
+      </p:sp>
+      <p:sp>
+        <p:nvSpPr>
+          <p:cNvPr id="15" name="Text 13"/>
+          <p:cNvSpPr/>
+          <p:nvPr/>
+        </p:nvSpPr>
+        <p:spPr>
+          <a:xfrm>
+            <a:off x="6446520" y="1938528"/>
+            <a:ext cx="5029200" cy="310896"/>
+          </a:xfrm>
+          <a:prstGeom prst="rect">
+            <a:avLst/>
+          </a:prstGeom>
+          <a:noFill/>
+          <a:ln/>
+        </p:spPr>
+        <p:txBody>
+          <a:bodyPr wrap="square" lIns="0" tIns="0" rIns="0" bIns="0" rtlCol="0" anchor="ctr"/>
+          <a:lstStyle/>
+          <a:p>
+            <a:pPr indent="0" marL="0">
+              <a:buNone/>
+            </a:pPr>
+            <a:r>
+              <a:rPr lang="en-US" sz="1200" dirty="0">
+                <a:solidFill>
+                  <a:srgbClr val="5A7184"/>
+                </a:solidFill>
+                <a:latin typeface="Malgun Gothic" pitchFamily="34" charset="0"/>
+                <a:ea typeface="Malgun Gothic" pitchFamily="34" charset="-122"/>
+                <a:cs typeface="Malgun Gothic" pitchFamily="34" charset="-120"/>
+              </a:rPr>
+              <a:t>고객별 커스텀 SSD·펌웨어 전면 개발</a:t>
+            </a:r>
+            <a:endParaRPr lang="en-US" sz="1200" dirty="0"/>
+          </a:p>
+        </p:txBody>
+      </p:sp>
+      <p:sp>
+        <p:nvSpPr>
+          <p:cNvPr id="16" name="Text 14"/>
+          <p:cNvSpPr/>
+          <p:nvPr/>
+        </p:nvSpPr>
+        <p:spPr>
+          <a:xfrm>
+            <a:off x="6446520" y="2286000"/>
+            <a:ext cx="5029200" cy="804672"/>
+          </a:xfrm>
+          <a:prstGeom prst="rect">
+            <a:avLst/>
+          </a:prstGeom>
+          <a:noFill/>
+          <a:ln/>
+        </p:spPr>
+        <p:txBody>
+          <a:bodyPr wrap="square" lIns="0" tIns="0" rIns="0" bIns="0" rtlCol="0" anchor="t"/>
+          <a:lstStyle/>
+          <a:p>
+            <a:pPr indent="0" marL="0">
+              <a:lnSpc>
+                <a:spcPct val="112000"/>
+              </a:lnSpc>
+              <a:buNone/>
+            </a:pPr>
+            <a:r>
+              <a:rPr lang="en-US" sz="1200" b="1" dirty="0">
+                <a:solidFill>
+                  <a:srgbClr val="8A9BA8"/>
+                </a:solidFill>
+                <a:latin typeface="Malgun Gothic" pitchFamily="34" charset="0"/>
+                <a:ea typeface="Malgun Gothic" pitchFamily="34" charset="-122"/>
+                <a:cs typeface="Malgun Gothic" pitchFamily="34" charset="-120"/>
+              </a:rPr>
+              <a:t>탈락  </a:t>
+            </a:r>
+            <a:pPr indent="0" marL="0">
+              <a:lnSpc>
+                <a:spcPct val="112000"/>
+              </a:lnSpc>
+              <a:buNone/>
+            </a:pPr>
+            <a:r>
+              <a:rPr lang="en-US" sz="1200" dirty="0">
+                <a:solidFill>
+                  <a:srgbClr val="17313B"/>
+                </a:solidFill>
+                <a:latin typeface="Malgun Gothic" pitchFamily="34" charset="0"/>
+                <a:ea typeface="Malgun Gothic" pitchFamily="34" charset="-122"/>
+                <a:cs typeface="Malgun Gothic" pitchFamily="34" charset="-120"/>
+              </a:rPr>
+              <a:t>제품·펌웨어 파편화 — “커스텀 소싱·컨트랙은 파운드리 모델, 우리가 안 해본 것” (최장석)</a:t>
+            </a:r>
+            <a:endParaRPr lang="en-US" sz="1200" dirty="0"/>
+          </a:p>
+        </p:txBody>
+      </p:sp>
+      <p:sp>
+        <p:nvSpPr>
+          <p:cNvPr id="17" name="Shape 15"/>
+          <p:cNvSpPr/>
+          <p:nvPr/>
+        </p:nvSpPr>
+        <p:spPr>
+          <a:xfrm>
+            <a:off x="457200" y="3328416"/>
+            <a:ext cx="5541264" cy="1938528"/>
+          </a:xfrm>
+          <a:prstGeom prst="roundRect">
+            <a:avLst>
+              <a:gd name="adj" fmla="val 4245"/>
+            </a:avLst>
+          </a:prstGeom>
+          <a:solidFill>
+            <a:srgbClr val="F5F7F8"/>
+          </a:solidFill>
+          <a:ln w="12700">
+            <a:solidFill>
+              <a:srgbClr val="DCE4E9"/>
+            </a:solidFill>
+            <a:prstDash val="solid"/>
+          </a:ln>
+        </p:spPr>
+      </p:sp>
+      <p:sp>
+        <p:nvSpPr>
+          <p:cNvPr id="18" name="Text 16"/>
+          <p:cNvSpPr/>
+          <p:nvPr/>
+        </p:nvSpPr>
+        <p:spPr>
+          <a:xfrm>
+            <a:off x="676656" y="3529584"/>
+            <a:ext cx="365760" cy="365760"/>
+          </a:xfrm>
+          <a:prstGeom prst="ellipse">
+            <a:avLst/>
+          </a:prstGeom>
+          <a:solidFill>
+            <a:srgbClr val="B9C7D1"/>
+          </a:solidFill>
+          <a:ln/>
+        </p:spPr>
+        <p:txBody>
+          <a:bodyPr wrap="square" lIns="0" tIns="0" rIns="0" bIns="0" rtlCol="0" anchor="ctr"/>
+          <a:lstStyle/>
+          <a:p>
+            <a:pPr algn="ctr" indent="0" marL="0">
+              <a:buNone/>
+            </a:pPr>
+            <a:r>
+              <a:rPr lang="en-US" sz="1600" b="1" dirty="0">
+                <a:solidFill>
+                  <a:srgbClr val="FFFFFF"/>
+                </a:solidFill>
+                <a:latin typeface="Malgun Gothic" pitchFamily="34" charset="0"/>
+                <a:ea typeface="Malgun Gothic" pitchFamily="34" charset="-122"/>
+                <a:cs typeface="Malgun Gothic" pitchFamily="34" charset="-120"/>
+              </a:rPr>
+              <a:t>✕</a:t>
+            </a:r>
+            <a:endParaRPr lang="en-US" sz="1600" dirty="0"/>
+          </a:p>
+        </p:txBody>
+      </p:sp>
+      <p:sp>
+        <p:nvSpPr>
+          <p:cNvPr id="19" name="Text 17"/>
+          <p:cNvSpPr/>
+          <p:nvPr/>
+        </p:nvSpPr>
+        <p:spPr>
+          <a:xfrm>
+            <a:off x="1170432" y="3529584"/>
+            <a:ext cx="4663440" cy="365760"/>
+          </a:xfrm>
+          <a:prstGeom prst="rect">
+            <a:avLst/>
+          </a:prstGeom>
+          <a:noFill/>
+          <a:ln/>
+        </p:spPr>
+        <p:txBody>
+          <a:bodyPr wrap="square" lIns="0" tIns="0" rIns="0" bIns="0" rtlCol="0" anchor="ctr"/>
+          <a:lstStyle/>
+          <a:p>
+            <a:pPr indent="0" marL="0">
+              <a:buNone/>
+            </a:pPr>
+            <a:r>
+              <a:rPr lang="en-US" sz="1650" b="1" dirty="0">
+                <a:solidFill>
+                  <a:srgbClr val="17313B"/>
+                </a:solidFill>
+                <a:latin typeface="Malgun Gothic" pitchFamily="34" charset="0"/>
+                <a:ea typeface="Malgun Gothic" pitchFamily="34" charset="-122"/>
+                <a:cs typeface="Malgun Gothic" pitchFamily="34" charset="-120"/>
+              </a:rPr>
+              <a:t>C. FDP 표준 SSD만 공급</a:t>
+            </a:r>
+            <a:endParaRPr lang="en-US" sz="1650" dirty="0"/>
+          </a:p>
+        </p:txBody>
+      </p:sp>
+      <p:sp>
+        <p:nvSpPr>
+          <p:cNvPr id="20" name="Text 18"/>
+          <p:cNvSpPr/>
+          <p:nvPr/>
+        </p:nvSpPr>
+        <p:spPr>
+          <a:xfrm>
+            <a:off x="713232" y="4023360"/>
+            <a:ext cx="5029200" cy="310896"/>
+          </a:xfrm>
+          <a:prstGeom prst="rect">
+            <a:avLst/>
+          </a:prstGeom>
+          <a:noFill/>
+          <a:ln/>
+        </p:spPr>
+        <p:txBody>
+          <a:bodyPr wrap="square" lIns="0" tIns="0" rIns="0" bIns="0" rtlCol="0" anchor="ctr"/>
+          <a:lstStyle/>
+          <a:p>
+            <a:pPr indent="0" marL="0">
+              <a:buNone/>
+            </a:pPr>
+            <a:r>
+              <a:rPr lang="en-US" sz="1200" dirty="0">
+                <a:solidFill>
+                  <a:srgbClr val="5A7184"/>
+                </a:solidFill>
+                <a:latin typeface="Malgun Gothic" pitchFamily="34" charset="0"/>
+                <a:ea typeface="Malgun Gothic" pitchFamily="34" charset="-122"/>
+                <a:cs typeface="Malgun Gothic" pitchFamily="34" charset="-120"/>
+              </a:rPr>
+              <a:t>표준 지원 하드웨어만 제공, 통합은 고객 몫</a:t>
+            </a:r>
+            <a:endParaRPr lang="en-US" sz="1200" dirty="0"/>
+          </a:p>
+        </p:txBody>
+      </p:sp>
+      <p:sp>
+        <p:nvSpPr>
+          <p:cNvPr id="21" name="Text 19"/>
+          <p:cNvSpPr/>
+          <p:nvPr/>
+        </p:nvSpPr>
+        <p:spPr>
+          <a:xfrm>
+            <a:off x="713232" y="4370832"/>
+            <a:ext cx="5029200" cy="804672"/>
+          </a:xfrm>
+          <a:prstGeom prst="rect">
+            <a:avLst/>
+          </a:prstGeom>
+          <a:noFill/>
+          <a:ln/>
+        </p:spPr>
+        <p:txBody>
+          <a:bodyPr wrap="square" lIns="0" tIns="0" rIns="0" bIns="0" rtlCol="0" anchor="t"/>
+          <a:lstStyle/>
+          <a:p>
+            <a:pPr indent="0" marL="0">
+              <a:lnSpc>
+                <a:spcPct val="112000"/>
+              </a:lnSpc>
+              <a:buNone/>
+            </a:pPr>
+            <a:r>
+              <a:rPr lang="en-US" sz="1200" b="1" dirty="0">
+                <a:solidFill>
+                  <a:srgbClr val="8A9BA8"/>
+                </a:solidFill>
+                <a:latin typeface="Malgun Gothic" pitchFamily="34" charset="0"/>
+                <a:ea typeface="Malgun Gothic" pitchFamily="34" charset="-122"/>
+                <a:cs typeface="Malgun Gothic" pitchFamily="34" charset="-120"/>
+              </a:rPr>
+              <a:t>탈락  </a:t>
+            </a:r>
+            <a:pPr indent="0" marL="0">
+              <a:lnSpc>
+                <a:spcPct val="112000"/>
+              </a:lnSpc>
+              <a:buNone/>
+            </a:pPr>
+            <a:r>
+              <a:rPr lang="en-US" sz="1200" dirty="0">
+                <a:solidFill>
+                  <a:srgbClr val="17313B"/>
+                </a:solidFill>
+                <a:latin typeface="Malgun Gothic" pitchFamily="34" charset="0"/>
+                <a:ea typeface="Malgun Gothic" pitchFamily="34" charset="-122"/>
+                <a:cs typeface="Malgun Gothic" pitchFamily="34" charset="-120"/>
+              </a:rPr>
+              <a:t>“FDP 지원 여러 공급사 중 하나” — 차별화 없이 가격 경쟁 회귀</a:t>
+            </a:r>
+            <a:endParaRPr lang="en-US" sz="1200" dirty="0"/>
+          </a:p>
+        </p:txBody>
+      </p:sp>
+      <p:sp>
+        <p:nvSpPr>
+          <p:cNvPr id="22" name="Shape 20"/>
+          <p:cNvSpPr/>
+          <p:nvPr/>
+        </p:nvSpPr>
+        <p:spPr>
+          <a:xfrm>
+            <a:off x="6190488" y="3328416"/>
+            <a:ext cx="5541264" cy="1938528"/>
+          </a:xfrm>
+          <a:prstGeom prst="roundRect">
+            <a:avLst>
+              <a:gd name="adj" fmla="val 4245"/>
+            </a:avLst>
+          </a:prstGeom>
+          <a:solidFill>
+            <a:srgbClr val="E8F6F0"/>
+          </a:solidFill>
+          <a:ln w="19050">
+            <a:solidFill>
+              <a:srgbClr val="02A878"/>
+            </a:solidFill>
+            <a:prstDash val="solid"/>
+          </a:ln>
+        </p:spPr>
+      </p:sp>
+      <p:sp>
+        <p:nvSpPr>
+          <p:cNvPr id="23" name="Text 21"/>
+          <p:cNvSpPr/>
+          <p:nvPr/>
+        </p:nvSpPr>
+        <p:spPr>
+          <a:xfrm>
+            <a:off x="6409944" y="3529584"/>
+            <a:ext cx="365760" cy="365760"/>
+          </a:xfrm>
+          <a:prstGeom prst="ellipse">
+            <a:avLst/>
+          </a:prstGeom>
+          <a:solidFill>
+            <a:srgbClr val="02A878"/>
+          </a:solidFill>
+          <a:ln/>
+        </p:spPr>
+        <p:txBody>
+          <a:bodyPr wrap="square" lIns="0" tIns="0" rIns="0" bIns="0" rtlCol="0" anchor="ctr"/>
+          <a:lstStyle/>
+          <a:p>
+            <a:pPr algn="ctr" indent="0" marL="0">
+              <a:buNone/>
+            </a:pPr>
+            <a:r>
+              <a:rPr lang="en-US" sz="1600" b="1" dirty="0">
+                <a:solidFill>
+                  <a:srgbClr val="FFFFFF"/>
+                </a:solidFill>
+                <a:latin typeface="Malgun Gothic" pitchFamily="34" charset="0"/>
+                <a:ea typeface="Malgun Gothic" pitchFamily="34" charset="-122"/>
+                <a:cs typeface="Malgun Gothic" pitchFamily="34" charset="-120"/>
+              </a:rPr>
+              <a:t>✓</a:t>
+            </a:r>
+            <a:endParaRPr lang="en-US" sz="1600" dirty="0"/>
+          </a:p>
+        </p:txBody>
+      </p:sp>
+      <p:sp>
+        <p:nvSpPr>
+          <p:cNvPr id="24" name="Text 22"/>
+          <p:cNvSpPr/>
+          <p:nvPr/>
+        </p:nvSpPr>
+        <p:spPr>
+          <a:xfrm>
+            <a:off x="6903720" y="3529584"/>
+            <a:ext cx="4663440" cy="365760"/>
+          </a:xfrm>
+          <a:prstGeom prst="rect">
+            <a:avLst/>
+          </a:prstGeom>
+          <a:noFill/>
+          <a:ln/>
+        </p:spPr>
+        <p:txBody>
+          <a:bodyPr wrap="square" lIns="0" tIns="0" rIns="0" bIns="0" rtlCol="0" anchor="ctr"/>
+          <a:lstStyle/>
+          <a:p>
+            <a:pPr indent="0" marL="0">
+              <a:buNone/>
+            </a:pPr>
+            <a:r>
+              <a:rPr lang="en-US" sz="1650" b="1" dirty="0">
+                <a:solidFill>
+                  <a:srgbClr val="02A878"/>
+                </a:solidFill>
+                <a:latin typeface="Malgun Gothic" pitchFamily="34" charset="0"/>
+                <a:ea typeface="Malgun Gothic" pitchFamily="34" charset="-122"/>
+                <a:cs typeface="Malgun Gothic" pitchFamily="34" charset="-120"/>
+              </a:rPr>
+              <a:t>D. FDP 표준 + 시스템 SW 플랫폼</a:t>
+            </a:r>
+            <a:endParaRPr lang="en-US" sz="1650" dirty="0"/>
+          </a:p>
+        </p:txBody>
+      </p:sp>
+      <p:sp>
+        <p:nvSpPr>
+          <p:cNvPr id="25" name="Text 23"/>
+          <p:cNvSpPr/>
+          <p:nvPr/>
+        </p:nvSpPr>
+        <p:spPr>
+          <a:xfrm>
+            <a:off x="6446520" y="4023360"/>
+            <a:ext cx="5029200" cy="310896"/>
+          </a:xfrm>
+          <a:prstGeom prst="rect">
+            <a:avLst/>
+          </a:prstGeom>
+          <a:noFill/>
+          <a:ln/>
+        </p:spPr>
+        <p:txBody>
+          <a:bodyPr wrap="square" lIns="0" tIns="0" rIns="0" bIns="0" rtlCol="0" anchor="ctr"/>
+          <a:lstStyle/>
+          <a:p>
+            <a:pPr indent="0" marL="0">
+              <a:buNone/>
+            </a:pPr>
+            <a:r>
+              <a:rPr lang="en-US" sz="1200" dirty="0">
+                <a:solidFill>
+                  <a:srgbClr val="5A7184"/>
+                </a:solidFill>
+                <a:latin typeface="Malgun Gothic" pitchFamily="34" charset="0"/>
+                <a:ea typeface="Malgun Gothic" pitchFamily="34" charset="-122"/>
+                <a:cs typeface="Malgun Gothic" pitchFamily="34" charset="-120"/>
+              </a:rPr>
+              <a:t>공통 펌웨어 + Host SDK·Profiler·E2E 검증 제공</a:t>
+            </a:r>
+            <a:endParaRPr lang="en-US" sz="1200" dirty="0"/>
+          </a:p>
+        </p:txBody>
+      </p:sp>
+      <p:sp>
+        <p:nvSpPr>
+          <p:cNvPr id="26" name="Text 24"/>
+          <p:cNvSpPr/>
+          <p:nvPr/>
+        </p:nvSpPr>
+        <p:spPr>
+          <a:xfrm>
+            <a:off x="6446520" y="4370832"/>
+            <a:ext cx="5029200" cy="804672"/>
+          </a:xfrm>
+          <a:prstGeom prst="rect">
+            <a:avLst/>
+          </a:prstGeom>
+          <a:noFill/>
+          <a:ln/>
+        </p:spPr>
+        <p:txBody>
+          <a:bodyPr wrap="square" lIns="0" tIns="0" rIns="0" bIns="0" rtlCol="0" anchor="t"/>
+          <a:lstStyle/>
+          <a:p>
+            <a:pPr indent="0" marL="0">
+              <a:lnSpc>
+                <a:spcPct val="112000"/>
+              </a:lnSpc>
+              <a:buNone/>
+            </a:pPr>
+            <a:r>
+              <a:rPr lang="en-US" sz="1200" b="1" dirty="0">
+                <a:solidFill>
+                  <a:srgbClr val="02A878"/>
+                </a:solidFill>
+                <a:latin typeface="Malgun Gothic" pitchFamily="34" charset="0"/>
+                <a:ea typeface="Malgun Gothic" pitchFamily="34" charset="-122"/>
+                <a:cs typeface="Malgun Gothic" pitchFamily="34" charset="-120"/>
+              </a:rPr>
+              <a:t>채택  </a:t>
+            </a:r>
+            <a:pPr indent="0" marL="0">
+              <a:lnSpc>
+                <a:spcPct val="112000"/>
+              </a:lnSpc>
+              <a:buNone/>
+            </a:pPr>
+            <a:r>
+              <a:rPr lang="en-US" sz="1200" dirty="0">
+                <a:solidFill>
+                  <a:srgbClr val="17313B"/>
+                </a:solidFill>
+                <a:latin typeface="Malgun Gothic" pitchFamily="34" charset="0"/>
+                <a:ea typeface="Malgun Gothic" pitchFamily="34" charset="-122"/>
+                <a:cs typeface="Malgun Gothic" pitchFamily="34" charset="-120"/>
+              </a:rPr>
+              <a:t>유일하게 4개 기준 동시 충족 — 통제권 흐름 위에서 부가가치 재정의</a:t>
+            </a:r>
+            <a:endParaRPr lang="en-US" sz="1200" dirty="0"/>
+          </a:p>
+        </p:txBody>
+      </p:sp>
+      <p:sp>
+        <p:nvSpPr>
+          <p:cNvPr id="27" name="Shape 25"/>
+          <p:cNvSpPr/>
+          <p:nvPr/>
+        </p:nvSpPr>
+        <p:spPr>
+          <a:xfrm>
+            <a:off x="457200" y="5413248"/>
+            <a:ext cx="11274552" cy="713232"/>
+          </a:xfrm>
+          <a:prstGeom prst="roundRect">
+            <a:avLst>
+              <a:gd name="adj" fmla="val 10256"/>
+            </a:avLst>
+          </a:prstGeom>
+          <a:solidFill>
+            <a:srgbClr val="E8F6F0"/>
+          </a:solidFill>
+          <a:ln w="15875">
+            <a:solidFill>
+              <a:srgbClr val="02A878"/>
+            </a:solidFill>
+            <a:prstDash val="solid"/>
+          </a:ln>
         </p:spPr>
       </p:sp>
       <p:pic>
         <p:nvPicPr>
-          <p:cNvPr id="9" name="Image 0" descr="preencoded.png">    </p:cNvPr>
+          <p:cNvPr id="28" name="Image 0" descr="preencoded.png">    </p:cNvPr>
           <p:cNvPicPr>
             <a:picLocks noChangeAspect="1"/>
           </p:cNvPicPr>
@@ -2711,8 +3675,8 @@
         </p:blipFill>
         <p:spPr>
           <a:xfrm>
-            <a:off x="736641" y="1541313"/>
-            <a:ext cx="209215" cy="209215"/>
+            <a:off x="658368" y="5586984"/>
+            <a:ext cx="365760" cy="365760"/>
           </a:xfrm>
           <a:prstGeom prst="rect">
             <a:avLst/>
@@ -2721,62 +3685,23 @@
       </p:pic>
       <p:sp>
         <p:nvSpPr>
-          <p:cNvPr id="10" name="Text 7"/>
-          <p:cNvSpPr/>
-          <p:nvPr/>
-        </p:nvSpPr>
-        <p:spPr>
-          <a:xfrm>
-            <a:off x="1152144" y="1463040"/>
-            <a:ext cx="2743200" cy="365760"/>
-          </a:xfrm>
-          <a:prstGeom prst="rect">
-            <a:avLst/>
-          </a:prstGeom>
-          <a:noFill/>
-          <a:ln/>
-        </p:spPr>
-        <p:txBody>
-          <a:bodyPr wrap="square" lIns="0" tIns="0" rIns="0" bIns="0" rtlCol="0" anchor="ctr"/>
-          <a:lstStyle/>
-          <a:p>
-            <a:pPr indent="0" marL="0">
-              <a:buNone/>
-            </a:pPr>
-            <a:r>
-              <a:rPr lang="en-US" sz="1400" b="1" dirty="0">
-                <a:solidFill>
-                  <a:srgbClr val="17313B"/>
-                </a:solidFill>
-                <a:latin typeface="Malgun Gothic" pitchFamily="34" charset="0"/>
-                <a:ea typeface="Malgun Gothic" pitchFamily="34" charset="-122"/>
-                <a:cs typeface="Malgun Gothic" pitchFamily="34" charset="-120"/>
-              </a:rPr>
-              <a:t>1. Enablement Platform</a:t>
-            </a:r>
-            <a:endParaRPr lang="en-US" sz="1400" dirty="0"/>
-          </a:p>
-        </p:txBody>
-      </p:sp>
-      <p:sp>
-        <p:nvSpPr>
-          <p:cNvPr id="11" name="Text 8"/>
-          <p:cNvSpPr/>
-          <p:nvPr/>
-        </p:nvSpPr>
-        <p:spPr>
-          <a:xfrm>
-            <a:off x="658368" y="1956816"/>
-            <a:ext cx="3200400" cy="969264"/>
-          </a:xfrm>
-          <a:prstGeom prst="rect">
-            <a:avLst/>
-          </a:prstGeom>
-          <a:noFill/>
-          <a:ln/>
-        </p:spPr>
-        <p:txBody>
-          <a:bodyPr wrap="square" lIns="0" tIns="0" rIns="0" bIns="0" rtlCol="0" anchor="t"/>
+          <p:cNvPr id="29" name="Text 26"/>
+          <p:cNvSpPr/>
+          <p:nvPr/>
+        </p:nvSpPr>
+        <p:spPr>
+          <a:xfrm>
+            <a:off x="1152144" y="5413248"/>
+            <a:ext cx="10424160" cy="713232"/>
+          </a:xfrm>
+          <a:prstGeom prst="rect">
+            <a:avLst/>
+          </a:prstGeom>
+          <a:noFill/>
+          <a:ln/>
+        </p:spPr>
+        <p:txBody>
+          <a:bodyPr wrap="square" lIns="0" tIns="0" rIns="0" bIns="0" rtlCol="0" anchor="ctr"/>
           <a:lstStyle/>
           <a:p>
             <a:pPr indent="0" marL="0">
@@ -2786,7 +3711,27 @@
               <a:buNone/>
             </a:pPr>
             <a:r>
-              <a:rPr lang="en-US" sz="1050" dirty="0">
+              <a:rPr lang="en-US" sz="1400" b="1" dirty="0">
+                <a:solidFill>
+                  <a:srgbClr val="17313B"/>
+                </a:solidFill>
+                <a:latin typeface="Malgun Gothic" pitchFamily="34" charset="0"/>
+                <a:ea typeface="Malgun Gothic" pitchFamily="34" charset="-122"/>
+                <a:cs typeface="Malgun Gothic" pitchFamily="34" charset="-120"/>
+              </a:rPr>
+              <a:t>선택 논리 — 부가가치는 고객이 가져간 계층 아래(웨이퍼)가 아니라, 아직 풀지 못한 계층 위에서 만든다</a:t>
+            </a:r>
+            <a:endParaRPr lang="en-US" sz="1400" dirty="0"/>
+          </a:p>
+          <a:p>
+            <a:pPr indent="0" marL="0">
+              <a:lnSpc>
+                <a:spcPct val="112000"/>
+              </a:lnSpc>
+              <a:buNone/>
+            </a:pPr>
+            <a:r>
+              <a:rPr lang="en-US" sz="1100" dirty="0">
                 <a:solidFill>
                   <a:srgbClr val="5A7184"/>
                 </a:solidFill>
@@ -2794,57 +3739,1061 @@
                 <a:ea typeface="Malgun Gothic" pitchFamily="34" charset="-122"/>
                 <a:cs typeface="Malgun Gothic" pitchFamily="34" charset="-120"/>
               </a:rPr>
-              <a:t>FDP SDK·공통 라이브러리 (Linux·io_uring·SPDK) · Workload Profiler(trace→추천 RUH·예상 WAF) · Emulator/Digital Twin</a:t>
-            </a:r>
-            <a:endParaRPr lang="en-US" sz="1050" dirty="0"/>
-          </a:p>
-        </p:txBody>
-      </p:sp>
-      <p:sp>
-        <p:nvSpPr>
-          <p:cNvPr id="12" name="Shape 9"/>
-          <p:cNvSpPr/>
-          <p:nvPr/>
-        </p:nvSpPr>
-        <p:spPr>
-          <a:xfrm>
-            <a:off x="4297680" y="1280160"/>
-            <a:ext cx="3602736" cy="1737360"/>
+              <a:t>워크로드 ↔ FDP 정책 변환이 그 계층 — 삼성은 FDP 표준의 공동 주도자로서 이 계층을 선점할 위치에 있다</a:t>
+            </a:r>
+            <a:endParaRPr lang="en-US" sz="1400" dirty="0"/>
+          </a:p>
+        </p:txBody>
+      </p:sp>
+    </p:spTree>
+  </p:cSld>
+  <p:clrMapOvr>
+    <a:masterClrMapping/>
+  </p:clrMapOvr>
+</p:sld>
+</file>
+
+<file path=ppt/slides/slide3.xml><?xml version="1.0" encoding="utf-8"?>
+<p:sld xmlns:a="http://schemas.openxmlformats.org/drawingml/2006/main" xmlns:r="http://schemas.openxmlformats.org/officeDocument/2006/relationships" xmlns:p="http://schemas.openxmlformats.org/presentationml/2006/main">
+  <p:cSld name="Slide 3">
+    <p:spTree>
+      <p:nvGrpSpPr>
+        <p:cNvPr id="1" name=""/>
+        <p:cNvGrpSpPr/>
+        <p:nvPr/>
+      </p:nvGrpSpPr>
+      <p:grpSpPr>
+        <a:xfrm>
+          <a:off x="0" y="0"/>
+          <a:ext cx="0" cy="0"/>
+          <a:chOff x="0" y="0"/>
+          <a:chExt cx="0" cy="0"/>
+        </a:xfrm>
+      </p:grpSpPr>
+      <p:sp>
+        <p:nvSpPr>
+          <p:cNvPr id="2" name="Text 0"/>
+          <p:cNvSpPr/>
+          <p:nvPr/>
+        </p:nvSpPr>
+        <p:spPr>
+          <a:xfrm>
+            <a:off x="457200" y="237744"/>
+            <a:ext cx="9765792" cy="566928"/>
+          </a:xfrm>
+          <a:prstGeom prst="rect">
+            <a:avLst/>
+          </a:prstGeom>
+          <a:noFill/>
+          <a:ln/>
+        </p:spPr>
+        <p:txBody>
+          <a:bodyPr wrap="square" lIns="0" tIns="0" rIns="0" bIns="0" rtlCol="0" anchor="ctr"/>
+          <a:lstStyle/>
+          <a:p>
+            <a:pPr indent="0" marL="0">
+              <a:buNone/>
+            </a:pPr>
+            <a:r>
+              <a:rPr lang="en-US" sz="3200" b="1" dirty="0">
+                <a:solidFill>
+                  <a:srgbClr val="17313B"/>
+                </a:solidFill>
+                <a:latin typeface="Malgun Gothic" pitchFamily="34" charset="0"/>
+                <a:ea typeface="Malgun Gothic" pitchFamily="34" charset="-122"/>
+                <a:cs typeface="Malgun Gothic" pitchFamily="34" charset="-120"/>
+              </a:rPr>
+              <a:t>제품·기술 축 — FDP Host–SSD 통합 플랫폼</a:t>
+            </a:r>
+            <a:endParaRPr lang="en-US" sz="3200" dirty="0"/>
+          </a:p>
+        </p:txBody>
+      </p:sp>
+      <p:sp>
+        <p:nvSpPr>
+          <p:cNvPr id="3" name="Text 1"/>
+          <p:cNvSpPr/>
+          <p:nvPr/>
+        </p:nvSpPr>
+        <p:spPr>
+          <a:xfrm>
+            <a:off x="10268712" y="310896"/>
+            <a:ext cx="1463040" cy="420624"/>
           </a:xfrm>
           <a:prstGeom prst="roundRect">
             <a:avLst>
-              <a:gd name="adj" fmla="val 4737"/>
+              <a:gd name="adj" fmla="val 21739"/>
             </a:avLst>
           </a:prstGeom>
           <a:solidFill>
+            <a:srgbClr val="EFF3F5"/>
+          </a:solidFill>
+          <a:ln/>
+        </p:spPr>
+        <p:txBody>
+          <a:bodyPr wrap="square" lIns="0" tIns="0" rIns="0" bIns="0" rtlCol="0" anchor="ctr"/>
+          <a:lstStyle/>
+          <a:p>
+            <a:pPr algn="ctr" indent="0" marL="0">
+              <a:buNone/>
+            </a:pPr>
+            <a:r>
+              <a:rPr lang="en-US" sz="1400" b="1" dirty="0">
+                <a:solidFill>
+                  <a:srgbClr val="5A7184"/>
+                </a:solidFill>
+                <a:latin typeface="Malgun Gothic" pitchFamily="34" charset="0"/>
+                <a:ea typeface="Malgun Gothic" pitchFamily="34" charset="-122"/>
+                <a:cs typeface="Malgun Gothic" pitchFamily="34" charset="-120"/>
+              </a:rPr>
+              <a:t>제품 축 ③</a:t>
+            </a:r>
+            <a:endParaRPr lang="en-US" sz="1400" dirty="0"/>
+          </a:p>
+        </p:txBody>
+      </p:sp>
+      <p:sp>
+        <p:nvSpPr>
+          <p:cNvPr id="4" name="Text 2"/>
+          <p:cNvSpPr/>
+          <p:nvPr/>
+        </p:nvSpPr>
+        <p:spPr>
+          <a:xfrm>
+            <a:off x="457200" y="6510528"/>
+            <a:ext cx="6949440" cy="256032"/>
+          </a:xfrm>
+          <a:prstGeom prst="rect">
+            <a:avLst/>
+          </a:prstGeom>
+          <a:noFill/>
+          <a:ln/>
+        </p:spPr>
+        <p:txBody>
+          <a:bodyPr wrap="square" lIns="0" tIns="0" rIns="0" bIns="0" rtlCol="0" anchor="ctr"/>
+          <a:lstStyle/>
+          <a:p>
+            <a:pPr indent="0" marL="0">
+              <a:buNone/>
+            </a:pPr>
+            <a:r>
+              <a:rPr lang="en-US" sz="1000" dirty="0">
+                <a:solidFill>
+                  <a:srgbClr val="5A7184"/>
+                </a:solidFill>
+                <a:latin typeface="Malgun Gothic" pitchFamily="34" charset="0"/>
+                <a:ea typeface="Malgun Gothic" pitchFamily="34" charset="-122"/>
+                <a:cs typeface="Malgun Gothic" pitchFamily="34" charset="-120"/>
+              </a:rPr>
+              <a:t>삼성전자 메모리사업부 · 개발실 체질 전환 전략 요약 · 2026-07-24</a:t>
+            </a:r>
+            <a:endParaRPr lang="en-US" sz="1000" dirty="0"/>
+          </a:p>
+        </p:txBody>
+      </p:sp>
+      <p:sp>
+        <p:nvSpPr>
+          <p:cNvPr id="5" name="Text 3"/>
+          <p:cNvSpPr/>
+          <p:nvPr/>
+        </p:nvSpPr>
+        <p:spPr>
+          <a:xfrm>
+            <a:off x="7589520" y="6510528"/>
+            <a:ext cx="4142232" cy="256032"/>
+          </a:xfrm>
+          <a:prstGeom prst="rect">
+            <a:avLst/>
+          </a:prstGeom>
+          <a:noFill/>
+          <a:ln/>
+        </p:spPr>
+        <p:txBody>
+          <a:bodyPr wrap="square" lIns="0" tIns="0" rIns="0" bIns="0" rtlCol="0" anchor="ctr"/>
+          <a:lstStyle/>
+          <a:p>
+            <a:pPr algn="r" indent="0" marL="0">
+              <a:buNone/>
+            </a:pPr>
+            <a:r>
+              <a:rPr lang="en-US" sz="1000" dirty="0">
+                <a:solidFill>
+                  <a:srgbClr val="5A7184"/>
+                </a:solidFill>
+                <a:latin typeface="Malgun Gothic" pitchFamily="34" charset="0"/>
+                <a:ea typeface="Malgun Gothic" pitchFamily="34" charset="-122"/>
+                <a:cs typeface="Malgun Gothic" pitchFamily="34" charset="-120"/>
+              </a:rPr>
+              <a:t>원천: wiki/strategies/fdp-host-ssd-platform.md</a:t>
+            </a:r>
+            <a:endParaRPr lang="en-US" sz="1000" dirty="0"/>
+          </a:p>
+        </p:txBody>
+      </p:sp>
+      <p:sp>
+        <p:nvSpPr>
+          <p:cNvPr id="6" name="Text 4"/>
+          <p:cNvSpPr/>
+          <p:nvPr/>
+        </p:nvSpPr>
+        <p:spPr>
+          <a:xfrm>
+            <a:off x="457200" y="859536"/>
+            <a:ext cx="11274552" cy="548640"/>
+          </a:xfrm>
+          <a:prstGeom prst="roundRect">
+            <a:avLst>
+              <a:gd name="adj" fmla="val 15000"/>
+            </a:avLst>
+          </a:prstGeom>
+          <a:solidFill>
             <a:srgbClr val="F5F7F8"/>
           </a:solidFill>
           <a:ln/>
         </p:spPr>
-      </p:sp>
-      <p:sp>
-        <p:nvSpPr>
-          <p:cNvPr id="13" name="Shape 10"/>
-          <p:cNvSpPr/>
-          <p:nvPr/>
-        </p:nvSpPr>
-        <p:spPr>
-          <a:xfrm>
-            <a:off x="4480560" y="1444752"/>
-            <a:ext cx="402336" cy="402336"/>
+        <p:txBody>
+          <a:bodyPr wrap="square" lIns="0" tIns="0" rIns="0" bIns="0" rtlCol="0" anchor="ctr"/>
+          <a:lstStyle/>
+          <a:p>
+            <a:pPr algn="ctr" indent="0" marL="0">
+              <a:buNone/>
+            </a:pPr>
+            <a:r>
+              <a:rPr lang="en-US" sz="1500" b="1" dirty="0">
+                <a:solidFill>
+                  <a:srgbClr val="17313B"/>
+                </a:solidFill>
+                <a:latin typeface="Malgun Gothic" pitchFamily="34" charset="0"/>
+                <a:ea typeface="Malgun Gothic" pitchFamily="34" charset="-122"/>
+                <a:cs typeface="Malgun Gothic" pitchFamily="34" charset="-120"/>
+              </a:rPr>
+              <a:t>FDP SSD 공급자 → FDP 기반 Host–SSD 통합 솔루션 제공자   </a:t>
+            </a:r>
+            <a:pPr algn="ctr" indent="0" marL="0">
+              <a:buNone/>
+            </a:pPr>
+            <a:r>
+              <a:rPr lang="en-US" sz="1250" i="1" dirty="0">
+                <a:solidFill>
+                  <a:srgbClr val="5A7184"/>
+                </a:solidFill>
+                <a:latin typeface="Malgun Gothic" pitchFamily="34" charset="0"/>
+                <a:ea typeface="Malgun Gothic" pitchFamily="34" charset="-122"/>
+                <a:cs typeface="Malgun Gothic" pitchFamily="34" charset="-120"/>
+              </a:rPr>
+              <a:t>“Binding으로 수요 확보 · FDP로 표준화 · 시스템 SW로 연결”</a:t>
+            </a:r>
+            <a:endParaRPr lang="en-US" sz="1500" dirty="0"/>
+          </a:p>
+        </p:txBody>
+      </p:sp>
+      <p:sp>
+        <p:nvSpPr>
+          <p:cNvPr id="7" name="Text 5"/>
+          <p:cNvSpPr/>
+          <p:nvPr/>
+        </p:nvSpPr>
+        <p:spPr>
+          <a:xfrm>
+            <a:off x="457200" y="1554480"/>
+            <a:ext cx="1682496" cy="713232"/>
+          </a:xfrm>
+          <a:prstGeom prst="roundRect">
+            <a:avLst>
+              <a:gd name="adj" fmla="val 8974"/>
+            </a:avLst>
+          </a:prstGeom>
+          <a:solidFill>
+            <a:srgbClr val="FFFFFF"/>
+          </a:solidFill>
+          <a:ln w="12700">
+            <a:solidFill>
+              <a:srgbClr val="DCE4E9"/>
+            </a:solidFill>
+          </a:ln>
+        </p:spPr>
+        <p:txBody>
+          <a:bodyPr wrap="square" lIns="0" tIns="0" rIns="0" bIns="0" rtlCol="0" anchor="ctr"/>
+          <a:lstStyle/>
+          <a:p>
+            <a:pPr algn="ctr" indent="0" marL="0">
+              <a:lnSpc>
+                <a:spcPct val="105000"/>
+              </a:lnSpc>
+              <a:buNone/>
+            </a:pPr>
+            <a:r>
+              <a:rPr lang="en-US" sz="1200" b="1" dirty="0">
+                <a:solidFill>
+                  <a:srgbClr val="17313B"/>
+                </a:solidFill>
+                <a:latin typeface="Malgun Gothic" pitchFamily="34" charset="0"/>
+                <a:ea typeface="Malgun Gothic" pitchFamily="34" charset="-122"/>
+                <a:cs typeface="Malgun Gothic" pitchFamily="34" charset="-120"/>
+              </a:rPr>
+              <a:t>Binding 계약</a:t>
+            </a:r>
+            <a:endParaRPr lang="en-US" sz="1200" dirty="0"/>
+          </a:p>
+          <a:p>
+            <a:pPr algn="ctr" indent="0" marL="0">
+              <a:lnSpc>
+                <a:spcPct val="105000"/>
+              </a:lnSpc>
+              <a:buNone/>
+            </a:pPr>
+            <a:r>
+              <a:rPr lang="en-US" sz="950" dirty="0">
+                <a:solidFill>
+                  <a:srgbClr val="5A7184"/>
+                </a:solidFill>
+                <a:latin typeface="Malgun Gothic" pitchFamily="34" charset="0"/>
+                <a:ea typeface="Malgun Gothic" pitchFamily="34" charset="-122"/>
+                <a:cs typeface="Malgun Gothic" pitchFamily="34" charset="-120"/>
+              </a:rPr>
+              <a:t>장기 물량 확보</a:t>
+            </a:r>
+            <a:endParaRPr lang="en-US" sz="1200" dirty="0"/>
+          </a:p>
+        </p:txBody>
+      </p:sp>
+      <p:sp>
+        <p:nvSpPr>
+          <p:cNvPr id="8" name="Text 6"/>
+          <p:cNvSpPr/>
+          <p:nvPr/>
+        </p:nvSpPr>
+        <p:spPr>
+          <a:xfrm>
+            <a:off x="2139696" y="1554480"/>
+            <a:ext cx="201168" cy="713232"/>
+          </a:xfrm>
+          <a:prstGeom prst="rect">
+            <a:avLst/>
+          </a:prstGeom>
+          <a:noFill/>
+          <a:ln/>
+        </p:spPr>
+        <p:txBody>
+          <a:bodyPr wrap="square" lIns="0" tIns="0" rIns="0" bIns="0" rtlCol="0" anchor="ctr"/>
+          <a:lstStyle/>
+          <a:p>
+            <a:pPr algn="ctr" indent="0" marL="0">
+              <a:buNone/>
+            </a:pPr>
+            <a:r>
+              <a:rPr lang="en-US" sz="1050" dirty="0">
+                <a:solidFill>
+                  <a:srgbClr val="5A7184"/>
+                </a:solidFill>
+                <a:latin typeface="Malgun Gothic" pitchFamily="34" charset="0"/>
+                <a:ea typeface="Malgun Gothic" pitchFamily="34" charset="-122"/>
+                <a:cs typeface="Malgun Gothic" pitchFamily="34" charset="-120"/>
+              </a:rPr>
+              <a:t>▶</a:t>
+            </a:r>
+            <a:endParaRPr lang="en-US" sz="1050" dirty="0"/>
+          </a:p>
+        </p:txBody>
+      </p:sp>
+      <p:sp>
+        <p:nvSpPr>
+          <p:cNvPr id="9" name="Text 7"/>
+          <p:cNvSpPr/>
+          <p:nvPr/>
+        </p:nvSpPr>
+        <p:spPr>
+          <a:xfrm>
+            <a:off x="2340864" y="1554480"/>
+            <a:ext cx="1682496" cy="713232"/>
+          </a:xfrm>
+          <a:prstGeom prst="roundRect">
+            <a:avLst>
+              <a:gd name="adj" fmla="val 8974"/>
+            </a:avLst>
+          </a:prstGeom>
+          <a:solidFill>
+            <a:srgbClr val="FFFFFF"/>
+          </a:solidFill>
+          <a:ln w="12700">
+            <a:solidFill>
+              <a:srgbClr val="DCE4E9"/>
+            </a:solidFill>
+          </a:ln>
+        </p:spPr>
+        <p:txBody>
+          <a:bodyPr wrap="square" lIns="0" tIns="0" rIns="0" bIns="0" rtlCol="0" anchor="ctr"/>
+          <a:lstStyle/>
+          <a:p>
+            <a:pPr algn="ctr" indent="0" marL="0">
+              <a:lnSpc>
+                <a:spcPct val="105000"/>
+              </a:lnSpc>
+              <a:buNone/>
+            </a:pPr>
+            <a:r>
+              <a:rPr lang="en-US" sz="1200" b="1" dirty="0">
+                <a:solidFill>
+                  <a:srgbClr val="17313B"/>
+                </a:solidFill>
+                <a:latin typeface="Malgun Gothic" pitchFamily="34" charset="0"/>
+                <a:ea typeface="Malgun Gothic" pitchFamily="34" charset="-122"/>
+                <a:cs typeface="Malgun Gothic" pitchFamily="34" charset="-120"/>
+              </a:rPr>
+              <a:t>FDP 표준 SSD</a:t>
+            </a:r>
+            <a:endParaRPr lang="en-US" sz="1200" dirty="0"/>
+          </a:p>
+          <a:p>
+            <a:pPr algn="ctr" indent="0" marL="0">
+              <a:lnSpc>
+                <a:spcPct val="105000"/>
+              </a:lnSpc>
+              <a:buNone/>
+            </a:pPr>
+            <a:r>
+              <a:rPr lang="en-US" sz="950" dirty="0">
+                <a:solidFill>
+                  <a:srgbClr val="5A7184"/>
+                </a:solidFill>
+                <a:latin typeface="Malgun Gothic" pitchFamily="34" charset="0"/>
+                <a:ea typeface="Malgun Gothic" pitchFamily="34" charset="-122"/>
+                <a:cs typeface="Malgun Gothic" pitchFamily="34" charset="-120"/>
+              </a:rPr>
+              <a:t>공통 인터페이스</a:t>
+            </a:r>
+            <a:endParaRPr lang="en-US" sz="1200" dirty="0"/>
+          </a:p>
+        </p:txBody>
+      </p:sp>
+      <p:sp>
+        <p:nvSpPr>
+          <p:cNvPr id="10" name="Text 8"/>
+          <p:cNvSpPr/>
+          <p:nvPr/>
+        </p:nvSpPr>
+        <p:spPr>
+          <a:xfrm>
+            <a:off x="4023360" y="1554480"/>
+            <a:ext cx="201168" cy="713232"/>
+          </a:xfrm>
+          <a:prstGeom prst="rect">
+            <a:avLst/>
+          </a:prstGeom>
+          <a:noFill/>
+          <a:ln/>
+        </p:spPr>
+        <p:txBody>
+          <a:bodyPr wrap="square" lIns="0" tIns="0" rIns="0" bIns="0" rtlCol="0" anchor="ctr"/>
+          <a:lstStyle/>
+          <a:p>
+            <a:pPr algn="ctr" indent="0" marL="0">
+              <a:buNone/>
+            </a:pPr>
+            <a:r>
+              <a:rPr lang="en-US" sz="1050" dirty="0">
+                <a:solidFill>
+                  <a:srgbClr val="5A7184"/>
+                </a:solidFill>
+                <a:latin typeface="Malgun Gothic" pitchFamily="34" charset="0"/>
+                <a:ea typeface="Malgun Gothic" pitchFamily="34" charset="-122"/>
+                <a:cs typeface="Malgun Gothic" pitchFamily="34" charset="-120"/>
+              </a:rPr>
+              <a:t>▶</a:t>
+            </a:r>
+            <a:endParaRPr lang="en-US" sz="1050" dirty="0"/>
+          </a:p>
+        </p:txBody>
+      </p:sp>
+      <p:sp>
+        <p:nvSpPr>
+          <p:cNvPr id="11" name="Text 9"/>
+          <p:cNvSpPr/>
+          <p:nvPr/>
+        </p:nvSpPr>
+        <p:spPr>
+          <a:xfrm>
+            <a:off x="4224528" y="1554480"/>
+            <a:ext cx="1682496" cy="713232"/>
+          </a:xfrm>
+          <a:prstGeom prst="roundRect">
+            <a:avLst>
+              <a:gd name="adj" fmla="val 8974"/>
+            </a:avLst>
+          </a:prstGeom>
+          <a:solidFill>
+            <a:srgbClr val="E8F6F0"/>
+          </a:solidFill>
+          <a:ln w="15875">
+            <a:solidFill>
+              <a:srgbClr val="02A878"/>
+            </a:solidFill>
+          </a:ln>
+        </p:spPr>
+        <p:txBody>
+          <a:bodyPr wrap="square" lIns="0" tIns="0" rIns="0" bIns="0" rtlCol="0" anchor="ctr"/>
+          <a:lstStyle/>
+          <a:p>
+            <a:pPr algn="ctr" indent="0" marL="0">
+              <a:lnSpc>
+                <a:spcPct val="105000"/>
+              </a:lnSpc>
+              <a:buNone/>
+            </a:pPr>
+            <a:r>
+              <a:rPr lang="en-US" sz="1200" b="1" dirty="0">
+                <a:solidFill>
+                  <a:srgbClr val="02A878"/>
+                </a:solidFill>
+                <a:latin typeface="Malgun Gothic" pitchFamily="34" charset="0"/>
+                <a:ea typeface="Malgun Gothic" pitchFamily="34" charset="-122"/>
+                <a:cs typeface="Malgun Gothic" pitchFamily="34" charset="-120"/>
+              </a:rPr>
+              <a:t>시스템 SW</a:t>
+            </a:r>
+            <a:endParaRPr lang="en-US" sz="1200" dirty="0"/>
+          </a:p>
+          <a:p>
+            <a:pPr algn="ctr" indent="0" marL="0">
+              <a:lnSpc>
+                <a:spcPct val="105000"/>
+              </a:lnSpc>
+              <a:buNone/>
+            </a:pPr>
+            <a:r>
+              <a:rPr lang="en-US" sz="950" dirty="0">
+                <a:solidFill>
+                  <a:srgbClr val="5A7184"/>
+                </a:solidFill>
+                <a:latin typeface="Malgun Gothic" pitchFamily="34" charset="0"/>
+                <a:ea typeface="Malgun Gothic" pitchFamily="34" charset="-122"/>
+                <a:cs typeface="Malgun Gothic" pitchFamily="34" charset="-120"/>
+              </a:rPr>
+              <a:t>워크로드→정책 변환</a:t>
+            </a:r>
+            <a:endParaRPr lang="en-US" sz="1200" dirty="0"/>
+          </a:p>
+        </p:txBody>
+      </p:sp>
+      <p:sp>
+        <p:nvSpPr>
+          <p:cNvPr id="12" name="Text 10"/>
+          <p:cNvSpPr/>
+          <p:nvPr/>
+        </p:nvSpPr>
+        <p:spPr>
+          <a:xfrm>
+            <a:off x="5907024" y="1554480"/>
+            <a:ext cx="201168" cy="713232"/>
+          </a:xfrm>
+          <a:prstGeom prst="rect">
+            <a:avLst/>
+          </a:prstGeom>
+          <a:noFill/>
+          <a:ln/>
+        </p:spPr>
+        <p:txBody>
+          <a:bodyPr wrap="square" lIns="0" tIns="0" rIns="0" bIns="0" rtlCol="0" anchor="ctr"/>
+          <a:lstStyle/>
+          <a:p>
+            <a:pPr algn="ctr" indent="0" marL="0">
+              <a:buNone/>
+            </a:pPr>
+            <a:r>
+              <a:rPr lang="en-US" sz="1050" dirty="0">
+                <a:solidFill>
+                  <a:srgbClr val="5A7184"/>
+                </a:solidFill>
+                <a:latin typeface="Malgun Gothic" pitchFamily="34" charset="0"/>
+                <a:ea typeface="Malgun Gothic" pitchFamily="34" charset="-122"/>
+                <a:cs typeface="Malgun Gothic" pitchFamily="34" charset="-120"/>
+              </a:rPr>
+              <a:t>▶</a:t>
+            </a:r>
+            <a:endParaRPr lang="en-US" sz="1050" dirty="0"/>
+          </a:p>
+        </p:txBody>
+      </p:sp>
+      <p:sp>
+        <p:nvSpPr>
+          <p:cNvPr id="13" name="Text 11"/>
+          <p:cNvSpPr/>
+          <p:nvPr/>
+        </p:nvSpPr>
+        <p:spPr>
+          <a:xfrm>
+            <a:off x="6108192" y="1554480"/>
+            <a:ext cx="1682496" cy="713232"/>
+          </a:xfrm>
+          <a:prstGeom prst="roundRect">
+            <a:avLst>
+              <a:gd name="adj" fmla="val 8974"/>
+            </a:avLst>
+          </a:prstGeom>
+          <a:solidFill>
+            <a:srgbClr val="FFFFFF"/>
+          </a:solidFill>
+          <a:ln w="12700">
+            <a:solidFill>
+              <a:srgbClr val="DCE4E9"/>
+            </a:solidFill>
+          </a:ln>
+        </p:spPr>
+        <p:txBody>
+          <a:bodyPr wrap="square" lIns="0" tIns="0" rIns="0" bIns="0" rtlCol="0" anchor="ctr"/>
+          <a:lstStyle/>
+          <a:p>
+            <a:pPr algn="ctr" indent="0" marL="0">
+              <a:lnSpc>
+                <a:spcPct val="105000"/>
+              </a:lnSpc>
+              <a:buNone/>
+            </a:pPr>
+            <a:r>
+              <a:rPr lang="en-US" sz="1200" b="1" dirty="0">
+                <a:solidFill>
+                  <a:srgbClr val="17313B"/>
+                </a:solidFill>
+                <a:latin typeface="Malgun Gothic" pitchFamily="34" charset="0"/>
+                <a:ea typeface="Malgun Gothic" pitchFamily="34" charset="-122"/>
+                <a:cs typeface="Malgun Gothic" pitchFamily="34" charset="-120"/>
+              </a:rPr>
+              <a:t>E2E 검증</a:t>
+            </a:r>
+            <a:endParaRPr lang="en-US" sz="1200" dirty="0"/>
+          </a:p>
+          <a:p>
+            <a:pPr algn="ctr" indent="0" marL="0">
+              <a:lnSpc>
+                <a:spcPct val="105000"/>
+              </a:lnSpc>
+              <a:buNone/>
+            </a:pPr>
+            <a:r>
+              <a:rPr lang="en-US" sz="950" dirty="0">
+                <a:solidFill>
+                  <a:srgbClr val="5A7184"/>
+                </a:solidFill>
+                <a:latin typeface="Malgun Gothic" pitchFamily="34" charset="0"/>
+                <a:ea typeface="Malgun Gothic" pitchFamily="34" charset="-122"/>
+                <a:cs typeface="Malgun Gothic" pitchFamily="34" charset="-120"/>
+              </a:rPr>
+              <a:t>TCO 개선 보장</a:t>
+            </a:r>
+            <a:endParaRPr lang="en-US" sz="1200" dirty="0"/>
+          </a:p>
+        </p:txBody>
+      </p:sp>
+      <p:sp>
+        <p:nvSpPr>
+          <p:cNvPr id="14" name="Text 12"/>
+          <p:cNvSpPr/>
+          <p:nvPr/>
+        </p:nvSpPr>
+        <p:spPr>
+          <a:xfrm>
+            <a:off x="7790688" y="1554480"/>
+            <a:ext cx="201168" cy="713232"/>
+          </a:xfrm>
+          <a:prstGeom prst="rect">
+            <a:avLst/>
+          </a:prstGeom>
+          <a:noFill/>
+          <a:ln/>
+        </p:spPr>
+        <p:txBody>
+          <a:bodyPr wrap="square" lIns="0" tIns="0" rIns="0" bIns="0" rtlCol="0" anchor="ctr"/>
+          <a:lstStyle/>
+          <a:p>
+            <a:pPr algn="ctr" indent="0" marL="0">
+              <a:buNone/>
+            </a:pPr>
+            <a:r>
+              <a:rPr lang="en-US" sz="1050" dirty="0">
+                <a:solidFill>
+                  <a:srgbClr val="5A7184"/>
+                </a:solidFill>
+                <a:latin typeface="Malgun Gothic" pitchFamily="34" charset="0"/>
+                <a:ea typeface="Malgun Gothic" pitchFamily="34" charset="-122"/>
+                <a:cs typeface="Malgun Gothic" pitchFamily="34" charset="-120"/>
+              </a:rPr>
+              <a:t>▶</a:t>
+            </a:r>
+            <a:endParaRPr lang="en-US" sz="1050" dirty="0"/>
+          </a:p>
+        </p:txBody>
+      </p:sp>
+      <p:sp>
+        <p:nvSpPr>
+          <p:cNvPr id="15" name="Text 13"/>
+          <p:cNvSpPr/>
+          <p:nvPr/>
+        </p:nvSpPr>
+        <p:spPr>
+          <a:xfrm>
+            <a:off x="7991856" y="1554480"/>
+            <a:ext cx="1682496" cy="713232"/>
+          </a:xfrm>
+          <a:prstGeom prst="roundRect">
+            <a:avLst>
+              <a:gd name="adj" fmla="val 8974"/>
+            </a:avLst>
+          </a:prstGeom>
+          <a:solidFill>
+            <a:srgbClr val="FFFFFF"/>
+          </a:solidFill>
+          <a:ln w="12700">
+            <a:solidFill>
+              <a:srgbClr val="DCE4E9"/>
+            </a:solidFill>
+          </a:ln>
+        </p:spPr>
+        <p:txBody>
+          <a:bodyPr wrap="square" lIns="0" tIns="0" rIns="0" bIns="0" rtlCol="0" anchor="ctr"/>
+          <a:lstStyle/>
+          <a:p>
+            <a:pPr algn="ctr" indent="0" marL="0">
+              <a:lnSpc>
+                <a:spcPct val="105000"/>
+              </a:lnSpc>
+              <a:buNone/>
+            </a:pPr>
+            <a:r>
+              <a:rPr lang="en-US" sz="1200" b="1" dirty="0">
+                <a:solidFill>
+                  <a:srgbClr val="17313B"/>
+                </a:solidFill>
+                <a:latin typeface="Malgun Gothic" pitchFamily="34" charset="0"/>
+                <a:ea typeface="Malgun Gothic" pitchFamily="34" charset="-122"/>
+                <a:cs typeface="Malgun Gothic" pitchFamily="34" charset="-120"/>
+              </a:rPr>
+              <a:t>고객 공동개발</a:t>
+            </a:r>
+            <a:endParaRPr lang="en-US" sz="1200" dirty="0"/>
+          </a:p>
+          <a:p>
+            <a:pPr algn="ctr" indent="0" marL="0">
+              <a:lnSpc>
+                <a:spcPct val="105000"/>
+              </a:lnSpc>
+              <a:buNone/>
+            </a:pPr>
+            <a:r>
+              <a:rPr lang="en-US" sz="950" dirty="0">
+                <a:solidFill>
+                  <a:srgbClr val="5A7184"/>
+                </a:solidFill>
+                <a:latin typeface="Malgun Gothic" pitchFamily="34" charset="0"/>
+                <a:ea typeface="Malgun Gothic" pitchFamily="34" charset="-122"/>
+                <a:cs typeface="Malgun Gothic" pitchFamily="34" charset="-120"/>
+              </a:rPr>
+              <a:t>장기 관계 구축</a:t>
+            </a:r>
+            <a:endParaRPr lang="en-US" sz="1200" dirty="0"/>
+          </a:p>
+        </p:txBody>
+      </p:sp>
+      <p:sp>
+        <p:nvSpPr>
+          <p:cNvPr id="16" name="Text 14"/>
+          <p:cNvSpPr/>
+          <p:nvPr/>
+        </p:nvSpPr>
+        <p:spPr>
+          <a:xfrm>
+            <a:off x="9674352" y="1554480"/>
+            <a:ext cx="201168" cy="713232"/>
+          </a:xfrm>
+          <a:prstGeom prst="rect">
+            <a:avLst/>
+          </a:prstGeom>
+          <a:noFill/>
+          <a:ln/>
+        </p:spPr>
+        <p:txBody>
+          <a:bodyPr wrap="square" lIns="0" tIns="0" rIns="0" bIns="0" rtlCol="0" anchor="ctr"/>
+          <a:lstStyle/>
+          <a:p>
+            <a:pPr algn="ctr" indent="0" marL="0">
+              <a:buNone/>
+            </a:pPr>
+            <a:r>
+              <a:rPr lang="en-US" sz="1050" dirty="0">
+                <a:solidFill>
+                  <a:srgbClr val="5A7184"/>
+                </a:solidFill>
+                <a:latin typeface="Malgun Gothic" pitchFamily="34" charset="0"/>
+                <a:ea typeface="Malgun Gothic" pitchFamily="34" charset="-122"/>
+                <a:cs typeface="Malgun Gothic" pitchFamily="34" charset="-120"/>
+              </a:rPr>
+              <a:t>▶</a:t>
+            </a:r>
+            <a:endParaRPr lang="en-US" sz="1050" dirty="0"/>
+          </a:p>
+        </p:txBody>
+      </p:sp>
+      <p:sp>
+        <p:nvSpPr>
+          <p:cNvPr id="17" name="Text 15"/>
+          <p:cNvSpPr/>
+          <p:nvPr/>
+        </p:nvSpPr>
+        <p:spPr>
+          <a:xfrm>
+            <a:off x="9875520" y="1554480"/>
+            <a:ext cx="1682496" cy="713232"/>
+          </a:xfrm>
+          <a:prstGeom prst="roundRect">
+            <a:avLst>
+              <a:gd name="adj" fmla="val 8974"/>
+            </a:avLst>
+          </a:prstGeom>
+          <a:solidFill>
+            <a:srgbClr val="FFFFFF"/>
+          </a:solidFill>
+          <a:ln w="12700">
+            <a:solidFill>
+              <a:srgbClr val="DCE4E9"/>
+            </a:solidFill>
+          </a:ln>
+        </p:spPr>
+        <p:txBody>
+          <a:bodyPr wrap="square" lIns="0" tIns="0" rIns="0" bIns="0" rtlCol="0" anchor="ctr"/>
+          <a:lstStyle/>
+          <a:p>
+            <a:pPr algn="ctr" indent="0" marL="0">
+              <a:lnSpc>
+                <a:spcPct val="105000"/>
+              </a:lnSpc>
+              <a:buNone/>
+            </a:pPr>
+            <a:r>
+              <a:rPr lang="en-US" sz="1200" b="1" dirty="0">
+                <a:solidFill>
+                  <a:srgbClr val="17313B"/>
+                </a:solidFill>
+                <a:latin typeface="Malgun Gothic" pitchFamily="34" charset="0"/>
+                <a:ea typeface="Malgun Gothic" pitchFamily="34" charset="-122"/>
+                <a:cs typeface="Malgun Gothic" pitchFamily="34" charset="-120"/>
+              </a:rPr>
+              <a:t>텔레메트리</a:t>
+            </a:r>
+            <a:endParaRPr lang="en-US" sz="1200" dirty="0"/>
+          </a:p>
+          <a:p>
+            <a:pPr algn="ctr" indent="0" marL="0">
+              <a:lnSpc>
+                <a:spcPct val="105000"/>
+              </a:lnSpc>
+              <a:buNone/>
+            </a:pPr>
+            <a:r>
+              <a:rPr lang="en-US" sz="950" dirty="0">
+                <a:solidFill>
+                  <a:srgbClr val="5A7184"/>
+                </a:solidFill>
+                <a:latin typeface="Malgun Gothic" pitchFamily="34" charset="0"/>
+                <a:ea typeface="Malgun Gothic" pitchFamily="34" charset="-122"/>
+                <a:cs typeface="Malgun Gothic" pitchFamily="34" charset="-120"/>
+              </a:rPr>
+              <a:t>지속 개선 루프</a:t>
+            </a:r>
+            <a:endParaRPr lang="en-US" sz="1200" dirty="0"/>
+          </a:p>
+        </p:txBody>
+      </p:sp>
+      <p:sp>
+        <p:nvSpPr>
+          <p:cNvPr id="18" name="Shape 16"/>
+          <p:cNvSpPr/>
+          <p:nvPr/>
+        </p:nvSpPr>
+        <p:spPr>
+          <a:xfrm>
+            <a:off x="457200" y="2432304"/>
+            <a:ext cx="3602736" cy="1389888"/>
+          </a:xfrm>
+          <a:prstGeom prst="roundRect">
+            <a:avLst>
+              <a:gd name="adj" fmla="val 5921"/>
+            </a:avLst>
+          </a:prstGeom>
+          <a:solidFill>
+            <a:srgbClr val="F5F7F8"/>
+          </a:solidFill>
+          <a:ln/>
+        </p:spPr>
+      </p:sp>
+      <p:sp>
+        <p:nvSpPr>
+          <p:cNvPr id="19" name="Shape 17"/>
+          <p:cNvSpPr/>
+          <p:nvPr/>
+        </p:nvSpPr>
+        <p:spPr>
+          <a:xfrm>
+            <a:off x="621792" y="2578608"/>
+            <a:ext cx="365760" cy="365760"/>
           </a:xfrm>
           <a:prstGeom prst="ellipse">
             <a:avLst/>
           </a:prstGeom>
           <a:solidFill>
-            <a:srgbClr val="028090"/>
+            <a:srgbClr val="0E6BA8"/>
           </a:solidFill>
           <a:ln/>
         </p:spPr>
       </p:sp>
       <p:pic>
         <p:nvPicPr>
-          <p:cNvPr id="14" name="Image 1" descr="preencoded.png">    </p:cNvPr>
+          <p:cNvPr id="20" name="Image 0" descr="preencoded.png">    </p:cNvPr>
+          <p:cNvPicPr>
+            <a:picLocks noChangeAspect="1"/>
+          </p:cNvPicPr>
+          <p:nvPr/>
+        </p:nvPicPr>
+        <p:blipFill>
+          <a:blip r:embed="rId1"/>
+          <a:stretch>
+            <a:fillRect/>
+          </a:stretch>
+        </p:blipFill>
+        <p:spPr>
+          <a:xfrm>
+            <a:off x="709574" y="2666390"/>
+            <a:ext cx="190195" cy="190195"/>
+          </a:xfrm>
+          <a:prstGeom prst="rect">
+            <a:avLst/>
+          </a:prstGeom>
+        </p:spPr>
+      </p:pic>
+      <p:sp>
+        <p:nvSpPr>
+          <p:cNvPr id="21" name="Text 18"/>
+          <p:cNvSpPr/>
+          <p:nvPr/>
+        </p:nvSpPr>
+        <p:spPr>
+          <a:xfrm>
+            <a:off x="1078992" y="2578608"/>
+            <a:ext cx="2834640" cy="329184"/>
+          </a:xfrm>
+          <a:prstGeom prst="rect">
+            <a:avLst/>
+          </a:prstGeom>
+          <a:noFill/>
+          <a:ln/>
+        </p:spPr>
+        <p:txBody>
+          <a:bodyPr wrap="square" lIns="0" tIns="0" rIns="0" bIns="0" rtlCol="0" anchor="ctr"/>
+          <a:lstStyle/>
+          <a:p>
+            <a:pPr indent="0" marL="0">
+              <a:buNone/>
+            </a:pPr>
+            <a:r>
+              <a:rPr lang="en-US" sz="1300" b="1" dirty="0">
+                <a:solidFill>
+                  <a:srgbClr val="17313B"/>
+                </a:solidFill>
+                <a:latin typeface="Malgun Gothic" pitchFamily="34" charset="0"/>
+                <a:ea typeface="Malgun Gothic" pitchFamily="34" charset="-122"/>
+                <a:cs typeface="Malgun Gothic" pitchFamily="34" charset="-120"/>
+              </a:rPr>
+              <a:t>1. Enablement Platform</a:t>
+            </a:r>
+            <a:endParaRPr lang="en-US" sz="1300" dirty="0"/>
+          </a:p>
+        </p:txBody>
+      </p:sp>
+      <p:sp>
+        <p:nvSpPr>
+          <p:cNvPr id="22" name="Text 19"/>
+          <p:cNvSpPr/>
+          <p:nvPr/>
+        </p:nvSpPr>
+        <p:spPr>
+          <a:xfrm>
+            <a:off x="640080" y="2999232"/>
+            <a:ext cx="3255264" cy="768096"/>
+          </a:xfrm>
+          <a:prstGeom prst="rect">
+            <a:avLst/>
+          </a:prstGeom>
+          <a:noFill/>
+          <a:ln/>
+        </p:spPr>
+        <p:txBody>
+          <a:bodyPr wrap="square" lIns="0" tIns="0" rIns="0" bIns="0" rtlCol="0" anchor="t"/>
+          <a:lstStyle/>
+          <a:p>
+            <a:pPr indent="0" marL="0">
+              <a:lnSpc>
+                <a:spcPct val="110000"/>
+              </a:lnSpc>
+              <a:buNone/>
+            </a:pPr>
+            <a:r>
+              <a:rPr lang="en-US" sz="1000" dirty="0">
+                <a:solidFill>
+                  <a:srgbClr val="5A7184"/>
+                </a:solidFill>
+                <a:latin typeface="Malgun Gothic" pitchFamily="34" charset="0"/>
+                <a:ea typeface="Malgun Gothic" pitchFamily="34" charset="-122"/>
+                <a:cs typeface="Malgun Gothic" pitchFamily="34" charset="-120"/>
+              </a:rPr>
+              <a:t>SDK·라이브러리(Linux·SPDK) · Workload Profiler · Emulator/Digital Twin</a:t>
+            </a:r>
+            <a:endParaRPr lang="en-US" sz="1000" dirty="0"/>
+          </a:p>
+        </p:txBody>
+      </p:sp>
+      <p:sp>
+        <p:nvSpPr>
+          <p:cNvPr id="23" name="Shape 20"/>
+          <p:cNvSpPr/>
+          <p:nvPr/>
+        </p:nvSpPr>
+        <p:spPr>
+          <a:xfrm>
+            <a:off x="4297680" y="2432304"/>
+            <a:ext cx="3602736" cy="1389888"/>
+          </a:xfrm>
+          <a:prstGeom prst="roundRect">
+            <a:avLst>
+              <a:gd name="adj" fmla="val 5921"/>
+            </a:avLst>
+          </a:prstGeom>
+          <a:solidFill>
+            <a:srgbClr val="F5F7F8"/>
+          </a:solidFill>
+          <a:ln/>
+        </p:spPr>
+      </p:sp>
+      <p:sp>
+        <p:nvSpPr>
+          <p:cNvPr id="24" name="Shape 21"/>
+          <p:cNvSpPr/>
+          <p:nvPr/>
+        </p:nvSpPr>
+        <p:spPr>
+          <a:xfrm>
+            <a:off x="4462272" y="2578608"/>
+            <a:ext cx="365760" cy="365760"/>
+          </a:xfrm>
+          <a:prstGeom prst="ellipse">
+            <a:avLst/>
+          </a:prstGeom>
+          <a:solidFill>
+            <a:srgbClr val="028090"/>
+          </a:solidFill>
+          <a:ln/>
+        </p:spPr>
+      </p:sp>
+      <p:pic>
+        <p:nvPicPr>
+          <p:cNvPr id="25" name="Image 1" descr="preencoded.png">    </p:cNvPr>
           <p:cNvPicPr>
             <a:picLocks noChangeAspect="1"/>
           </p:cNvPicPr>
@@ -2858,8 +4807,8 @@
         </p:blipFill>
         <p:spPr>
           <a:xfrm>
-            <a:off x="4577121" y="1541313"/>
-            <a:ext cx="209215" cy="209215"/>
+            <a:off x="4550054" y="2666390"/>
+            <a:ext cx="190195" cy="190195"/>
           </a:xfrm>
           <a:prstGeom prst="rect">
             <a:avLst/>
@@ -2868,14 +4817,14 @@
       </p:pic>
       <p:sp>
         <p:nvSpPr>
-          <p:cNvPr id="15" name="Text 11"/>
-          <p:cNvSpPr/>
-          <p:nvPr/>
-        </p:nvSpPr>
-        <p:spPr>
-          <a:xfrm>
-            <a:off x="4992624" y="1463040"/>
-            <a:ext cx="2743200" cy="365760"/>
+          <p:cNvPr id="26" name="Text 22"/>
+          <p:cNvSpPr/>
+          <p:nvPr/>
+        </p:nvSpPr>
+        <p:spPr>
+          <a:xfrm>
+            <a:off x="4919472" y="2578608"/>
+            <a:ext cx="2834640" cy="329184"/>
           </a:xfrm>
           <a:prstGeom prst="rect">
             <a:avLst/>
@@ -2891,7 +4840,7 @@
               <a:buNone/>
             </a:pPr>
             <a:r>
-              <a:rPr lang="en-US" sz="1400" b="1" dirty="0">
+              <a:rPr lang="en-US" sz="1300" b="1" dirty="0">
                 <a:solidFill>
                   <a:srgbClr val="17313B"/>
                 </a:solidFill>
@@ -2899,22 +4848,22 @@
                 <a:ea typeface="Malgun Gothic" pitchFamily="34" charset="-122"/>
                 <a:cs typeface="Malgun Gothic" pitchFamily="34" charset="-120"/>
               </a:rPr>
-              <a:t>2. 표준 워크로드 프로파일</a:t>
-            </a:r>
-            <a:endParaRPr lang="en-US" sz="1400" dirty="0"/>
-          </a:p>
-        </p:txBody>
-      </p:sp>
-      <p:sp>
-        <p:nvSpPr>
-          <p:cNvPr id="16" name="Text 12"/>
-          <p:cNvSpPr/>
-          <p:nvPr/>
-        </p:nvSpPr>
-        <p:spPr>
-          <a:xfrm>
-            <a:off x="4498848" y="1956816"/>
-            <a:ext cx="3200400" cy="969264"/>
+              <a:t>2. 표준 프로파일 7종</a:t>
+            </a:r>
+            <a:endParaRPr lang="en-US" sz="1300" dirty="0"/>
+          </a:p>
+        </p:txBody>
+      </p:sp>
+      <p:sp>
+        <p:nvSpPr>
+          <p:cNvPr id="27" name="Text 23"/>
+          <p:cNvSpPr/>
+          <p:nvPr/>
+        </p:nvSpPr>
+        <p:spPr>
+          <a:xfrm>
+            <a:off x="4480560" y="2999232"/>
+            <a:ext cx="3255264" cy="768096"/>
           </a:xfrm>
           <a:prstGeom prst="rect">
             <a:avLst/>
@@ -2928,12 +4877,12 @@
           <a:p>
             <a:pPr indent="0" marL="0">
               <a:lnSpc>
-                <a:spcPct val="112000"/>
+                <a:spcPct val="110000"/>
               </a:lnSpc>
               <a:buNone/>
             </a:pPr>
             <a:r>
-              <a:rPr lang="en-US" sz="1050" dirty="0">
+              <a:rPr lang="en-US" sz="1000" dirty="0">
                 <a:solidFill>
                   <a:srgbClr val="5A7184"/>
                 </a:solidFill>
@@ -2941,26 +4890,26 @@
                 <a:ea typeface="Malgun Gothic" pitchFamily="34" charset="-122"/>
                 <a:cs typeface="Malgun Gothic" pitchFamily="34" charset="-120"/>
               </a:rPr>
-              <a:t>Cache·KV·DB·Multi-tenant·Vector·Checkpoint·QLC 7종 — 펌웨어 공통화와 고객별 최적화 양립</a:t>
-            </a:r>
-            <a:endParaRPr lang="en-US" sz="1050" dirty="0"/>
-          </a:p>
-        </p:txBody>
-      </p:sp>
-      <p:sp>
-        <p:nvSpPr>
-          <p:cNvPr id="17" name="Shape 13"/>
-          <p:cNvSpPr/>
-          <p:nvPr/>
-        </p:nvSpPr>
-        <p:spPr>
-          <a:xfrm>
-            <a:off x="8138160" y="1280160"/>
-            <a:ext cx="3602736" cy="1737360"/>
+              <a:t>Cache·KV·DB·Multi-tenant·Vector·Checkpoint·QLC — 펌웨어 공통화+고객 최적화</a:t>
+            </a:r>
+            <a:endParaRPr lang="en-US" sz="1000" dirty="0"/>
+          </a:p>
+        </p:txBody>
+      </p:sp>
+      <p:sp>
+        <p:nvSpPr>
+          <p:cNvPr id="28" name="Shape 24"/>
+          <p:cNvSpPr/>
+          <p:nvPr/>
+        </p:nvSpPr>
+        <p:spPr>
+          <a:xfrm>
+            <a:off x="8138160" y="2432304"/>
+            <a:ext cx="3602736" cy="1389888"/>
           </a:xfrm>
           <a:prstGeom prst="roundRect">
             <a:avLst>
-              <a:gd name="adj" fmla="val 4737"/>
+              <a:gd name="adj" fmla="val 5921"/>
             </a:avLst>
           </a:prstGeom>
           <a:solidFill>
@@ -2971,14 +4920,14 @@
       </p:sp>
       <p:sp>
         <p:nvSpPr>
-          <p:cNvPr id="18" name="Shape 14"/>
-          <p:cNvSpPr/>
-          <p:nvPr/>
-        </p:nvSpPr>
-        <p:spPr>
-          <a:xfrm>
-            <a:off x="8321040" y="1444752"/>
-            <a:ext cx="402336" cy="402336"/>
+          <p:cNvPr id="29" name="Shape 25"/>
+          <p:cNvSpPr/>
+          <p:nvPr/>
+        </p:nvSpPr>
+        <p:spPr>
+          <a:xfrm>
+            <a:off x="8302752" y="2578608"/>
+            <a:ext cx="365760" cy="365760"/>
           </a:xfrm>
           <a:prstGeom prst="ellipse">
             <a:avLst/>
@@ -2991,7 +4940,7 @@
       </p:sp>
       <p:pic>
         <p:nvPicPr>
-          <p:cNvPr id="19" name="Image 2" descr="preencoded.png">    </p:cNvPr>
+          <p:cNvPr id="30" name="Image 2" descr="preencoded.png">    </p:cNvPr>
           <p:cNvPicPr>
             <a:picLocks noChangeAspect="1"/>
           </p:cNvPicPr>
@@ -3005,8 +4954,8 @@
         </p:blipFill>
         <p:spPr>
           <a:xfrm>
-            <a:off x="8417601" y="1541313"/>
-            <a:ext cx="209215" cy="209215"/>
+            <a:off x="8390534" y="2666390"/>
+            <a:ext cx="190195" cy="190195"/>
           </a:xfrm>
           <a:prstGeom prst="rect">
             <a:avLst/>
@@ -3015,14 +4964,14 @@
       </p:pic>
       <p:sp>
         <p:nvSpPr>
-          <p:cNvPr id="20" name="Text 15"/>
-          <p:cNvSpPr/>
-          <p:nvPr/>
-        </p:nvSpPr>
-        <p:spPr>
-          <a:xfrm>
-            <a:off x="8833104" y="1463040"/>
-            <a:ext cx="2743200" cy="365760"/>
+          <p:cNvPr id="31" name="Text 26"/>
+          <p:cNvSpPr/>
+          <p:nvPr/>
+        </p:nvSpPr>
+        <p:spPr>
+          <a:xfrm>
+            <a:off x="8759952" y="2578608"/>
+            <a:ext cx="2834640" cy="329184"/>
           </a:xfrm>
           <a:prstGeom prst="rect">
             <a:avLst/>
@@ -3038,7 +4987,7 @@
               <a:buNone/>
             </a:pPr>
             <a:r>
-              <a:rPr lang="en-US" sz="1400" b="1" dirty="0">
+              <a:rPr lang="en-US" sz="1300" b="1" dirty="0">
                 <a:solidFill>
                   <a:srgbClr val="17313B"/>
                 </a:solidFill>
@@ -3046,22 +4995,22 @@
                 <a:ea typeface="Malgun Gothic" pitchFamily="34" charset="-122"/>
                 <a:cs typeface="Malgun Gothic" pitchFamily="34" charset="-120"/>
               </a:rPr>
-              <a:t>3. End-to-End 공동검증</a:t>
-            </a:r>
-            <a:endParaRPr lang="en-US" sz="1400" dirty="0"/>
-          </a:p>
-        </p:txBody>
-      </p:sp>
-      <p:sp>
-        <p:nvSpPr>
-          <p:cNvPr id="21" name="Text 16"/>
-          <p:cNvSpPr/>
-          <p:nvPr/>
-        </p:nvSpPr>
-        <p:spPr>
-          <a:xfrm>
-            <a:off x="8339328" y="1956816"/>
-            <a:ext cx="3200400" cy="969264"/>
+              <a:t>3. E2E 공동검증</a:t>
+            </a:r>
+            <a:endParaRPr lang="en-US" sz="1300" dirty="0"/>
+          </a:p>
+        </p:txBody>
+      </p:sp>
+      <p:sp>
+        <p:nvSpPr>
+          <p:cNvPr id="32" name="Text 27"/>
+          <p:cNvSpPr/>
+          <p:nvPr/>
+        </p:nvSpPr>
+        <p:spPr>
+          <a:xfrm>
+            <a:off x="8321040" y="2999232"/>
+            <a:ext cx="3255264" cy="768096"/>
           </a:xfrm>
           <a:prstGeom prst="rect">
             <a:avLst/>
@@ -3075,12 +5024,12 @@
           <a:p>
             <a:pPr indent="0" marL="0">
               <a:lnSpc>
-                <a:spcPct val="112000"/>
+                <a:spcPct val="110000"/>
               </a:lnSpc>
               <a:buNone/>
             </a:pPr>
             <a:r>
-              <a:rPr lang="en-US" sz="1050" dirty="0">
+              <a:rPr lang="en-US" sz="1000" dirty="0">
                 <a:solidFill>
                   <a:srgbClr val="5A7184"/>
                 </a:solidFill>
@@ -3088,26 +5037,26 @@
                 <a:ea typeface="Malgun Gothic" pitchFamily="34" charset="-122"/>
                 <a:cs typeface="Malgun Gothic" pitchFamily="34" charset="-120"/>
               </a:rPr>
-              <a:t>App→Host→SSD→NAND→텔레메트리 · 시스템 성과 지표(WAF·p999·격리·전력) · 고객 trace의 pre/post-silicon 재사용</a:t>
-            </a:r>
-            <a:endParaRPr lang="en-US" sz="1050" dirty="0"/>
-          </a:p>
-        </p:txBody>
-      </p:sp>
-      <p:sp>
-        <p:nvSpPr>
-          <p:cNvPr id="22" name="Shape 17"/>
-          <p:cNvSpPr/>
-          <p:nvPr/>
-        </p:nvSpPr>
-        <p:spPr>
-          <a:xfrm>
-            <a:off x="457200" y="3163824"/>
-            <a:ext cx="3602736" cy="1737360"/>
+              <a:t>App→Host→SSD→NAND · WAF·p999·격리·전력 · trace의 pre/post-silicon 재사용</a:t>
+            </a:r>
+            <a:endParaRPr lang="en-US" sz="1000" dirty="0"/>
+          </a:p>
+        </p:txBody>
+      </p:sp>
+      <p:sp>
+        <p:nvSpPr>
+          <p:cNvPr id="33" name="Shape 28"/>
+          <p:cNvSpPr/>
+          <p:nvPr/>
+        </p:nvSpPr>
+        <p:spPr>
+          <a:xfrm>
+            <a:off x="457200" y="3950208"/>
+            <a:ext cx="3602736" cy="1389888"/>
           </a:xfrm>
           <a:prstGeom prst="roundRect">
             <a:avLst>
-              <a:gd name="adj" fmla="val 4737"/>
+              <a:gd name="adj" fmla="val 5921"/>
             </a:avLst>
           </a:prstGeom>
           <a:solidFill>
@@ -3118,14 +5067,14 @@
       </p:sp>
       <p:sp>
         <p:nvSpPr>
-          <p:cNvPr id="23" name="Shape 18"/>
-          <p:cNvSpPr/>
-          <p:nvPr/>
-        </p:nvSpPr>
-        <p:spPr>
-          <a:xfrm>
-            <a:off x="640080" y="3328416"/>
-            <a:ext cx="402336" cy="402336"/>
+          <p:cNvPr id="34" name="Shape 29"/>
+          <p:cNvSpPr/>
+          <p:nvPr/>
+        </p:nvSpPr>
+        <p:spPr>
+          <a:xfrm>
+            <a:off x="621792" y="4096512"/>
+            <a:ext cx="365760" cy="365760"/>
           </a:xfrm>
           <a:prstGeom prst="ellipse">
             <a:avLst/>
@@ -3138,7 +5087,7 @@
       </p:sp>
       <p:pic>
         <p:nvPicPr>
-          <p:cNvPr id="24" name="Image 3" descr="preencoded.png">    </p:cNvPr>
+          <p:cNvPr id="35" name="Image 3" descr="preencoded.png">    </p:cNvPr>
           <p:cNvPicPr>
             <a:picLocks noChangeAspect="1"/>
           </p:cNvPicPr>
@@ -3152,8 +5101,8 @@
         </p:blipFill>
         <p:spPr>
           <a:xfrm>
-            <a:off x="736641" y="3424977"/>
-            <a:ext cx="209215" cy="209215"/>
+            <a:off x="709574" y="4184294"/>
+            <a:ext cx="190195" cy="190195"/>
           </a:xfrm>
           <a:prstGeom prst="rect">
             <a:avLst/>
@@ -3162,14 +5111,14 @@
       </p:pic>
       <p:sp>
         <p:nvSpPr>
-          <p:cNvPr id="25" name="Text 19"/>
-          <p:cNvSpPr/>
-          <p:nvPr/>
-        </p:nvSpPr>
-        <p:spPr>
-          <a:xfrm>
-            <a:off x="1152144" y="3346704"/>
-            <a:ext cx="2743200" cy="365760"/>
+          <p:cNvPr id="36" name="Text 30"/>
+          <p:cNvSpPr/>
+          <p:nvPr/>
+        </p:nvSpPr>
+        <p:spPr>
+          <a:xfrm>
+            <a:off x="1078992" y="4096512"/>
+            <a:ext cx="2834640" cy="329184"/>
           </a:xfrm>
           <a:prstGeom prst="rect">
             <a:avLst/>
@@ -3185,7 +5134,7 @@
               <a:buNone/>
             </a:pPr>
             <a:r>
-              <a:rPr lang="en-US" sz="1400" b="1" dirty="0">
+              <a:rPr lang="en-US" sz="1300" b="1" dirty="0">
                 <a:solidFill>
                   <a:srgbClr val="17313B"/>
                 </a:solidFill>
@@ -3195,20 +5144,20 @@
               </a:rPr>
               <a:t>4. 고객 공동개발 조직</a:t>
             </a:r>
-            <a:endParaRPr lang="en-US" sz="1400" dirty="0"/>
-          </a:p>
-        </p:txBody>
-      </p:sp>
-      <p:sp>
-        <p:nvSpPr>
-          <p:cNvPr id="26" name="Text 20"/>
-          <p:cNvSpPr/>
-          <p:nvPr/>
-        </p:nvSpPr>
-        <p:spPr>
-          <a:xfrm>
-            <a:off x="658368" y="3840480"/>
-            <a:ext cx="3200400" cy="969264"/>
+            <a:endParaRPr lang="en-US" sz="1300" dirty="0"/>
+          </a:p>
+        </p:txBody>
+      </p:sp>
+      <p:sp>
+        <p:nvSpPr>
+          <p:cNvPr id="37" name="Text 31"/>
+          <p:cNvSpPr/>
+          <p:nvPr/>
+        </p:nvSpPr>
+        <p:spPr>
+          <a:xfrm>
+            <a:off x="640080" y="4517136"/>
+            <a:ext cx="3255264" cy="768096"/>
           </a:xfrm>
           <a:prstGeom prst="rect">
             <a:avLst/>
@@ -3222,12 +5171,12 @@
           <a:p>
             <a:pPr indent="0" marL="0">
               <a:lnSpc>
-                <a:spcPct val="112000"/>
+                <a:spcPct val="110000"/>
               </a:lnSpc>
               <a:buNone/>
             </a:pPr>
             <a:r>
-              <a:rPr lang="en-US" sz="1050" dirty="0">
+              <a:rPr lang="en-US" sz="1000" dirty="0">
                 <a:solidFill>
                   <a:srgbClr val="5A7184"/>
                 </a:solidFill>
@@ -3235,26 +5184,26 @@
                 <a:ea typeface="Malgun Gothic" pitchFamily="34" charset="-122"/>
                 <a:cs typeface="Malgun Gothic" pitchFamily="34" charset="-120"/>
               </a:rPr>
-              <a:t>Host SW · Workload Integration · Solution Engineering · E2E Validation — 기술지원이 아니라 제품 기획·개발 참여</a:t>
-            </a:r>
-            <a:endParaRPr lang="en-US" sz="1050" dirty="0"/>
-          </a:p>
-        </p:txBody>
-      </p:sp>
-      <p:sp>
-        <p:nvSpPr>
-          <p:cNvPr id="27" name="Shape 21"/>
-          <p:cNvSpPr/>
-          <p:nvPr/>
-        </p:nvSpPr>
-        <p:spPr>
-          <a:xfrm>
-            <a:off x="4297680" y="3163824"/>
-            <a:ext cx="3602736" cy="1737360"/>
+              <a:t>Host SW·Workload Integration·Solution Eng·Validation — 제품 기획 참여</a:t>
+            </a:r>
+            <a:endParaRPr lang="en-US" sz="1000" dirty="0"/>
+          </a:p>
+        </p:txBody>
+      </p:sp>
+      <p:sp>
+        <p:nvSpPr>
+          <p:cNvPr id="38" name="Shape 32"/>
+          <p:cNvSpPr/>
+          <p:nvPr/>
+        </p:nvSpPr>
+        <p:spPr>
+          <a:xfrm>
+            <a:off x="4297680" y="3950208"/>
+            <a:ext cx="3602736" cy="1389888"/>
           </a:xfrm>
           <a:prstGeom prst="roundRect">
             <a:avLst>
-              <a:gd name="adj" fmla="val 4737"/>
+              <a:gd name="adj" fmla="val 5921"/>
             </a:avLst>
           </a:prstGeom>
           <a:solidFill>
@@ -3265,14 +5214,14 @@
       </p:sp>
       <p:sp>
         <p:nvSpPr>
-          <p:cNvPr id="28" name="Shape 22"/>
-          <p:cNvSpPr/>
-          <p:nvPr/>
-        </p:nvSpPr>
-        <p:spPr>
-          <a:xfrm>
-            <a:off x="4480560" y="3328416"/>
-            <a:ext cx="402336" cy="402336"/>
+          <p:cNvPr id="39" name="Shape 33"/>
+          <p:cNvSpPr/>
+          <p:nvPr/>
+        </p:nvSpPr>
+        <p:spPr>
+          <a:xfrm>
+            <a:off x="4462272" y="4096512"/>
+            <a:ext cx="365760" cy="365760"/>
           </a:xfrm>
           <a:prstGeom prst="ellipse">
             <a:avLst/>
@@ -3285,7 +5234,7 @@
       </p:sp>
       <p:pic>
         <p:nvPicPr>
-          <p:cNvPr id="29" name="Image 4" descr="preencoded.png">    </p:cNvPr>
+          <p:cNvPr id="40" name="Image 4" descr="preencoded.png">    </p:cNvPr>
           <p:cNvPicPr>
             <a:picLocks noChangeAspect="1"/>
           </p:cNvPicPr>
@@ -3299,8 +5248,8 @@
         </p:blipFill>
         <p:spPr>
           <a:xfrm>
-            <a:off x="4577121" y="3424977"/>
-            <a:ext cx="209215" cy="209215"/>
+            <a:off x="4550054" y="4184294"/>
+            <a:ext cx="190195" cy="190195"/>
           </a:xfrm>
           <a:prstGeom prst="rect">
             <a:avLst/>
@@ -3309,14 +5258,14 @@
       </p:pic>
       <p:sp>
         <p:nvSpPr>
-          <p:cNvPr id="30" name="Text 23"/>
-          <p:cNvSpPr/>
-          <p:nvPr/>
-        </p:nvSpPr>
-        <p:spPr>
-          <a:xfrm>
-            <a:off x="4992624" y="3346704"/>
-            <a:ext cx="2743200" cy="365760"/>
+          <p:cNvPr id="41" name="Text 34"/>
+          <p:cNvSpPr/>
+          <p:nvPr/>
+        </p:nvSpPr>
+        <p:spPr>
+          <a:xfrm>
+            <a:off x="4919472" y="4096512"/>
+            <a:ext cx="2834640" cy="329184"/>
           </a:xfrm>
           <a:prstGeom prst="rect">
             <a:avLst/>
@@ -3332,7 +5281,7 @@
               <a:buNone/>
             </a:pPr>
             <a:r>
-              <a:rPr lang="en-US" sz="1400" b="1" dirty="0">
+              <a:rPr lang="en-US" sz="1300" b="1" dirty="0">
                 <a:solidFill>
                   <a:srgbClr val="17313B"/>
                 </a:solidFill>
@@ -3340,22 +5289,22 @@
                 <a:ea typeface="Malgun Gothic" pitchFamily="34" charset="-122"/>
                 <a:cs typeface="Malgun Gothic" pitchFamily="34" charset="-120"/>
               </a:rPr>
-              <a:t>5. Binding 계약 기술협력</a:t>
-            </a:r>
-            <a:endParaRPr lang="en-US" sz="1400" dirty="0"/>
-          </a:p>
-        </p:txBody>
-      </p:sp>
-      <p:sp>
-        <p:nvSpPr>
-          <p:cNvPr id="31" name="Text 24"/>
-          <p:cNvSpPr/>
-          <p:nvPr/>
-        </p:nvSpPr>
-        <p:spPr>
-          <a:xfrm>
-            <a:off x="4498848" y="3840480"/>
-            <a:ext cx="3200400" cy="969264"/>
+              <a:t>5. Binding 기술협력</a:t>
+            </a:r>
+            <a:endParaRPr lang="en-US" sz="1300" dirty="0"/>
+          </a:p>
+        </p:txBody>
+      </p:sp>
+      <p:sp>
+        <p:nvSpPr>
+          <p:cNvPr id="42" name="Text 35"/>
+          <p:cNvSpPr/>
+          <p:nvPr/>
+        </p:nvSpPr>
+        <p:spPr>
+          <a:xfrm>
+            <a:off x="4480560" y="4517136"/>
+            <a:ext cx="3255264" cy="768096"/>
           </a:xfrm>
           <a:prstGeom prst="rect">
             <a:avLst/>
@@ -3369,12 +5318,12 @@
           <a:p>
             <a:pPr indent="0" marL="0">
               <a:lnSpc>
-                <a:spcPct val="112000"/>
+                <a:spcPct val="110000"/>
               </a:lnSpc>
               <a:buNone/>
             </a:pPr>
             <a:r>
-              <a:rPr lang="en-US" sz="1050" dirty="0">
+              <a:rPr lang="en-US" sz="1000" dirty="0">
                 <a:solidFill>
                   <a:srgbClr val="5A7184"/>
                 </a:solidFill>
@@ -3382,26 +5331,26 @@
                 <a:ea typeface="Malgun Gothic" pitchFamily="34" charset="-122"/>
                 <a:cs typeface="Malgun Gothic" pitchFamily="34" charset="-120"/>
               </a:rPr>
-              <a:t>고객: 물량·trace 제공·공동 로드맵 ↔ 삼성: 공급능력·SDK·개선 목표 — 공동 플랫폼 계약으로 확장</a:t>
-            </a:r>
-            <a:endParaRPr lang="en-US" sz="1050" dirty="0"/>
-          </a:p>
-        </p:txBody>
-      </p:sp>
-      <p:sp>
-        <p:nvSpPr>
-          <p:cNvPr id="32" name="Shape 25"/>
-          <p:cNvSpPr/>
-          <p:nvPr/>
-        </p:nvSpPr>
-        <p:spPr>
-          <a:xfrm>
-            <a:off x="8138160" y="3163824"/>
-            <a:ext cx="3602736" cy="1737360"/>
+              <a:t>물량·trace·공동 로드맵 ↔ 공급능력·SDK·개선 목표 — 공동 플랫폼 계약</a:t>
+            </a:r>
+            <a:endParaRPr lang="en-US" sz="1000" dirty="0"/>
+          </a:p>
+        </p:txBody>
+      </p:sp>
+      <p:sp>
+        <p:nvSpPr>
+          <p:cNvPr id="43" name="Shape 36"/>
+          <p:cNvSpPr/>
+          <p:nvPr/>
+        </p:nvSpPr>
+        <p:spPr>
+          <a:xfrm>
+            <a:off x="8138160" y="3950208"/>
+            <a:ext cx="3602736" cy="1389888"/>
           </a:xfrm>
           <a:prstGeom prst="roundRect">
             <a:avLst>
-              <a:gd name="adj" fmla="val 4737"/>
+              <a:gd name="adj" fmla="val 5921"/>
             </a:avLst>
           </a:prstGeom>
           <a:solidFill>
@@ -3412,14 +5361,14 @@
       </p:sp>
       <p:sp>
         <p:nvSpPr>
-          <p:cNvPr id="33" name="Shape 26"/>
-          <p:cNvSpPr/>
-          <p:nvPr/>
-        </p:nvSpPr>
-        <p:spPr>
-          <a:xfrm>
-            <a:off x="8321040" y="3328416"/>
-            <a:ext cx="402336" cy="402336"/>
+          <p:cNvPr id="44" name="Shape 37"/>
+          <p:cNvSpPr/>
+          <p:nvPr/>
+        </p:nvSpPr>
+        <p:spPr>
+          <a:xfrm>
+            <a:off x="8302752" y="4096512"/>
+            <a:ext cx="365760" cy="365760"/>
           </a:xfrm>
           <a:prstGeom prst="ellipse">
             <a:avLst/>
@@ -3432,7 +5381,7 @@
       </p:sp>
       <p:pic>
         <p:nvPicPr>
-          <p:cNvPr id="34" name="Image 5" descr="preencoded.png">    </p:cNvPr>
+          <p:cNvPr id="45" name="Image 5" descr="preencoded.png">    </p:cNvPr>
           <p:cNvPicPr>
             <a:picLocks noChangeAspect="1"/>
           </p:cNvPicPr>
@@ -3446,8 +5395,8 @@
         </p:blipFill>
         <p:spPr>
           <a:xfrm>
-            <a:off x="8417601" y="3424977"/>
-            <a:ext cx="209215" cy="209215"/>
+            <a:off x="8390534" y="4184294"/>
+            <a:ext cx="190195" cy="190195"/>
           </a:xfrm>
           <a:prstGeom prst="rect">
             <a:avLst/>
@@ -3456,14 +5405,14 @@
       </p:pic>
       <p:sp>
         <p:nvSpPr>
-          <p:cNvPr id="35" name="Text 27"/>
-          <p:cNvSpPr/>
-          <p:nvPr/>
-        </p:nvSpPr>
-        <p:spPr>
-          <a:xfrm>
-            <a:off x="8833104" y="3346704"/>
-            <a:ext cx="2743200" cy="365760"/>
+          <p:cNvPr id="46" name="Text 38"/>
+          <p:cNvSpPr/>
+          <p:nvPr/>
+        </p:nvSpPr>
+        <p:spPr>
+          <a:xfrm>
+            <a:off x="8759952" y="4096512"/>
+            <a:ext cx="2834640" cy="329184"/>
           </a:xfrm>
           <a:prstGeom prst="rect">
             <a:avLst/>
@@ -3479,7 +5428,7 @@
               <a:buNone/>
             </a:pPr>
             <a:r>
-              <a:rPr lang="en-US" sz="1400" b="1" dirty="0">
+              <a:rPr lang="en-US" sz="1300" b="1" dirty="0">
                 <a:solidFill>
                   <a:srgbClr val="17313B"/>
                 </a:solidFill>
@@ -3489,20 +5438,20 @@
               </a:rPr>
               <a:t>6. 오픈소스·차별화 경계</a:t>
             </a:r>
-            <a:endParaRPr lang="en-US" sz="1400" dirty="0"/>
-          </a:p>
-        </p:txBody>
-      </p:sp>
-      <p:sp>
-        <p:nvSpPr>
-          <p:cNvPr id="36" name="Text 28"/>
-          <p:cNvSpPr/>
-          <p:nvPr/>
-        </p:nvSpPr>
-        <p:spPr>
-          <a:xfrm>
-            <a:off x="8339328" y="3840480"/>
-            <a:ext cx="3200400" cy="969264"/>
+            <a:endParaRPr lang="en-US" sz="1300" dirty="0"/>
+          </a:p>
+        </p:txBody>
+      </p:sp>
+      <p:sp>
+        <p:nvSpPr>
+          <p:cNvPr id="47" name="Text 39"/>
+          <p:cNvSpPr/>
+          <p:nvPr/>
+        </p:nvSpPr>
+        <p:spPr>
+          <a:xfrm>
+            <a:off x="8321040" y="4517136"/>
+            <a:ext cx="3255264" cy="768096"/>
           </a:xfrm>
           <a:prstGeom prst="rect">
             <a:avLst/>
@@ -3516,12 +5465,12 @@
           <a:p>
             <a:pPr indent="0" marL="0">
               <a:lnSpc>
-                <a:spcPct val="112000"/>
+                <a:spcPct val="110000"/>
               </a:lnSpc>
               <a:buNone/>
             </a:pPr>
             <a:r>
-              <a:rPr lang="en-US" sz="1050" dirty="0">
+              <a:rPr lang="en-US" sz="1000" dirty="0">
                 <a:solidFill>
                   <a:srgbClr val="5A7184"/>
                 </a:solidFill>
@@ -3529,26 +5478,26 @@
                 <a:ea typeface="Malgun Gothic" pitchFamily="34" charset="-122"/>
                 <a:cs typeface="Malgun Gothic" pitchFamily="34" charset="-120"/>
               </a:rPr>
-              <a:t>공개: 기본 라이브러리·연동·적합성 테스트 / 차별화: NAND·FTL 모델·정책 추천·예측 모델 — lock-in 우려 해소</a:t>
-            </a:r>
-            <a:endParaRPr lang="en-US" sz="1050" dirty="0"/>
-          </a:p>
-        </p:txBody>
-      </p:sp>
-      <p:sp>
-        <p:nvSpPr>
-          <p:cNvPr id="37" name="Shape 29"/>
-          <p:cNvSpPr/>
-          <p:nvPr/>
-        </p:nvSpPr>
-        <p:spPr>
-          <a:xfrm>
-            <a:off x="457200" y="5175504"/>
-            <a:ext cx="11274552" cy="822960"/>
+              <a:t>공개: 라이브러리·연동·적합성 / 차별화: FTL 모델·정책 추천·예측</a:t>
+            </a:r>
+            <a:endParaRPr lang="en-US" sz="1000" dirty="0"/>
+          </a:p>
+        </p:txBody>
+      </p:sp>
+      <p:sp>
+        <p:nvSpPr>
+          <p:cNvPr id="48" name="Shape 40"/>
+          <p:cNvSpPr/>
+          <p:nvPr/>
+        </p:nvSpPr>
+        <p:spPr>
+          <a:xfrm>
+            <a:off x="457200" y="5522976"/>
+            <a:ext cx="11274552" cy="658368"/>
           </a:xfrm>
           <a:prstGeom prst="roundRect">
             <a:avLst>
-              <a:gd name="adj" fmla="val 8889"/>
+              <a:gd name="adj" fmla="val 11111"/>
             </a:avLst>
           </a:prstGeom>
           <a:solidFill>
@@ -3564,7 +5513,7 @@
       </p:sp>
       <p:pic>
         <p:nvPicPr>
-          <p:cNvPr id="38" name="Image 6" descr="preencoded.png">    </p:cNvPr>
+          <p:cNvPr id="49" name="Image 6" descr="preencoded.png">    </p:cNvPr>
           <p:cNvPicPr>
             <a:picLocks noChangeAspect="1"/>
           </p:cNvPicPr>
@@ -3578,7 +5527,7 @@
         </p:blipFill>
         <p:spPr>
           <a:xfrm>
-            <a:off x="658368" y="5404104"/>
+            <a:off x="658368" y="5669280"/>
             <a:ext cx="365760" cy="365760"/>
           </a:xfrm>
           <a:prstGeom prst="rect">
@@ -3588,14 +5537,14 @@
       </p:pic>
       <p:sp>
         <p:nvSpPr>
-          <p:cNvPr id="39" name="Text 30"/>
-          <p:cNvSpPr/>
-          <p:nvPr/>
-        </p:nvSpPr>
-        <p:spPr>
-          <a:xfrm>
-            <a:off x="1152144" y="5175504"/>
-            <a:ext cx="10424160" cy="822960"/>
+          <p:cNvPr id="50" name="Text 41"/>
+          <p:cNvSpPr/>
+          <p:nvPr/>
+        </p:nvSpPr>
+        <p:spPr>
+          <a:xfrm>
+            <a:off x="1152144" y="5522976"/>
+            <a:ext cx="10424160" cy="658368"/>
           </a:xfrm>
           <a:prstGeom prst="rect">
             <a:avLst/>
@@ -3614,7 +5563,7 @@
               <a:buNone/>
             </a:pPr>
             <a:r>
-              <a:rPr lang="en-US" sz="1450" b="1" dirty="0">
+              <a:rPr lang="en-US" sz="1350" b="1" dirty="0">
                 <a:solidFill>
                   <a:srgbClr val="17313B"/>
                 </a:solidFill>
@@ -3622,9 +5571,9 @@
                 <a:ea typeface="Malgun Gothic" pitchFamily="34" charset="-122"/>
                 <a:cs typeface="Malgun Gothic" pitchFamily="34" charset="-120"/>
               </a:rPr>
-              <a:t>핵심 KPI — 고객 시스템에서 FDP가 실제 활성화된 SSD 용량</a:t>
-            </a:r>
-            <a:endParaRPr lang="en-US" sz="1450" dirty="0"/>
+              <a:t>핵심 KPI — 고객 시스템에서 FDP가 실제 활성화된 SSD 용량 · Captive→삼성 완제품 전환 물량</a:t>
+            </a:r>
+            <a:endParaRPr lang="en-US" sz="1350" dirty="0"/>
           </a:p>
           <a:p>
             <a:pPr indent="0" marL="0">
@@ -3634,7 +5583,7 @@
               <a:buNone/>
             </a:pPr>
             <a:r>
-              <a:rPr lang="en-US" sz="1100" dirty="0">
+              <a:rPr lang="en-US" sz="1050" dirty="0">
                 <a:solidFill>
                   <a:srgbClr val="5A7184"/>
                 </a:solidFill>
@@ -3642,48 +5591,9 @@
                 <a:ea typeface="Malgun Gothic" pitchFamily="34" charset="-122"/>
                 <a:cs typeface="Malgun Gothic" pitchFamily="34" charset="-120"/>
               </a:rPr>
-              <a:t>지원 SSD 출하량만 세면 미사용 기능이 된다 · Captive SSD 계획에서 삼성 완제품으로 전환된 물량을 병행 추적 · WAF·p999·usable capacity 개선율</a:t>
-            </a:r>
-            <a:endParaRPr lang="en-US" sz="1450" dirty="0"/>
-          </a:p>
-        </p:txBody>
-      </p:sp>
-      <p:sp>
-        <p:nvSpPr>
-          <p:cNvPr id="40" name="Text 31"/>
-          <p:cNvSpPr/>
-          <p:nvPr/>
-        </p:nvSpPr>
-        <p:spPr>
-          <a:xfrm>
-            <a:off x="457200" y="6108192"/>
-            <a:ext cx="11274552" cy="256032"/>
-          </a:xfrm>
-          <a:prstGeom prst="rect">
-            <a:avLst/>
-          </a:prstGeom>
-          <a:noFill/>
-          <a:ln/>
-        </p:spPr>
-        <p:txBody>
-          <a:bodyPr wrap="square" lIns="0" tIns="0" rIns="0" bIns="0" rtlCol="0" anchor="ctr"/>
-          <a:lstStyle/>
-          <a:p>
-            <a:pPr algn="ctr" indent="0" marL="0">
-              <a:buNone/>
-            </a:pPr>
-            <a:r>
-              <a:rPr lang="en-US" sz="1200" i="1" dirty="0">
-                <a:solidFill>
-                  <a:srgbClr val="5A7184"/>
-                </a:solidFill>
-                <a:latin typeface="Malgun Gothic" pitchFamily="34" charset="0"/>
-                <a:ea typeface="Malgun Gothic" pitchFamily="34" charset="-122"/>
-                <a:cs typeface="Malgun Gothic" pitchFamily="34" charset="-120"/>
-              </a:rPr>
-              <a:t>실행 주체: 인재 축(FDE 스타)이 이 플랫폼을 들고 고객 아키텍처 안으로 들어간다</a:t>
-            </a:r>
-            <a:endParaRPr lang="en-US" sz="1200" dirty="0"/>
+              <a:t>실행 주체: 인재 축(FDE 스타)이 이 플랫폼을 들고 고객 아키텍처 안으로 들어간다 — 단계: 기본 도구 → 전략 고객 공동검증 → 상용 플랫폼화 → Host Control 확장</a:t>
+            </a:r>
+            <a:endParaRPr lang="en-US" sz="1350" dirty="0"/>
           </a:p>
         </p:txBody>
       </p:sp>

--- a/dashboard/public/downloads/dev-transformation-summary-fdp.pptx
+++ b/dashboard/public/downloads/dev-transformation-summary-fdp.pptx
@@ -8,9 +8,10 @@
     <p:sldId id="256" r:id="rId2"/>
     <p:sldId id="257" r:id="rId3"/>
     <p:sldId id="258" r:id="rId4"/>
+    <p:sldId id="259" r:id="rId5"/>
   </p:sldIdLst>
   <p:notesMasterIdLst>
-    <p:notesMasterId r:id="rId5"/>
+    <p:notesMasterId r:id="rId6"/>
   </p:notesMasterIdLst>
   <p:sldSz cx="12192000" cy="6858000"/>
   <p:notesSz cx="6858000" cy="12192000"/>
@@ -722,6 +723,94 @@
 </p:notes>
 </file>
 
+<file path=ppt/notesSlides/notesSlide4.xml><?xml version="1.0" encoding="utf-8"?>
+<p:notes xmlns:a="http://schemas.openxmlformats.org/drawingml/2006/main" xmlns:r="http://schemas.openxmlformats.org/officeDocument/2006/relationships" xmlns:p="http://schemas.openxmlformats.org/presentationml/2006/main">
+  <p:cSld>
+    <p:spTree>
+      <p:nvGrpSpPr>
+        <p:cNvPr id="1" name=""/>
+        <p:cNvGrpSpPr/>
+        <p:nvPr/>
+      </p:nvGrpSpPr>
+      <p:grpSpPr>
+        <a:xfrm>
+          <a:off x="0" y="0"/>
+          <a:ext cx="0" cy="0"/>
+          <a:chOff x="0" y="0"/>
+          <a:chExt cx="0" cy="0"/>
+        </a:xfrm>
+      </p:grpSpPr>
+      <p:sp>
+        <p:nvSpPr>
+          <p:cNvPr id="2" name="Slide Image Placeholder 1"/>
+          <p:cNvSpPr>
+            <a:spLocks noGrp="1" noRot="1" noChangeAspect="1"/>
+          </p:cNvSpPr>
+          <p:nvPr>
+            <p:ph type="sldImg"/>
+          </p:nvPr>
+        </p:nvSpPr>
+        <p:spPr/>
+      </p:sp>
+      <p:sp>
+        <p:nvSpPr>
+          <p:cNvPr id="3" name="Notes Placeholder 2"/>
+          <p:cNvSpPr>
+            <a:spLocks noGrp="1"/>
+          </p:cNvSpPr>
+          <p:nvPr>
+            <p:ph type="body" idx="1"/>
+          </p:nvPr>
+        </p:nvSpPr>
+        <p:spPr/>
+        <p:txBody>
+          <a:bodyPr/>
+          <a:lstStyle/>
+          <a:p>
+            <a:r>
+              <a:rPr lang="en-US" dirty="0"/>
+              <a:t/>
+            </a:r>
+            <a:endParaRPr lang="en-US" dirty="0"/>
+          </a:p>
+        </p:txBody>
+      </p:sp>
+      <p:sp>
+        <p:nvSpPr>
+          <p:cNvPr id="4" name="Slide Number Placeholder 3"/>
+          <p:cNvSpPr>
+            <a:spLocks noGrp="1"/>
+          </p:cNvSpPr>
+          <p:nvPr>
+            <p:ph type="sldNum" sz="quarter" idx="10"/>
+          </p:nvPr>
+        </p:nvSpPr>
+        <p:spPr/>
+        <p:txBody>
+          <a:bodyPr/>
+          <a:lstStyle/>
+          <a:p>
+            <a:fld id="{F7021451-1387-4CA6-816F-3879F97B5CBC}" type="slidenum">
+              <a:rPr lang="en-US"/>
+              <a:t>4</a:t>
+            </a:fld>
+            <a:endParaRPr lang="en-US"/>
+          </a:p>
+        </p:txBody>
+      </p:sp>
+    </p:spTree>
+    <p:extLst>
+      <p:ext uri="{BB962C8B-B14F-4D97-AF65-F5344CB8AC3E}">
+        <p14:creationId xmlns:p14="http://schemas.microsoft.com/office/powerpoint/2010/main" val="1024086991"/>
+      </p:ext>
+    </p:extLst>
+  </p:cSld>
+  <p:clrMapOvr>
+    <a:masterClrMapping/>
+  </p:clrMapOvr>
+</p:notes>
+</file>
+
 <file path=ppt/slideLayouts/slideLayout1.xml><?xml version="1.0" encoding="utf-8"?>
 <p:sldLayout xmlns:a="http://schemas.openxmlformats.org/drawingml/2006/main" xmlns:r="http://schemas.openxmlformats.org/officeDocument/2006/relationships" xmlns:p="http://schemas.openxmlformats.org/presentationml/2006/main" preserve="1">
   <p:cSld name="DEFAULT">
@@ -5594,6 +5683,1340 @@
               <a:t>실행 주체: 인재 축(FDE 스타)이 이 플랫폼을 들고 고객 아키텍처 안으로 들어간다 — 단계: 기본 도구 → 전략 고객 공동검증 → 상용 플랫폼화 → Host Control 확장</a:t>
             </a:r>
             <a:endParaRPr lang="en-US" sz="1350" dirty="0"/>
+          </a:p>
+        </p:txBody>
+      </p:sp>
+    </p:spTree>
+  </p:cSld>
+  <p:clrMapOvr>
+    <a:masterClrMapping/>
+  </p:clrMapOvr>
+</p:sld>
+</file>
+
+<file path=ppt/slides/slide4.xml><?xml version="1.0" encoding="utf-8"?>
+<p:sld xmlns:a="http://schemas.openxmlformats.org/drawingml/2006/main" xmlns:r="http://schemas.openxmlformats.org/officeDocument/2006/relationships" xmlns:p="http://schemas.openxmlformats.org/presentationml/2006/main">
+  <p:cSld name="Slide 4">
+    <p:spTree>
+      <p:nvGrpSpPr>
+        <p:cNvPr id="1" name=""/>
+        <p:cNvGrpSpPr/>
+        <p:nvPr/>
+      </p:nvGrpSpPr>
+      <p:grpSpPr>
+        <a:xfrm>
+          <a:off x="0" y="0"/>
+          <a:ext cx="0" cy="0"/>
+          <a:chOff x="0" y="0"/>
+          <a:chExt cx="0" cy="0"/>
+        </a:xfrm>
+      </p:grpSpPr>
+      <p:sp>
+        <p:nvSpPr>
+          <p:cNvPr id="2" name="Text 0"/>
+          <p:cNvSpPr/>
+          <p:nvPr/>
+        </p:nvSpPr>
+        <p:spPr>
+          <a:xfrm>
+            <a:off x="457200" y="237744"/>
+            <a:ext cx="9765792" cy="566928"/>
+          </a:xfrm>
+          <a:prstGeom prst="rect">
+            <a:avLst/>
+          </a:prstGeom>
+          <a:noFill/>
+          <a:ln/>
+        </p:spPr>
+        <p:txBody>
+          <a:bodyPr wrap="square" lIns="0" tIns="0" rIns="0" bIns="0" rtlCol="0" anchor="ctr"/>
+          <a:lstStyle/>
+          <a:p>
+            <a:pPr indent="0" marL="0">
+              <a:buNone/>
+            </a:pPr>
+            <a:r>
+              <a:rPr lang="en-US" sz="3200" b="1" dirty="0">
+                <a:solidFill>
+                  <a:srgbClr val="17313B"/>
+                </a:solidFill>
+                <a:latin typeface="Malgun Gothic" pitchFamily="34" charset="0"/>
+                <a:ea typeface="Malgun Gothic" pitchFamily="34" charset="-122"/>
+                <a:cs typeface="Malgun Gothic" pitchFamily="34" charset="-120"/>
+              </a:rPr>
+              <a:t>제품·기술 축 — FDP Host–SSD 통합 플랫폼</a:t>
+            </a:r>
+            <a:endParaRPr lang="en-US" sz="3200" dirty="0"/>
+          </a:p>
+        </p:txBody>
+      </p:sp>
+      <p:sp>
+        <p:nvSpPr>
+          <p:cNvPr id="3" name="Text 1"/>
+          <p:cNvSpPr/>
+          <p:nvPr/>
+        </p:nvSpPr>
+        <p:spPr>
+          <a:xfrm>
+            <a:off x="10268712" y="310896"/>
+            <a:ext cx="1463040" cy="420624"/>
+          </a:xfrm>
+          <a:prstGeom prst="roundRect">
+            <a:avLst>
+              <a:gd name="adj" fmla="val 21739"/>
+            </a:avLst>
+          </a:prstGeom>
+          <a:solidFill>
+            <a:srgbClr val="EFF3F5"/>
+          </a:solidFill>
+          <a:ln/>
+        </p:spPr>
+        <p:txBody>
+          <a:bodyPr wrap="square" lIns="0" tIns="0" rIns="0" bIns="0" rtlCol="0" anchor="ctr"/>
+          <a:lstStyle/>
+          <a:p>
+            <a:pPr algn="ctr" indent="0" marL="0">
+              <a:buNone/>
+            </a:pPr>
+            <a:r>
+              <a:rPr lang="en-US" sz="1400" b="1" dirty="0">
+                <a:solidFill>
+                  <a:srgbClr val="5A7184"/>
+                </a:solidFill>
+                <a:latin typeface="Malgun Gothic" pitchFamily="34" charset="0"/>
+                <a:ea typeface="Malgun Gothic" pitchFamily="34" charset="-122"/>
+                <a:cs typeface="Malgun Gothic" pitchFamily="34" charset="-120"/>
+              </a:rPr>
+              <a:t>제품 축 ④</a:t>
+            </a:r>
+            <a:endParaRPr lang="en-US" sz="1400" dirty="0"/>
+          </a:p>
+        </p:txBody>
+      </p:sp>
+      <p:sp>
+        <p:nvSpPr>
+          <p:cNvPr id="4" name="Text 2"/>
+          <p:cNvSpPr/>
+          <p:nvPr/>
+        </p:nvSpPr>
+        <p:spPr>
+          <a:xfrm>
+            <a:off x="457200" y="6510528"/>
+            <a:ext cx="6949440" cy="256032"/>
+          </a:xfrm>
+          <a:prstGeom prst="rect">
+            <a:avLst/>
+          </a:prstGeom>
+          <a:noFill/>
+          <a:ln/>
+        </p:spPr>
+        <p:txBody>
+          <a:bodyPr wrap="square" lIns="0" tIns="0" rIns="0" bIns="0" rtlCol="0" anchor="ctr"/>
+          <a:lstStyle/>
+          <a:p>
+            <a:pPr indent="0" marL="0">
+              <a:buNone/>
+            </a:pPr>
+            <a:r>
+              <a:rPr lang="en-US" sz="1000" dirty="0">
+                <a:solidFill>
+                  <a:srgbClr val="5A7184"/>
+                </a:solidFill>
+                <a:latin typeface="Malgun Gothic" pitchFamily="34" charset="0"/>
+                <a:ea typeface="Malgun Gothic" pitchFamily="34" charset="-122"/>
+                <a:cs typeface="Malgun Gothic" pitchFamily="34" charset="-120"/>
+              </a:rPr>
+              <a:t>삼성전자 메모리사업부 · 개발실 체질 전환 전략 요약 · 2026-07-24</a:t>
+            </a:r>
+            <a:endParaRPr lang="en-US" sz="1000" dirty="0"/>
+          </a:p>
+        </p:txBody>
+      </p:sp>
+      <p:sp>
+        <p:nvSpPr>
+          <p:cNvPr id="5" name="Text 3"/>
+          <p:cNvSpPr/>
+          <p:nvPr/>
+        </p:nvSpPr>
+        <p:spPr>
+          <a:xfrm>
+            <a:off x="7589520" y="6510528"/>
+            <a:ext cx="4142232" cy="256032"/>
+          </a:xfrm>
+          <a:prstGeom prst="rect">
+            <a:avLst/>
+          </a:prstGeom>
+          <a:noFill/>
+          <a:ln/>
+        </p:spPr>
+        <p:txBody>
+          <a:bodyPr wrap="square" lIns="0" tIns="0" rIns="0" bIns="0" rtlCol="0" anchor="ctr"/>
+          <a:lstStyle/>
+          <a:p>
+            <a:pPr algn="r" indent="0" marL="0">
+              <a:buNone/>
+            </a:pPr>
+            <a:r>
+              <a:rPr lang="en-US" sz="1000" dirty="0">
+                <a:solidFill>
+                  <a:srgbClr val="5A7184"/>
+                </a:solidFill>
+                <a:latin typeface="Malgun Gothic" pitchFamily="34" charset="0"/>
+                <a:ea typeface="Malgun Gothic" pitchFamily="34" charset="-122"/>
+                <a:cs typeface="Malgun Gothic" pitchFamily="34" charset="-120"/>
+              </a:rPr>
+              <a:t>원천: wiki/strategies/fdp-host-ssd-platform.md</a:t>
+            </a:r>
+            <a:endParaRPr lang="en-US" sz="1000" dirty="0"/>
+          </a:p>
+        </p:txBody>
+      </p:sp>
+      <p:sp>
+        <p:nvSpPr>
+          <p:cNvPr id="6" name="Text 4"/>
+          <p:cNvSpPr/>
+          <p:nvPr/>
+        </p:nvSpPr>
+        <p:spPr>
+          <a:xfrm>
+            <a:off x="457200" y="822960"/>
+            <a:ext cx="11274552" cy="274320"/>
+          </a:xfrm>
+          <a:prstGeom prst="rect">
+            <a:avLst/>
+          </a:prstGeom>
+          <a:noFill/>
+          <a:ln/>
+        </p:spPr>
+        <p:txBody>
+          <a:bodyPr wrap="square" lIns="0" tIns="0" rIns="0" bIns="0" rtlCol="0" anchor="ctr"/>
+          <a:lstStyle/>
+          <a:p>
+            <a:pPr indent="0" marL="0">
+              <a:buNone/>
+            </a:pPr>
+            <a:r>
+              <a:rPr lang="en-US" sz="1300" b="1" dirty="0">
+                <a:solidFill>
+                  <a:srgbClr val="028090"/>
+                </a:solidFill>
+                <a:latin typeface="Malgun Gothic" pitchFamily="34" charset="0"/>
+                <a:ea typeface="Malgun Gothic" pitchFamily="34" charset="-122"/>
+                <a:cs typeface="Malgun Gothic" pitchFamily="34" charset="-120"/>
+              </a:rPr>
+              <a:t>실행전략  </a:t>
+            </a:r>
+            <a:pPr indent="0" marL="0">
+              <a:buNone/>
+            </a:pPr>
+            <a:r>
+              <a:rPr lang="en-US" sz="1300" i="1" dirty="0">
+                <a:solidFill>
+                  <a:srgbClr val="5A7184"/>
+                </a:solidFill>
+                <a:latin typeface="Malgun Gothic" pitchFamily="34" charset="0"/>
+                <a:ea typeface="Malgun Gothic" pitchFamily="34" charset="-122"/>
+                <a:cs typeface="Malgun Gothic" pitchFamily="34" charset="-120"/>
+              </a:rPr>
+              <a:t>SCA로 다가가고 · FDP로 제공하고 · FDE로 협업한다: 워크로드가 들어올수록 전환비용이 커지는 락인 플라이휠</a:t>
+            </a:r>
+            <a:endParaRPr lang="en-US" sz="1300" dirty="0"/>
+          </a:p>
+        </p:txBody>
+      </p:sp>
+      <p:sp>
+        <p:nvSpPr>
+          <p:cNvPr id="7" name="Text 5"/>
+          <p:cNvSpPr/>
+          <p:nvPr/>
+        </p:nvSpPr>
+        <p:spPr>
+          <a:xfrm>
+            <a:off x="1755648" y="1298448"/>
+            <a:ext cx="1024128" cy="1024128"/>
+          </a:xfrm>
+          <a:prstGeom prst="ellipse">
+            <a:avLst/>
+          </a:prstGeom>
+          <a:solidFill>
+            <a:srgbClr val="5A7184"/>
+          </a:solidFill>
+          <a:ln/>
+        </p:spPr>
+        <p:txBody>
+          <a:bodyPr wrap="square" lIns="0" tIns="0" rIns="0" bIns="0" rtlCol="0" anchor="ctr"/>
+          <a:lstStyle/>
+          <a:p>
+            <a:pPr algn="ctr" indent="0" marL="0">
+              <a:lnSpc>
+                <a:spcPct val="100000"/>
+              </a:lnSpc>
+              <a:buNone/>
+            </a:pPr>
+            <a:r>
+              <a:rPr lang="en-US" sz="1600" b="1" dirty="0">
+                <a:solidFill>
+                  <a:srgbClr val="FFFFFF"/>
+                </a:solidFill>
+                <a:latin typeface="Malgun Gothic" pitchFamily="34" charset="0"/>
+                <a:ea typeface="Malgun Gothic" pitchFamily="34" charset="-122"/>
+                <a:cs typeface="Malgun Gothic" pitchFamily="34" charset="-120"/>
+              </a:rPr>
+              <a:t>SCA</a:t>
+            </a:r>
+            <a:endParaRPr lang="en-US" sz="1600" dirty="0"/>
+          </a:p>
+          <a:p>
+            <a:pPr algn="ctr" indent="0" marL="0">
+              <a:lnSpc>
+                <a:spcPct val="100000"/>
+              </a:lnSpc>
+              <a:buNone/>
+            </a:pPr>
+            <a:r>
+              <a:rPr lang="en-US" sz="1050" dirty="0">
+                <a:solidFill>
+                  <a:srgbClr val="FFFFFF"/>
+                </a:solidFill>
+                <a:latin typeface="Malgun Gothic" pitchFamily="34" charset="0"/>
+                <a:ea typeface="Malgun Gothic" pitchFamily="34" charset="-122"/>
+                <a:cs typeface="Malgun Gothic" pitchFamily="34" charset="-120"/>
+              </a:rPr>
+              <a:t>다가간다</a:t>
+            </a:r>
+            <a:endParaRPr lang="en-US" sz="1600" dirty="0"/>
+          </a:p>
+        </p:txBody>
+      </p:sp>
+      <p:sp>
+        <p:nvSpPr>
+          <p:cNvPr id="8" name="Text 6"/>
+          <p:cNvSpPr/>
+          <p:nvPr/>
+        </p:nvSpPr>
+        <p:spPr>
+          <a:xfrm>
+            <a:off x="658368" y="3346704"/>
+            <a:ext cx="1024128" cy="1024128"/>
+          </a:xfrm>
+          <a:prstGeom prst="ellipse">
+            <a:avLst/>
+          </a:prstGeom>
+          <a:solidFill>
+            <a:srgbClr val="028090"/>
+          </a:solidFill>
+          <a:ln/>
+        </p:spPr>
+        <p:txBody>
+          <a:bodyPr wrap="square" lIns="0" tIns="0" rIns="0" bIns="0" rtlCol="0" anchor="ctr"/>
+          <a:lstStyle/>
+          <a:p>
+            <a:pPr algn="ctr" indent="0" marL="0">
+              <a:lnSpc>
+                <a:spcPct val="100000"/>
+              </a:lnSpc>
+              <a:buNone/>
+            </a:pPr>
+            <a:r>
+              <a:rPr lang="en-US" sz="1600" b="1" dirty="0">
+                <a:solidFill>
+                  <a:srgbClr val="FFFFFF"/>
+                </a:solidFill>
+                <a:latin typeface="Malgun Gothic" pitchFamily="34" charset="0"/>
+                <a:ea typeface="Malgun Gothic" pitchFamily="34" charset="-122"/>
+                <a:cs typeface="Malgun Gothic" pitchFamily="34" charset="-120"/>
+              </a:rPr>
+              <a:t>FDP</a:t>
+            </a:r>
+            <a:endParaRPr lang="en-US" sz="1600" dirty="0"/>
+          </a:p>
+          <a:p>
+            <a:pPr algn="ctr" indent="0" marL="0">
+              <a:lnSpc>
+                <a:spcPct val="100000"/>
+              </a:lnSpc>
+              <a:buNone/>
+            </a:pPr>
+            <a:r>
+              <a:rPr lang="en-US" sz="1050" dirty="0">
+                <a:solidFill>
+                  <a:srgbClr val="FFFFFF"/>
+                </a:solidFill>
+                <a:latin typeface="Malgun Gothic" pitchFamily="34" charset="0"/>
+                <a:ea typeface="Malgun Gothic" pitchFamily="34" charset="-122"/>
+                <a:cs typeface="Malgun Gothic" pitchFamily="34" charset="-120"/>
+              </a:rPr>
+              <a:t>제공한다</a:t>
+            </a:r>
+            <a:endParaRPr lang="en-US" sz="1600" dirty="0"/>
+          </a:p>
+        </p:txBody>
+      </p:sp>
+      <p:sp>
+        <p:nvSpPr>
+          <p:cNvPr id="9" name="Text 7"/>
+          <p:cNvSpPr/>
+          <p:nvPr/>
+        </p:nvSpPr>
+        <p:spPr>
+          <a:xfrm>
+            <a:off x="2852928" y="3346704"/>
+            <a:ext cx="1024128" cy="1024128"/>
+          </a:xfrm>
+          <a:prstGeom prst="ellipse">
+            <a:avLst/>
+          </a:prstGeom>
+          <a:solidFill>
+            <a:srgbClr val="02A878"/>
+          </a:solidFill>
+          <a:ln/>
+        </p:spPr>
+        <p:txBody>
+          <a:bodyPr wrap="square" lIns="0" tIns="0" rIns="0" bIns="0" rtlCol="0" anchor="ctr"/>
+          <a:lstStyle/>
+          <a:p>
+            <a:pPr algn="ctr" indent="0" marL="0">
+              <a:lnSpc>
+                <a:spcPct val="100000"/>
+              </a:lnSpc>
+              <a:buNone/>
+            </a:pPr>
+            <a:r>
+              <a:rPr lang="en-US" sz="1600" b="1" dirty="0">
+                <a:solidFill>
+                  <a:srgbClr val="FFFFFF"/>
+                </a:solidFill>
+                <a:latin typeface="Malgun Gothic" pitchFamily="34" charset="0"/>
+                <a:ea typeface="Malgun Gothic" pitchFamily="34" charset="-122"/>
+                <a:cs typeface="Malgun Gothic" pitchFamily="34" charset="-120"/>
+              </a:rPr>
+              <a:t>FDE</a:t>
+            </a:r>
+            <a:endParaRPr lang="en-US" sz="1600" dirty="0"/>
+          </a:p>
+          <a:p>
+            <a:pPr algn="ctr" indent="0" marL="0">
+              <a:lnSpc>
+                <a:spcPct val="100000"/>
+              </a:lnSpc>
+              <a:buNone/>
+            </a:pPr>
+            <a:r>
+              <a:rPr lang="en-US" sz="1050" dirty="0">
+                <a:solidFill>
+                  <a:srgbClr val="FFFFFF"/>
+                </a:solidFill>
+                <a:latin typeface="Malgun Gothic" pitchFamily="34" charset="0"/>
+                <a:ea typeface="Malgun Gothic" pitchFamily="34" charset="-122"/>
+                <a:cs typeface="Malgun Gothic" pitchFamily="34" charset="-120"/>
+              </a:rPr>
+              <a:t>협업한다</a:t>
+            </a:r>
+            <a:endParaRPr lang="en-US" sz="1600" dirty="0"/>
+          </a:p>
+        </p:txBody>
+      </p:sp>
+      <p:sp>
+        <p:nvSpPr>
+          <p:cNvPr id="10" name="Shape 8"/>
+          <p:cNvSpPr/>
+          <p:nvPr/>
+        </p:nvSpPr>
+        <p:spPr>
+          <a:xfrm flipH="1">
+            <a:off x="1170432" y="2304288"/>
+            <a:ext cx="402336" cy="1005840"/>
+          </a:xfrm>
+          <a:prstGeom prst="line">
+            <a:avLst/>
+          </a:prstGeom>
+          <a:noFill/>
+          <a:ln w="25400">
+            <a:solidFill>
+              <a:srgbClr val="C4CFD6"/>
+            </a:solidFill>
+            <a:prstDash val="solid"/>
+            <a:tailEnd type="triangle"/>
+          </a:ln>
+        </p:spPr>
+      </p:sp>
+      <p:sp>
+        <p:nvSpPr>
+          <p:cNvPr id="11" name="Shape 9"/>
+          <p:cNvSpPr/>
+          <p:nvPr/>
+        </p:nvSpPr>
+        <p:spPr>
+          <a:xfrm>
+            <a:off x="1773936" y="3858768"/>
+            <a:ext cx="987552" cy="914"/>
+          </a:xfrm>
+          <a:prstGeom prst="line">
+            <a:avLst/>
+          </a:prstGeom>
+          <a:noFill/>
+          <a:ln w="25400">
+            <a:solidFill>
+              <a:srgbClr val="C4CFD6"/>
+            </a:solidFill>
+            <a:prstDash val="solid"/>
+            <a:tailEnd type="triangle"/>
+          </a:ln>
+        </p:spPr>
+      </p:sp>
+      <p:sp>
+        <p:nvSpPr>
+          <p:cNvPr id="12" name="Shape 10"/>
+          <p:cNvSpPr/>
+          <p:nvPr/>
+        </p:nvSpPr>
+        <p:spPr>
+          <a:xfrm flipH="1" flipV="1">
+            <a:off x="2907792" y="2286000"/>
+            <a:ext cx="457200" cy="1024128"/>
+          </a:xfrm>
+          <a:prstGeom prst="line">
+            <a:avLst/>
+          </a:prstGeom>
+          <a:noFill/>
+          <a:ln w="25400">
+            <a:solidFill>
+              <a:srgbClr val="C4CFD6"/>
+            </a:solidFill>
+            <a:prstDash val="solid"/>
+            <a:tailEnd type="triangle"/>
+          </a:ln>
+        </p:spPr>
+      </p:sp>
+      <p:sp>
+        <p:nvSpPr>
+          <p:cNvPr id="13" name="Text 11"/>
+          <p:cNvSpPr/>
+          <p:nvPr/>
+        </p:nvSpPr>
+        <p:spPr>
+          <a:xfrm>
+            <a:off x="1554480" y="2724912"/>
+            <a:ext cx="1426464" cy="768096"/>
+          </a:xfrm>
+          <a:prstGeom prst="roundRect">
+            <a:avLst>
+              <a:gd name="adj" fmla="val 9524"/>
+            </a:avLst>
+          </a:prstGeom>
+          <a:solidFill>
+            <a:srgbClr val="E8F6F0"/>
+          </a:solidFill>
+          <a:ln w="15875">
+            <a:solidFill>
+              <a:srgbClr val="02A878"/>
+            </a:solidFill>
+          </a:ln>
+        </p:spPr>
+        <p:txBody>
+          <a:bodyPr wrap="square" lIns="0" tIns="0" rIns="0" bIns="0" rtlCol="0" anchor="ctr"/>
+          <a:lstStyle/>
+          <a:p>
+            <a:pPr algn="ctr" indent="0" marL="0">
+              <a:lnSpc>
+                <a:spcPct val="105000"/>
+              </a:lnSpc>
+              <a:buNone/>
+            </a:pPr>
+            <a:r>
+              <a:rPr lang="en-US" sz="1150" b="1" dirty="0">
+                <a:solidFill>
+                  <a:srgbClr val="17313B"/>
+                </a:solidFill>
+                <a:latin typeface="Malgun Gothic" pitchFamily="34" charset="0"/>
+                <a:ea typeface="Malgun Gothic" pitchFamily="34" charset="-122"/>
+                <a:cs typeface="Malgun Gothic" pitchFamily="34" charset="-120"/>
+              </a:rPr>
+              <a:t>고객 락인</a:t>
+            </a:r>
+            <a:endParaRPr lang="en-US" sz="1150" dirty="0"/>
+          </a:p>
+          <a:p>
+            <a:pPr algn="ctr" indent="0" marL="0">
+              <a:lnSpc>
+                <a:spcPct val="105000"/>
+              </a:lnSpc>
+              <a:buNone/>
+            </a:pPr>
+            <a:r>
+              <a:rPr lang="en-US" sz="1150" b="1" dirty="0">
+                <a:solidFill>
+                  <a:srgbClr val="17313B"/>
+                </a:solidFill>
+                <a:latin typeface="Malgun Gothic" pitchFamily="34" charset="0"/>
+                <a:ea typeface="Malgun Gothic" pitchFamily="34" charset="-122"/>
+                <a:cs typeface="Malgun Gothic" pitchFamily="34" charset="-120"/>
+              </a:rPr>
+              <a:t>다운턴 방어</a:t>
+            </a:r>
+            <a:endParaRPr lang="en-US" sz="1150" dirty="0"/>
+          </a:p>
+        </p:txBody>
+      </p:sp>
+      <p:sp>
+        <p:nvSpPr>
+          <p:cNvPr id="14" name="Text 12"/>
+          <p:cNvSpPr/>
+          <p:nvPr/>
+        </p:nvSpPr>
+        <p:spPr>
+          <a:xfrm>
+            <a:off x="457200" y="4754880"/>
+            <a:ext cx="3785616" cy="1371600"/>
+          </a:xfrm>
+          <a:prstGeom prst="roundRect">
+            <a:avLst>
+              <a:gd name="adj" fmla="val 5333"/>
+            </a:avLst>
+          </a:prstGeom>
+          <a:solidFill>
+            <a:srgbClr val="F5F7F8"/>
+          </a:solidFill>
+          <a:ln/>
+        </p:spPr>
+        <p:txBody>
+          <a:bodyPr wrap="square" lIns="1524" tIns="1524" rIns="1524" bIns="1524" rtlCol="0" anchor="ctr"/>
+          <a:lstStyle/>
+          <a:p>
+            <a:pPr algn="l" indent="0" marL="0">
+              <a:lnSpc>
+                <a:spcPct val="115000"/>
+              </a:lnSpc>
+              <a:buNone/>
+            </a:pPr>
+            <a:r>
+              <a:rPr lang="en-US" sz="1250" b="1" dirty="0">
+                <a:solidFill>
+                  <a:srgbClr val="17313B"/>
+                </a:solidFill>
+                <a:latin typeface="Malgun Gothic" pitchFamily="34" charset="0"/>
+                <a:ea typeface="Malgun Gothic" pitchFamily="34" charset="-122"/>
+                <a:cs typeface="Malgun Gothic" pitchFamily="34" charset="-120"/>
+              </a:rPr>
+              <a:t>락인 플라이휠</a:t>
+            </a:r>
+            <a:endParaRPr lang="en-US" sz="1250" dirty="0"/>
+          </a:p>
+          <a:p>
+            <a:pPr algn="l" indent="0" marL="0">
+              <a:lnSpc>
+                <a:spcPct val="115000"/>
+              </a:lnSpc>
+              <a:buNone/>
+            </a:pPr>
+            <a:r>
+              <a:rPr lang="en-US" sz="1050" dirty="0">
+                <a:solidFill>
+                  <a:srgbClr val="5A7184"/>
+                </a:solidFill>
+                <a:latin typeface="Malgun Gothic" pitchFamily="34" charset="0"/>
+                <a:ea typeface="Malgun Gothic" pitchFamily="34" charset="-122"/>
+                <a:cs typeface="Malgun Gothic" pitchFamily="34" charset="-120"/>
+              </a:rPr>
+              <a:t>워크로드 유입 → 최적화 심화 → 전환비용 증가. 계약이 끝나도 갈아타기 어려운 관계가 다운턴의 방어벽이 된다</a:t>
+            </a:r>
+            <a:endParaRPr lang="en-US" sz="1250" dirty="0"/>
+          </a:p>
+        </p:txBody>
+      </p:sp>
+      <p:sp>
+        <p:nvSpPr>
+          <p:cNvPr id="15" name="Shape 13"/>
+          <p:cNvSpPr/>
+          <p:nvPr/>
+        </p:nvSpPr>
+        <p:spPr>
+          <a:xfrm>
+            <a:off x="4434840" y="1207008"/>
+            <a:ext cx="7296912" cy="1645920"/>
+          </a:xfrm>
+          <a:prstGeom prst="roundRect">
+            <a:avLst>
+              <a:gd name="adj" fmla="val 5000"/>
+            </a:avLst>
+          </a:prstGeom>
+          <a:solidFill>
+            <a:srgbClr val="F5F7F8"/>
+          </a:solidFill>
+          <a:ln/>
+        </p:spPr>
+      </p:sp>
+      <p:sp>
+        <p:nvSpPr>
+          <p:cNvPr id="16" name="Text 14"/>
+          <p:cNvSpPr/>
+          <p:nvPr/>
+        </p:nvSpPr>
+        <p:spPr>
+          <a:xfrm>
+            <a:off x="4599432" y="1353312"/>
+            <a:ext cx="329184" cy="329184"/>
+          </a:xfrm>
+          <a:prstGeom prst="ellipse">
+            <a:avLst/>
+          </a:prstGeom>
+          <a:solidFill>
+            <a:srgbClr val="17313B"/>
+          </a:solidFill>
+          <a:ln/>
+        </p:spPr>
+        <p:txBody>
+          <a:bodyPr wrap="square" lIns="0" tIns="0" rIns="0" bIns="0" rtlCol="0" anchor="ctr"/>
+          <a:lstStyle/>
+          <a:p>
+            <a:pPr algn="ctr" indent="0" marL="0">
+              <a:buNone/>
+            </a:pPr>
+            <a:r>
+              <a:rPr lang="en-US" sz="1500" b="1" dirty="0">
+                <a:solidFill>
+                  <a:srgbClr val="FFFFFF"/>
+                </a:solidFill>
+                <a:latin typeface="Malgun Gothic" pitchFamily="34" charset="0"/>
+                <a:ea typeface="Malgun Gothic" pitchFamily="34" charset="-122"/>
+                <a:cs typeface="Malgun Gothic" pitchFamily="34" charset="-120"/>
+              </a:rPr>
+              <a:t>1</a:t>
+            </a:r>
+            <a:endParaRPr lang="en-US" sz="1500" dirty="0"/>
+          </a:p>
+        </p:txBody>
+      </p:sp>
+      <p:sp>
+        <p:nvSpPr>
+          <p:cNvPr id="17" name="Shape 15"/>
+          <p:cNvSpPr/>
+          <p:nvPr/>
+        </p:nvSpPr>
+        <p:spPr>
+          <a:xfrm>
+            <a:off x="5020056" y="1325880"/>
+            <a:ext cx="384048" cy="384048"/>
+          </a:xfrm>
+          <a:prstGeom prst="ellipse">
+            <a:avLst/>
+          </a:prstGeom>
+          <a:solidFill>
+            <a:srgbClr val="028090"/>
+          </a:solidFill>
+          <a:ln/>
+        </p:spPr>
+      </p:sp>
+      <p:pic>
+        <p:nvPicPr>
+          <p:cNvPr id="18" name="Image 0" descr="preencoded.png">    </p:cNvPr>
+          <p:cNvPicPr>
+            <a:picLocks noChangeAspect="1"/>
+          </p:cNvPicPr>
+          <p:nvPr/>
+        </p:nvPicPr>
+        <p:blipFill>
+          <a:blip r:embed="rId1"/>
+          <a:stretch>
+            <a:fillRect/>
+          </a:stretch>
+        </p:blipFill>
+        <p:spPr>
+          <a:xfrm>
+            <a:off x="5112228" y="1418052"/>
+            <a:ext cx="199705" cy="199705"/>
+          </a:xfrm>
+          <a:prstGeom prst="rect">
+            <a:avLst/>
+          </a:prstGeom>
+        </p:spPr>
+      </p:pic>
+      <p:sp>
+        <p:nvSpPr>
+          <p:cNvPr id="19" name="Text 16"/>
+          <p:cNvSpPr/>
+          <p:nvPr/>
+        </p:nvSpPr>
+        <p:spPr>
+          <a:xfrm>
+            <a:off x="5532120" y="1335024"/>
+            <a:ext cx="6035040" cy="365760"/>
+          </a:xfrm>
+          <a:prstGeom prst="rect">
+            <a:avLst/>
+          </a:prstGeom>
+          <a:noFill/>
+          <a:ln/>
+        </p:spPr>
+        <p:txBody>
+          <a:bodyPr wrap="square" lIns="0" tIns="0" rIns="0" bIns="0" rtlCol="0" anchor="ctr"/>
+          <a:lstStyle/>
+          <a:p>
+            <a:pPr indent="0" marL="0">
+              <a:buNone/>
+            </a:pPr>
+            <a:r>
+              <a:rPr lang="en-US" sz="1400" b="1" dirty="0">
+                <a:solidFill>
+                  <a:srgbClr val="17313B"/>
+                </a:solidFill>
+                <a:latin typeface="Malgun Gothic" pitchFamily="34" charset="0"/>
+                <a:ea typeface="Malgun Gothic" pitchFamily="34" charset="-122"/>
+                <a:cs typeface="Malgun Gothic" pitchFamily="34" charset="-120"/>
+              </a:rPr>
+              <a:t>협상력의 창이 열려 있을 때 워크로드 교환을 제안한다</a:t>
+            </a:r>
+            <a:endParaRPr lang="en-US" sz="1400" dirty="0"/>
+          </a:p>
+        </p:txBody>
+      </p:sp>
+      <p:sp>
+        <p:nvSpPr>
+          <p:cNvPr id="20" name="Text 17"/>
+          <p:cNvSpPr/>
+          <p:nvPr/>
+        </p:nvSpPr>
+        <p:spPr>
+          <a:xfrm>
+            <a:off x="4645152" y="1755648"/>
+            <a:ext cx="6903720" cy="1024128"/>
+          </a:xfrm>
+          <a:prstGeom prst="rect">
+            <a:avLst/>
+          </a:prstGeom>
+          <a:noFill/>
+          <a:ln/>
+        </p:spPr>
+        <p:txBody>
+          <a:bodyPr wrap="square" lIns="0" tIns="0" rIns="0" bIns="0" rtlCol="0" anchor="t"/>
+          <a:lstStyle/>
+          <a:p>
+            <a:pPr marL="342900" indent="-342900">
+              <a:lnSpc>
+                <a:spcPct val="108000"/>
+              </a:lnSpc>
+              <a:spcAft>
+                <a:spcPts val="400"/>
+              </a:spcAft>
+              <a:buSzPct val="100000"/>
+              <a:buChar char="•"/>
+            </a:pPr>
+            <a:r>
+              <a:rPr lang="en-US" sz="1050" dirty="0">
+                <a:solidFill>
+                  <a:srgbClr val="17313B"/>
+                </a:solidFill>
+                <a:latin typeface="Malgun Gothic" pitchFamily="34" charset="0"/>
+                <a:ea typeface="Malgun Gothic" pitchFamily="34" charset="-122"/>
+                <a:cs typeface="Malgun Gothic" pitchFamily="34" charset="-120"/>
+              </a:rPr>
+              <a:t>대상: 하이퍼스케일러 + 스토리지 박스 업체(Pure Storage·VAST Data·DDN)</a:t>
+            </a:r>
+            <a:endParaRPr lang="en-US" sz="1050" dirty="0"/>
+          </a:p>
+          <a:p>
+            <a:pPr marL="342900" indent="-342900">
+              <a:lnSpc>
+                <a:spcPct val="108000"/>
+              </a:lnSpc>
+              <a:spcAft>
+                <a:spcPts val="400"/>
+              </a:spcAft>
+              <a:buSzPct val="100000"/>
+              <a:buChar char="•"/>
+            </a:pPr>
+            <a:r>
+              <a:rPr lang="en-US" sz="1050" dirty="0">
+                <a:solidFill>
+                  <a:srgbClr val="17313B"/>
+                </a:solidFill>
+                <a:latin typeface="Malgun Gothic" pitchFamily="34" charset="0"/>
+                <a:ea typeface="Malgun Gothic" pitchFamily="34" charset="-122"/>
+                <a:cs typeface="Malgun Gothic" pitchFamily="34" charset="-120"/>
+              </a:rPr>
+              <a:t>딜 구조: 고객 워크로드 공유 ↔ 그 워크로드에 최적화한 FDP SSD 공급</a:t>
+            </a:r>
+            <a:endParaRPr lang="en-US" sz="1050" dirty="0"/>
+          </a:p>
+          <a:p>
+            <a:pPr marL="342900" indent="-342900">
+              <a:lnSpc>
+                <a:spcPct val="108000"/>
+              </a:lnSpc>
+              <a:spcAft>
+                <a:spcPts val="400"/>
+              </a:spcAft>
+              <a:buSzPct val="100000"/>
+              <a:buChar char="•"/>
+            </a:pPr>
+            <a:r>
+              <a:rPr lang="en-US" sz="1050" dirty="0">
+                <a:solidFill>
+                  <a:srgbClr val="17313B"/>
+                </a:solidFill>
+                <a:latin typeface="Malgun Gothic" pitchFamily="34" charset="0"/>
+                <a:ea typeface="Malgun Gothic" pitchFamily="34" charset="-122"/>
+                <a:cs typeface="Malgun Gothic" pitchFamily="34" charset="-120"/>
+              </a:rPr>
+              <a:t>고객 효익: 성능·수명 개선과 TCO 절감으로 거절하기 어려운 제안 (공급부족 국면 한정의 창)</a:t>
+            </a:r>
+            <a:endParaRPr lang="en-US" sz="1050" dirty="0"/>
+          </a:p>
+        </p:txBody>
+      </p:sp>
+      <p:sp>
+        <p:nvSpPr>
+          <p:cNvPr id="21" name="Shape 18"/>
+          <p:cNvSpPr/>
+          <p:nvPr/>
+        </p:nvSpPr>
+        <p:spPr>
+          <a:xfrm>
+            <a:off x="4434840" y="2980944"/>
+            <a:ext cx="7296912" cy="1645920"/>
+          </a:xfrm>
+          <a:prstGeom prst="roundRect">
+            <a:avLst>
+              <a:gd name="adj" fmla="val 5000"/>
+            </a:avLst>
+          </a:prstGeom>
+          <a:solidFill>
+            <a:srgbClr val="F5F7F8"/>
+          </a:solidFill>
+          <a:ln/>
+        </p:spPr>
+      </p:sp>
+      <p:sp>
+        <p:nvSpPr>
+          <p:cNvPr id="22" name="Text 19"/>
+          <p:cNvSpPr/>
+          <p:nvPr/>
+        </p:nvSpPr>
+        <p:spPr>
+          <a:xfrm>
+            <a:off x="4599432" y="3127248"/>
+            <a:ext cx="329184" cy="329184"/>
+          </a:xfrm>
+          <a:prstGeom prst="ellipse">
+            <a:avLst/>
+          </a:prstGeom>
+          <a:solidFill>
+            <a:srgbClr val="17313B"/>
+          </a:solidFill>
+          <a:ln/>
+        </p:spPr>
+        <p:txBody>
+          <a:bodyPr wrap="square" lIns="0" tIns="0" rIns="0" bIns="0" rtlCol="0" anchor="ctr"/>
+          <a:lstStyle/>
+          <a:p>
+            <a:pPr algn="ctr" indent="0" marL="0">
+              <a:buNone/>
+            </a:pPr>
+            <a:r>
+              <a:rPr lang="en-US" sz="1500" b="1" dirty="0">
+                <a:solidFill>
+                  <a:srgbClr val="FFFFFF"/>
+                </a:solidFill>
+                <a:latin typeface="Malgun Gothic" pitchFamily="34" charset="0"/>
+                <a:ea typeface="Malgun Gothic" pitchFamily="34" charset="-122"/>
+                <a:cs typeface="Malgun Gothic" pitchFamily="34" charset="-120"/>
+              </a:rPr>
+              <a:t>2</a:t>
+            </a:r>
+            <a:endParaRPr lang="en-US" sz="1500" dirty="0"/>
+          </a:p>
+        </p:txBody>
+      </p:sp>
+      <p:sp>
+        <p:nvSpPr>
+          <p:cNvPr id="23" name="Shape 20"/>
+          <p:cNvSpPr/>
+          <p:nvPr/>
+        </p:nvSpPr>
+        <p:spPr>
+          <a:xfrm>
+            <a:off x="5020056" y="3099816"/>
+            <a:ext cx="384048" cy="384048"/>
+          </a:xfrm>
+          <a:prstGeom prst="ellipse">
+            <a:avLst/>
+          </a:prstGeom>
+          <a:solidFill>
+            <a:srgbClr val="4C7C94"/>
+          </a:solidFill>
+          <a:ln/>
+        </p:spPr>
+      </p:sp>
+      <p:pic>
+        <p:nvPicPr>
+          <p:cNvPr id="24" name="Image 1" descr="preencoded.png">    </p:cNvPr>
+          <p:cNvPicPr>
+            <a:picLocks noChangeAspect="1"/>
+          </p:cNvPicPr>
+          <p:nvPr/>
+        </p:nvPicPr>
+        <p:blipFill>
+          <a:blip r:embed="rId2"/>
+          <a:stretch>
+            <a:fillRect/>
+          </a:stretch>
+        </p:blipFill>
+        <p:spPr>
+          <a:xfrm>
+            <a:off x="5112228" y="3191988"/>
+            <a:ext cx="199705" cy="199705"/>
+          </a:xfrm>
+          <a:prstGeom prst="rect">
+            <a:avLst/>
+          </a:prstGeom>
+        </p:spPr>
+      </p:pic>
+      <p:sp>
+        <p:nvSpPr>
+          <p:cNvPr id="25" name="Text 21"/>
+          <p:cNvSpPr/>
+          <p:nvPr/>
+        </p:nvSpPr>
+        <p:spPr>
+          <a:xfrm>
+            <a:off x="5532120" y="3108960"/>
+            <a:ext cx="6035040" cy="365760"/>
+          </a:xfrm>
+          <a:prstGeom prst="rect">
+            <a:avLst/>
+          </a:prstGeom>
+          <a:noFill/>
+          <a:ln/>
+        </p:spPr>
+        <p:txBody>
+          <a:bodyPr wrap="square" lIns="0" tIns="0" rIns="0" bIns="0" rtlCol="0" anchor="ctr"/>
+          <a:lstStyle/>
+          <a:p>
+            <a:pPr indent="0" marL="0">
+              <a:buNone/>
+            </a:pPr>
+            <a:r>
+              <a:rPr lang="en-US" sz="1400" b="1" dirty="0">
+                <a:solidFill>
+                  <a:srgbClr val="17313B"/>
+                </a:solidFill>
+                <a:latin typeface="Malgun Gothic" pitchFamily="34" charset="0"/>
+                <a:ea typeface="Malgun Gothic" pitchFamily="34" charset="-122"/>
+                <a:cs typeface="Malgun Gothic" pitchFamily="34" charset="-120"/>
+              </a:rPr>
+              <a:t>호스트를 이해하는 최적화 개발 역량을 채용·양성으로 확보한다</a:t>
+            </a:r>
+            <a:endParaRPr lang="en-US" sz="1400" dirty="0"/>
+          </a:p>
+        </p:txBody>
+      </p:sp>
+      <p:sp>
+        <p:nvSpPr>
+          <p:cNvPr id="26" name="Text 22"/>
+          <p:cNvSpPr/>
+          <p:nvPr/>
+        </p:nvSpPr>
+        <p:spPr>
+          <a:xfrm>
+            <a:off x="4645152" y="3529584"/>
+            <a:ext cx="6903720" cy="1024128"/>
+          </a:xfrm>
+          <a:prstGeom prst="rect">
+            <a:avLst/>
+          </a:prstGeom>
+          <a:noFill/>
+          <a:ln/>
+        </p:spPr>
+        <p:txBody>
+          <a:bodyPr wrap="square" lIns="0" tIns="0" rIns="0" bIns="0" rtlCol="0" anchor="t"/>
+          <a:lstStyle/>
+          <a:p>
+            <a:pPr marL="342900" indent="-342900">
+              <a:lnSpc>
+                <a:spcPct val="108000"/>
+              </a:lnSpc>
+              <a:spcAft>
+                <a:spcPts val="400"/>
+              </a:spcAft>
+              <a:buSzPct val="100000"/>
+              <a:buChar char="•"/>
+            </a:pPr>
+            <a:r>
+              <a:rPr lang="en-US" sz="1050" dirty="0">
+                <a:solidFill>
+                  <a:srgbClr val="17313B"/>
+                </a:solidFill>
+                <a:latin typeface="Malgun Gothic" pitchFamily="34" charset="0"/>
+                <a:ea typeface="Malgun Gothic" pitchFamily="34" charset="-122"/>
+                <a:cs typeface="Malgun Gothic" pitchFamily="34" charset="-120"/>
+              </a:rPr>
+              <a:t>전문가 5종: ① 커널 블록계층·io_uring·NVMe ② SPDK 유저스페이스 ③ DB·캐시 내부(RocksDB·CacheLib·Ceph) ④ 성능·워크로드 분석(fio·eBPF·WAF) ⑤ FTL·미디어 모델(사내 강점 브리지)</a:t>
+            </a:r>
+            <a:endParaRPr lang="en-US" sz="1050" dirty="0"/>
+          </a:p>
+          <a:p>
+            <a:pPr marL="342900" indent="-342900">
+              <a:lnSpc>
+                <a:spcPct val="108000"/>
+              </a:lnSpc>
+              <a:spcAft>
+                <a:spcPts val="400"/>
+              </a:spcAft>
+              <a:buSzPct val="100000"/>
+              <a:buChar char="•"/>
+            </a:pPr>
+            <a:r>
+              <a:rPr lang="en-US" sz="1050" dirty="0">
+                <a:solidFill>
+                  <a:srgbClr val="17313B"/>
+                </a:solidFill>
+                <a:latin typeface="Malgun Gothic" pitchFamily="34" charset="0"/>
+                <a:ea typeface="Malgun Gothic" pitchFamily="34" charset="-122"/>
+                <a:cs typeface="Malgun Gothic" pitchFamily="34" charset="-120"/>
+              </a:rPr>
+              <a:t>확보: 오픈소스 커미터·하이퍼스케일러 스토리지팀 출신 채용 + 사내 FW 인력의 호스트 SW 전환 트랙(오픈소스 기여를 평가에 반영)</a:t>
+            </a:r>
+            <a:endParaRPr lang="en-US" sz="1050" dirty="0"/>
+          </a:p>
+        </p:txBody>
+      </p:sp>
+      <p:sp>
+        <p:nvSpPr>
+          <p:cNvPr id="27" name="Shape 23"/>
+          <p:cNvSpPr/>
+          <p:nvPr/>
+        </p:nvSpPr>
+        <p:spPr>
+          <a:xfrm>
+            <a:off x="4434840" y="4754880"/>
+            <a:ext cx="7296912" cy="1645920"/>
+          </a:xfrm>
+          <a:prstGeom prst="roundRect">
+            <a:avLst>
+              <a:gd name="adj" fmla="val 5000"/>
+            </a:avLst>
+          </a:prstGeom>
+          <a:solidFill>
+            <a:srgbClr val="F5F7F8"/>
+          </a:solidFill>
+          <a:ln/>
+        </p:spPr>
+      </p:sp>
+      <p:sp>
+        <p:nvSpPr>
+          <p:cNvPr id="28" name="Text 24"/>
+          <p:cNvSpPr/>
+          <p:nvPr/>
+        </p:nvSpPr>
+        <p:spPr>
+          <a:xfrm>
+            <a:off x="4599432" y="4901184"/>
+            <a:ext cx="329184" cy="329184"/>
+          </a:xfrm>
+          <a:prstGeom prst="ellipse">
+            <a:avLst/>
+          </a:prstGeom>
+          <a:solidFill>
+            <a:srgbClr val="17313B"/>
+          </a:solidFill>
+          <a:ln/>
+        </p:spPr>
+        <p:txBody>
+          <a:bodyPr wrap="square" lIns="0" tIns="0" rIns="0" bIns="0" rtlCol="0" anchor="ctr"/>
+          <a:lstStyle/>
+          <a:p>
+            <a:pPr algn="ctr" indent="0" marL="0">
+              <a:buNone/>
+            </a:pPr>
+            <a:r>
+              <a:rPr lang="en-US" sz="1500" b="1" dirty="0">
+                <a:solidFill>
+                  <a:srgbClr val="FFFFFF"/>
+                </a:solidFill>
+                <a:latin typeface="Malgun Gothic" pitchFamily="34" charset="0"/>
+                <a:ea typeface="Malgun Gothic" pitchFamily="34" charset="-122"/>
+                <a:cs typeface="Malgun Gothic" pitchFamily="34" charset="-120"/>
+              </a:rPr>
+              <a:t>3</a:t>
+            </a:r>
+            <a:endParaRPr lang="en-US" sz="1500" dirty="0"/>
+          </a:p>
+        </p:txBody>
+      </p:sp>
+      <p:sp>
+        <p:nvSpPr>
+          <p:cNvPr id="29" name="Shape 25"/>
+          <p:cNvSpPr/>
+          <p:nvPr/>
+        </p:nvSpPr>
+        <p:spPr>
+          <a:xfrm>
+            <a:off x="5020056" y="4873752"/>
+            <a:ext cx="384048" cy="384048"/>
+          </a:xfrm>
+          <a:prstGeom prst="ellipse">
+            <a:avLst/>
+          </a:prstGeom>
+          <a:solidFill>
+            <a:srgbClr val="02A878"/>
+          </a:solidFill>
+          <a:ln/>
+        </p:spPr>
+      </p:sp>
+      <p:pic>
+        <p:nvPicPr>
+          <p:cNvPr id="30" name="Image 2" descr="preencoded.png">    </p:cNvPr>
+          <p:cNvPicPr>
+            <a:picLocks noChangeAspect="1"/>
+          </p:cNvPicPr>
+          <p:nvPr/>
+        </p:nvPicPr>
+        <p:blipFill>
+          <a:blip r:embed="rId3"/>
+          <a:stretch>
+            <a:fillRect/>
+          </a:stretch>
+        </p:blipFill>
+        <p:spPr>
+          <a:xfrm>
+            <a:off x="5112228" y="4965924"/>
+            <a:ext cx="199705" cy="199705"/>
+          </a:xfrm>
+          <a:prstGeom prst="rect">
+            <a:avLst/>
+          </a:prstGeom>
+        </p:spPr>
+      </p:pic>
+      <p:sp>
+        <p:nvSpPr>
+          <p:cNvPr id="31" name="Text 26"/>
+          <p:cNvSpPr/>
+          <p:nvPr/>
+        </p:nvSpPr>
+        <p:spPr>
+          <a:xfrm>
+            <a:off x="5532120" y="4882896"/>
+            <a:ext cx="6035040" cy="365760"/>
+          </a:xfrm>
+          <a:prstGeom prst="rect">
+            <a:avLst/>
+          </a:prstGeom>
+          <a:noFill/>
+          <a:ln/>
+        </p:spPr>
+        <p:txBody>
+          <a:bodyPr wrap="square" lIns="0" tIns="0" rIns="0" bIns="0" rtlCol="0" anchor="ctr"/>
+          <a:lstStyle/>
+          <a:p>
+            <a:pPr indent="0" marL="0">
+              <a:buNone/>
+            </a:pPr>
+            <a:r>
+              <a:rPr lang="en-US" sz="1400" b="1" dirty="0">
+                <a:solidFill>
+                  <a:srgbClr val="17313B"/>
+                </a:solidFill>
+                <a:latin typeface="Malgun Gothic" pitchFamily="34" charset="0"/>
+                <a:ea typeface="Malgun Gothic" pitchFamily="34" charset="-122"/>
+                <a:cs typeface="Malgun Gothic" pitchFamily="34" charset="-120"/>
+              </a:rPr>
+              <a:t>FDE를 고객 옆에 두고 FDP 생태계에 함께 기여한다</a:t>
+            </a:r>
+            <a:endParaRPr lang="en-US" sz="1400" dirty="0"/>
+          </a:p>
+        </p:txBody>
+      </p:sp>
+      <p:sp>
+        <p:nvSpPr>
+          <p:cNvPr id="32" name="Text 27"/>
+          <p:cNvSpPr/>
+          <p:nvPr/>
+        </p:nvSpPr>
+        <p:spPr>
+          <a:xfrm>
+            <a:off x="4645152" y="5303520"/>
+            <a:ext cx="6903720" cy="1024128"/>
+          </a:xfrm>
+          <a:prstGeom prst="rect">
+            <a:avLst/>
+          </a:prstGeom>
+          <a:noFill/>
+          <a:ln/>
+        </p:spPr>
+        <p:txBody>
+          <a:bodyPr wrap="square" lIns="0" tIns="0" rIns="0" bIns="0" rtlCol="0" anchor="t"/>
+          <a:lstStyle/>
+          <a:p>
+            <a:pPr marL="342900" indent="-342900">
+              <a:lnSpc>
+                <a:spcPct val="108000"/>
+              </a:lnSpc>
+              <a:spcAft>
+                <a:spcPts val="400"/>
+              </a:spcAft>
+              <a:buSzPct val="100000"/>
+              <a:buChar char="•"/>
+            </a:pPr>
+            <a:r>
+              <a:rPr lang="en-US" sz="1050" dirty="0">
+                <a:solidFill>
+                  <a:srgbClr val="17313B"/>
+                </a:solidFill>
+                <a:latin typeface="Malgun Gothic" pitchFamily="34" charset="0"/>
+                <a:ea typeface="Malgun Gothic" pitchFamily="34" charset="-122"/>
+                <a:cs typeface="Malgun Gothic" pitchFamily="34" charset="-120"/>
+              </a:rPr>
+              <a:t>채용: 실리콘밸리 현지 중심, 오픈소스 스토리지 기여자 우대, 영어 커뮤니케이션 필수</a:t>
+            </a:r>
+            <a:endParaRPr lang="en-US" sz="1050" dirty="0"/>
+          </a:p>
+          <a:p>
+            <a:pPr marL="342900" indent="-342900">
+              <a:lnSpc>
+                <a:spcPct val="108000"/>
+              </a:lnSpc>
+              <a:spcAft>
+                <a:spcPts val="400"/>
+              </a:spcAft>
+              <a:buSzPct val="100000"/>
+              <a:buChar char="•"/>
+            </a:pPr>
+            <a:r>
+              <a:rPr lang="en-US" sz="1050" dirty="0">
+                <a:solidFill>
+                  <a:srgbClr val="17313B"/>
+                </a:solidFill>
+                <a:latin typeface="Malgun Gothic" pitchFamily="34" charset="0"/>
+                <a:ea typeface="Malgun Gothic" pitchFamily="34" charset="-122"/>
+                <a:cs typeface="Malgun Gothic" pitchFamily="34" charset="-120"/>
+              </a:rPr>
+              <a:t>양성: 본사 엔지니어 미국 로테이션(6~12개월) + 현지 FDE 멘토 페어링</a:t>
+            </a:r>
+            <a:endParaRPr lang="en-US" sz="1050" dirty="0"/>
+          </a:p>
+          <a:p>
+            <a:pPr marL="342900" indent="-342900">
+              <a:lnSpc>
+                <a:spcPct val="108000"/>
+              </a:lnSpc>
+              <a:spcAft>
+                <a:spcPts val="400"/>
+              </a:spcAft>
+              <a:buSzPct val="100000"/>
+              <a:buChar char="•"/>
+            </a:pPr>
+            <a:r>
+              <a:rPr lang="en-US" sz="1050" dirty="0">
+                <a:solidFill>
+                  <a:srgbClr val="17313B"/>
+                </a:solidFill>
+                <a:latin typeface="Malgun Gothic" pitchFamily="34" charset="0"/>
+                <a:ea typeface="Malgun Gothic" pitchFamily="34" charset="-122"/>
+                <a:cs typeface="Malgun Gothic" pitchFamily="34" charset="-120"/>
+              </a:rPr>
+              <a:t>운영: 파일럿 1~2사 상주(Pod 소속·dual-ladder), outcome 평가(FDP 활성화 용량), 커널·SPDK·CacheLib 업스트림 기여로 호명</a:t>
+            </a:r>
+            <a:endParaRPr lang="en-US" sz="1050" dirty="0"/>
           </a:p>
         </p:txBody>
       </p:sp>

--- a/dashboard/public/downloads/dev-transformation-summary-fdp.pptx
+++ b/dashboard/public/downloads/dev-transformation-summary-fdp.pptx
@@ -1168,7 +1168,7 @@
                 <a:ea typeface="Malgun Gothic" pitchFamily="34" charset="-122"/>
                 <a:cs typeface="Malgun Gothic" pitchFamily="34" charset="-120"/>
               </a:rPr>
-              <a:t>제품·기술 축 — FDP Host–SSD 통합 플랫폼</a:t>
+              <a:t>제품·기술 축: FDP Host–SSD 통합 플랫폼</a:t>
             </a:r>
             <a:endParaRPr lang="en-US" sz="3200" dirty="0"/>
           </a:p>
@@ -2735,7 +2735,7 @@
                 <a:ea typeface="Malgun Gothic" pitchFamily="34" charset="-122"/>
                 <a:cs typeface="Malgun Gothic" pitchFamily="34" charset="-120"/>
               </a:rPr>
-              <a:t>제품·기술 축 — FDP Host–SSD 통합 플랫폼</a:t>
+              <a:t>제품·기술 축: FDP Host–SSD 통합 플랫폼</a:t>
             </a:r>
             <a:endParaRPr lang="en-US" sz="3200" dirty="0"/>
           </a:p>
@@ -3892,7 +3892,7 @@
                 <a:ea typeface="Malgun Gothic" pitchFamily="34" charset="-122"/>
                 <a:cs typeface="Malgun Gothic" pitchFamily="34" charset="-120"/>
               </a:rPr>
-              <a:t>제품·기술 축 — FDP Host–SSD 통합 플랫폼</a:t>
+              <a:t>제품·기술 축: FDP Host–SSD 통합 플랫폼</a:t>
             </a:r>
             <a:endParaRPr lang="en-US" sz="3200" dirty="0"/>
           </a:p>
@@ -5744,7 +5744,7 @@
                 <a:ea typeface="Malgun Gothic" pitchFamily="34" charset="-122"/>
                 <a:cs typeface="Malgun Gothic" pitchFamily="34" charset="-120"/>
               </a:rPr>
-              <a:t>제품·기술 축 — FDP Host–SSD 통합 플랫폼</a:t>
+              <a:t>제품·기술 축: FDP Host–SSD 통합 플랫폼</a:t>
             </a:r>
             <a:endParaRPr lang="en-US" sz="3200" dirty="0"/>
           </a:p>
@@ -5898,7 +5898,7 @@
             <a:r>
               <a:rPr lang="en-US" sz="1300" b="1" dirty="0">
                 <a:solidFill>
-                  <a:srgbClr val="028090"/>
+                  <a:srgbClr val="1428A0"/>
                 </a:solidFill>
                 <a:latin typeface="Malgun Gothic" pitchFamily="34" charset="0"/>
                 <a:ea typeface="Malgun Gothic" pitchFamily="34" charset="-122"/>
@@ -5910,15 +5910,15 @@
               <a:buNone/>
             </a:pPr>
             <a:r>
-              <a:rPr lang="en-US" sz="1300" i="1" dirty="0">
-                <a:solidFill>
-                  <a:srgbClr val="5A7184"/>
-                </a:solidFill>
-                <a:latin typeface="Malgun Gothic" pitchFamily="34" charset="0"/>
-                <a:ea typeface="Malgun Gothic" pitchFamily="34" charset="-122"/>
-                <a:cs typeface="Malgun Gothic" pitchFamily="34" charset="-120"/>
-              </a:rPr>
-              <a:t>SCA로 다가가고 · FDP로 제공하고 · FDE로 협업한다: 워크로드가 들어올수록 전환비용이 커지는 락인 플라이휠</a:t>
+              <a:rPr lang="en-US" sz="1300" dirty="0">
+                <a:solidFill>
+                  <a:srgbClr val="555555"/>
+                </a:solidFill>
+                <a:latin typeface="Malgun Gothic" pitchFamily="34" charset="0"/>
+                <a:ea typeface="Malgun Gothic" pitchFamily="34" charset="-122"/>
+                <a:cs typeface="Malgun Gothic" pitchFamily="34" charset="-120"/>
+              </a:rPr>
+              <a:t>SCA로 다가가고 · FDP로 제공하고 · FDE로 협업한다: 워크로드가 들어올수록 전환비용이 커지는 락인 플라이휠, 다운턴 피해 최소화</a:t>
             </a:r>
             <a:endParaRPr lang="en-US" sz="1300" dirty="0"/>
           </a:p>
@@ -5932,14 +5932,335 @@
         </p:nvSpPr>
         <p:spPr>
           <a:xfrm>
-            <a:off x="1755648" y="1298448"/>
-            <a:ext cx="1024128" cy="1024128"/>
+            <a:off x="457200" y="1188720"/>
+            <a:ext cx="310896" cy="310896"/>
           </a:xfrm>
           <a:prstGeom prst="ellipse">
             <a:avLst/>
           </a:prstGeom>
           <a:solidFill>
-            <a:srgbClr val="5A7184"/>
+            <a:srgbClr val="1428A0"/>
+          </a:solidFill>
+          <a:ln/>
+        </p:spPr>
+        <p:txBody>
+          <a:bodyPr wrap="square" lIns="0" tIns="0" rIns="0" bIns="0" rtlCol="0" anchor="ctr"/>
+          <a:lstStyle/>
+          <a:p>
+            <a:pPr algn="ctr" indent="0" marL="0">
+              <a:buNone/>
+            </a:pPr>
+            <a:r>
+              <a:rPr lang="en-US" sz="1400" b="1" dirty="0">
+                <a:solidFill>
+                  <a:srgbClr val="FFFFFF"/>
+                </a:solidFill>
+                <a:latin typeface="Malgun Gothic" pitchFamily="34" charset="0"/>
+                <a:ea typeface="Malgun Gothic" pitchFamily="34" charset="-122"/>
+                <a:cs typeface="Malgun Gothic" pitchFamily="34" charset="-120"/>
+              </a:rPr>
+              <a:t>1</a:t>
+            </a:r>
+            <a:endParaRPr lang="en-US" sz="1400" dirty="0"/>
+          </a:p>
+        </p:txBody>
+      </p:sp>
+      <p:sp>
+        <p:nvSpPr>
+          <p:cNvPr id="8" name="Text 6"/>
+          <p:cNvSpPr/>
+          <p:nvPr/>
+        </p:nvSpPr>
+        <p:spPr>
+          <a:xfrm>
+            <a:off x="859536" y="1170432"/>
+            <a:ext cx="3200400" cy="347472"/>
+          </a:xfrm>
+          <a:prstGeom prst="rect">
+            <a:avLst/>
+          </a:prstGeom>
+          <a:noFill/>
+          <a:ln/>
+        </p:spPr>
+        <p:txBody>
+          <a:bodyPr wrap="square" lIns="0" tIns="0" rIns="0" bIns="0" rtlCol="0" anchor="ctr"/>
+          <a:lstStyle/>
+          <a:p>
+            <a:pPr indent="0" marL="0">
+              <a:buNone/>
+            </a:pPr>
+            <a:r>
+              <a:rPr lang="en-US" sz="1400" b="1" dirty="0">
+                <a:solidFill>
+                  <a:srgbClr val="1A1A1A"/>
+                </a:solidFill>
+                <a:latin typeface="Malgun Gothic" pitchFamily="34" charset="0"/>
+                <a:ea typeface="Malgun Gothic" pitchFamily="34" charset="-122"/>
+                <a:cs typeface="Malgun Gothic" pitchFamily="34" charset="-120"/>
+              </a:rPr>
+              <a:t>락인 플라이휠</a:t>
+            </a:r>
+            <a:endParaRPr lang="en-US" sz="1400" dirty="0"/>
+          </a:p>
+        </p:txBody>
+      </p:sp>
+      <p:sp>
+        <p:nvSpPr>
+          <p:cNvPr id="9" name="Shape 7"/>
+          <p:cNvSpPr/>
+          <p:nvPr/>
+        </p:nvSpPr>
+        <p:spPr>
+          <a:xfrm>
+            <a:off x="457200" y="1627632"/>
+            <a:ext cx="3602736" cy="4626864"/>
+          </a:xfrm>
+          <a:prstGeom prst="roundRect">
+            <a:avLst>
+              <a:gd name="adj" fmla="val 2030"/>
+            </a:avLst>
+          </a:prstGeom>
+          <a:solidFill>
+            <a:srgbClr val="FFFFFF"/>
+          </a:solidFill>
+          <a:ln w="12700">
+            <a:solidFill>
+              <a:srgbClr val="D9D9D9"/>
+            </a:solidFill>
+            <a:prstDash val="solid"/>
+          </a:ln>
+        </p:spPr>
+      </p:sp>
+      <p:sp>
+        <p:nvSpPr>
+          <p:cNvPr id="10" name="Text 8"/>
+          <p:cNvSpPr/>
+          <p:nvPr/>
+        </p:nvSpPr>
+        <p:spPr>
+          <a:xfrm>
+            <a:off x="4297680" y="1188720"/>
+            <a:ext cx="310896" cy="310896"/>
+          </a:xfrm>
+          <a:prstGeom prst="ellipse">
+            <a:avLst/>
+          </a:prstGeom>
+          <a:solidFill>
+            <a:srgbClr val="1428A0"/>
+          </a:solidFill>
+          <a:ln/>
+        </p:spPr>
+        <p:txBody>
+          <a:bodyPr wrap="square" lIns="0" tIns="0" rIns="0" bIns="0" rtlCol="0" anchor="ctr"/>
+          <a:lstStyle/>
+          <a:p>
+            <a:pPr algn="ctr" indent="0" marL="0">
+              <a:buNone/>
+            </a:pPr>
+            <a:r>
+              <a:rPr lang="en-US" sz="1400" b="1" dirty="0">
+                <a:solidFill>
+                  <a:srgbClr val="FFFFFF"/>
+                </a:solidFill>
+                <a:latin typeface="Malgun Gothic" pitchFamily="34" charset="0"/>
+                <a:ea typeface="Malgun Gothic" pitchFamily="34" charset="-122"/>
+                <a:cs typeface="Malgun Gothic" pitchFamily="34" charset="-120"/>
+              </a:rPr>
+              <a:t>2</a:t>
+            </a:r>
+            <a:endParaRPr lang="en-US" sz="1400" dirty="0"/>
+          </a:p>
+        </p:txBody>
+      </p:sp>
+      <p:sp>
+        <p:nvSpPr>
+          <p:cNvPr id="11" name="Text 9"/>
+          <p:cNvSpPr/>
+          <p:nvPr/>
+        </p:nvSpPr>
+        <p:spPr>
+          <a:xfrm>
+            <a:off x="4700016" y="1170432"/>
+            <a:ext cx="3200400" cy="347472"/>
+          </a:xfrm>
+          <a:prstGeom prst="rect">
+            <a:avLst/>
+          </a:prstGeom>
+          <a:noFill/>
+          <a:ln/>
+        </p:spPr>
+        <p:txBody>
+          <a:bodyPr wrap="square" lIns="0" tIns="0" rIns="0" bIns="0" rtlCol="0" anchor="ctr"/>
+          <a:lstStyle/>
+          <a:p>
+            <a:pPr indent="0" marL="0">
+              <a:buNone/>
+            </a:pPr>
+            <a:r>
+              <a:rPr lang="en-US" sz="1400" b="1" dirty="0">
+                <a:solidFill>
+                  <a:srgbClr val="1A1A1A"/>
+                </a:solidFill>
+                <a:latin typeface="Malgun Gothic" pitchFamily="34" charset="0"/>
+                <a:ea typeface="Malgun Gothic" pitchFamily="34" charset="-122"/>
+                <a:cs typeface="Malgun Gothic" pitchFamily="34" charset="-120"/>
+              </a:rPr>
+              <a:t>SCA: Micron이 증명한 접근</a:t>
+            </a:r>
+            <a:endParaRPr lang="en-US" sz="1400" dirty="0"/>
+          </a:p>
+        </p:txBody>
+      </p:sp>
+      <p:sp>
+        <p:nvSpPr>
+          <p:cNvPr id="12" name="Shape 10"/>
+          <p:cNvSpPr/>
+          <p:nvPr/>
+        </p:nvSpPr>
+        <p:spPr>
+          <a:xfrm>
+            <a:off x="4297680" y="1627632"/>
+            <a:ext cx="3602736" cy="4626864"/>
+          </a:xfrm>
+          <a:prstGeom prst="roundRect">
+            <a:avLst>
+              <a:gd name="adj" fmla="val 2030"/>
+            </a:avLst>
+          </a:prstGeom>
+          <a:solidFill>
+            <a:srgbClr val="FFFFFF"/>
+          </a:solidFill>
+          <a:ln w="12700">
+            <a:solidFill>
+              <a:srgbClr val="D9D9D9"/>
+            </a:solidFill>
+            <a:prstDash val="solid"/>
+          </a:ln>
+        </p:spPr>
+      </p:sp>
+      <p:sp>
+        <p:nvSpPr>
+          <p:cNvPr id="13" name="Text 11"/>
+          <p:cNvSpPr/>
+          <p:nvPr/>
+        </p:nvSpPr>
+        <p:spPr>
+          <a:xfrm>
+            <a:off x="8129016" y="1188720"/>
+            <a:ext cx="310896" cy="310896"/>
+          </a:xfrm>
+          <a:prstGeom prst="ellipse">
+            <a:avLst/>
+          </a:prstGeom>
+          <a:solidFill>
+            <a:srgbClr val="1428A0"/>
+          </a:solidFill>
+          <a:ln/>
+        </p:spPr>
+        <p:txBody>
+          <a:bodyPr wrap="square" lIns="0" tIns="0" rIns="0" bIns="0" rtlCol="0" anchor="ctr"/>
+          <a:lstStyle/>
+          <a:p>
+            <a:pPr algn="ctr" indent="0" marL="0">
+              <a:buNone/>
+            </a:pPr>
+            <a:r>
+              <a:rPr lang="en-US" sz="1400" b="1" dirty="0">
+                <a:solidFill>
+                  <a:srgbClr val="FFFFFF"/>
+                </a:solidFill>
+                <a:latin typeface="Malgun Gothic" pitchFamily="34" charset="0"/>
+                <a:ea typeface="Malgun Gothic" pitchFamily="34" charset="-122"/>
+                <a:cs typeface="Malgun Gothic" pitchFamily="34" charset="-120"/>
+              </a:rPr>
+              <a:t>3</a:t>
+            </a:r>
+            <a:endParaRPr lang="en-US" sz="1400" dirty="0"/>
+          </a:p>
+        </p:txBody>
+      </p:sp>
+      <p:sp>
+        <p:nvSpPr>
+          <p:cNvPr id="14" name="Text 12"/>
+          <p:cNvSpPr/>
+          <p:nvPr/>
+        </p:nvSpPr>
+        <p:spPr>
+          <a:xfrm>
+            <a:off x="8531352" y="1170432"/>
+            <a:ext cx="3200400" cy="347472"/>
+          </a:xfrm>
+          <a:prstGeom prst="rect">
+            <a:avLst/>
+          </a:prstGeom>
+          <a:noFill/>
+          <a:ln/>
+        </p:spPr>
+        <p:txBody>
+          <a:bodyPr wrap="square" lIns="0" tIns="0" rIns="0" bIns="0" rtlCol="0" anchor="ctr"/>
+          <a:lstStyle/>
+          <a:p>
+            <a:pPr indent="0" marL="0">
+              <a:buNone/>
+            </a:pPr>
+            <a:r>
+              <a:rPr lang="en-US" sz="1400" b="1" dirty="0">
+                <a:solidFill>
+                  <a:srgbClr val="1A1A1A"/>
+                </a:solidFill>
+                <a:latin typeface="Malgun Gothic" pitchFamily="34" charset="0"/>
+                <a:ea typeface="Malgun Gothic" pitchFamily="34" charset="-122"/>
+                <a:cs typeface="Malgun Gothic" pitchFamily="34" charset="-120"/>
+              </a:rPr>
+              <a:t>FDP·FDE: 기술과 사람</a:t>
+            </a:r>
+            <a:endParaRPr lang="en-US" sz="1400" dirty="0"/>
+          </a:p>
+        </p:txBody>
+      </p:sp>
+      <p:sp>
+        <p:nvSpPr>
+          <p:cNvPr id="15" name="Shape 13"/>
+          <p:cNvSpPr/>
+          <p:nvPr/>
+        </p:nvSpPr>
+        <p:spPr>
+          <a:xfrm>
+            <a:off x="8129016" y="1627632"/>
+            <a:ext cx="3602736" cy="4626864"/>
+          </a:xfrm>
+          <a:prstGeom prst="roundRect">
+            <a:avLst>
+              <a:gd name="adj" fmla="val 2030"/>
+            </a:avLst>
+          </a:prstGeom>
+          <a:solidFill>
+            <a:srgbClr val="FFFFFF"/>
+          </a:solidFill>
+          <a:ln w="12700">
+            <a:solidFill>
+              <a:srgbClr val="D9D9D9"/>
+            </a:solidFill>
+            <a:prstDash val="solid"/>
+          </a:ln>
+        </p:spPr>
+      </p:sp>
+      <p:sp>
+        <p:nvSpPr>
+          <p:cNvPr id="16" name="Text 14"/>
+          <p:cNvSpPr/>
+          <p:nvPr/>
+        </p:nvSpPr>
+        <p:spPr>
+          <a:xfrm>
+            <a:off x="1828800" y="1828800"/>
+            <a:ext cx="877824" cy="877824"/>
+          </a:xfrm>
+          <a:prstGeom prst="ellipse">
+            <a:avLst/>
+          </a:prstGeom>
+          <a:solidFill>
+            <a:srgbClr val="1428A0"/>
           </a:solidFill>
           <a:ln/>
         </p:spPr>
@@ -5954,7 +6275,7 @@
               <a:buNone/>
             </a:pPr>
             <a:r>
-              <a:rPr lang="en-US" sz="1600" b="1" dirty="0">
+              <a:rPr lang="en-US" sz="1450" b="1" dirty="0">
                 <a:solidFill>
                   <a:srgbClr val="FFFFFF"/>
                 </a:solidFill>
@@ -5964,7 +6285,7 @@
               </a:rPr>
               <a:t>SCA</a:t>
             </a:r>
-            <a:endParaRPr lang="en-US" sz="1600" dirty="0"/>
+            <a:endParaRPr lang="en-US" sz="1450" dirty="0"/>
           </a:p>
           <a:p>
             <a:pPr algn="ctr" indent="0" marL="0">
@@ -5974,7 +6295,7 @@
               <a:buNone/>
             </a:pPr>
             <a:r>
-              <a:rPr lang="en-US" sz="1050" dirty="0">
+              <a:rPr lang="en-US" sz="950" dirty="0">
                 <a:solidFill>
                   <a:srgbClr val="FFFFFF"/>
                 </a:solidFill>
@@ -5984,26 +6305,26 @@
               </a:rPr>
               <a:t>다가간다</a:t>
             </a:r>
-            <a:endParaRPr lang="en-US" sz="1600" dirty="0"/>
-          </a:p>
-        </p:txBody>
-      </p:sp>
-      <p:sp>
-        <p:nvSpPr>
-          <p:cNvPr id="8" name="Text 6"/>
-          <p:cNvSpPr/>
-          <p:nvPr/>
-        </p:nvSpPr>
-        <p:spPr>
-          <a:xfrm>
-            <a:off x="658368" y="3346704"/>
-            <a:ext cx="1024128" cy="1024128"/>
+            <a:endParaRPr lang="en-US" sz="1450" dirty="0"/>
+          </a:p>
+        </p:txBody>
+      </p:sp>
+      <p:sp>
+        <p:nvSpPr>
+          <p:cNvPr id="17" name="Text 15"/>
+          <p:cNvSpPr/>
+          <p:nvPr/>
+        </p:nvSpPr>
+        <p:spPr>
+          <a:xfrm>
+            <a:off x="859536" y="3456432"/>
+            <a:ext cx="877824" cy="877824"/>
           </a:xfrm>
           <a:prstGeom prst="ellipse">
             <a:avLst/>
           </a:prstGeom>
           <a:solidFill>
-            <a:srgbClr val="028090"/>
+            <a:srgbClr val="3C5AC8"/>
           </a:solidFill>
           <a:ln/>
         </p:spPr>
@@ -6018,7 +6339,7 @@
               <a:buNone/>
             </a:pPr>
             <a:r>
-              <a:rPr lang="en-US" sz="1600" b="1" dirty="0">
+              <a:rPr lang="en-US" sz="1450" b="1" dirty="0">
                 <a:solidFill>
                   <a:srgbClr val="FFFFFF"/>
                 </a:solidFill>
@@ -6028,7 +6349,7 @@
               </a:rPr>
               <a:t>FDP</a:t>
             </a:r>
-            <a:endParaRPr lang="en-US" sz="1600" dirty="0"/>
+            <a:endParaRPr lang="en-US" sz="1450" dirty="0"/>
           </a:p>
           <a:p>
             <a:pPr algn="ctr" indent="0" marL="0">
@@ -6038,7 +6359,7 @@
               <a:buNone/>
             </a:pPr>
             <a:r>
-              <a:rPr lang="en-US" sz="1050" dirty="0">
+              <a:rPr lang="en-US" sz="950" dirty="0">
                 <a:solidFill>
                   <a:srgbClr val="FFFFFF"/>
                 </a:solidFill>
@@ -6048,26 +6369,26 @@
               </a:rPr>
               <a:t>제공한다</a:t>
             </a:r>
-            <a:endParaRPr lang="en-US" sz="1600" dirty="0"/>
-          </a:p>
-        </p:txBody>
-      </p:sp>
-      <p:sp>
-        <p:nvSpPr>
-          <p:cNvPr id="9" name="Text 7"/>
-          <p:cNvSpPr/>
-          <p:nvPr/>
-        </p:nvSpPr>
-        <p:spPr>
-          <a:xfrm>
-            <a:off x="2852928" y="3346704"/>
-            <a:ext cx="1024128" cy="1024128"/>
+            <a:endParaRPr lang="en-US" sz="1450" dirty="0"/>
+          </a:p>
+        </p:txBody>
+      </p:sp>
+      <p:sp>
+        <p:nvSpPr>
+          <p:cNvPr id="18" name="Text 16"/>
+          <p:cNvSpPr/>
+          <p:nvPr/>
+        </p:nvSpPr>
+        <p:spPr>
+          <a:xfrm>
+            <a:off x="2798064" y="3456432"/>
+            <a:ext cx="877824" cy="877824"/>
           </a:xfrm>
           <a:prstGeom prst="ellipse">
             <a:avLst/>
           </a:prstGeom>
           <a:solidFill>
-            <a:srgbClr val="02A878"/>
+            <a:srgbClr val="8FA0DC"/>
           </a:solidFill>
           <a:ln/>
         </p:spPr>
@@ -6082,7 +6403,7 @@
               <a:buNone/>
             </a:pPr>
             <a:r>
-              <a:rPr lang="en-US" sz="1600" b="1" dirty="0">
+              <a:rPr lang="en-US" sz="1450" b="1" dirty="0">
                 <a:solidFill>
                   <a:srgbClr val="FFFFFF"/>
                 </a:solidFill>
@@ -6092,7 +6413,7 @@
               </a:rPr>
               <a:t>FDE</a:t>
             </a:r>
-            <a:endParaRPr lang="en-US" sz="1600" dirty="0"/>
+            <a:endParaRPr lang="en-US" sz="1450" dirty="0"/>
           </a:p>
           <a:p>
             <a:pPr algn="ctr" indent="0" marL="0">
@@ -6102,7 +6423,7 @@
               <a:buNone/>
             </a:pPr>
             <a:r>
-              <a:rPr lang="en-US" sz="1050" dirty="0">
+              <a:rPr lang="en-US" sz="950" dirty="0">
                 <a:solidFill>
                   <a:srgbClr val="FFFFFF"/>
                 </a:solidFill>
@@ -6112,28 +6433,28 @@
               </a:rPr>
               <a:t>협업한다</a:t>
             </a:r>
-            <a:endParaRPr lang="en-US" sz="1600" dirty="0"/>
-          </a:p>
-        </p:txBody>
-      </p:sp>
-      <p:sp>
-        <p:nvSpPr>
-          <p:cNvPr id="10" name="Shape 8"/>
+            <a:endParaRPr lang="en-US" sz="1450" dirty="0"/>
+          </a:p>
+        </p:txBody>
+      </p:sp>
+      <p:sp>
+        <p:nvSpPr>
+          <p:cNvPr id="19" name="Shape 17"/>
           <p:cNvSpPr/>
           <p:nvPr/>
         </p:nvSpPr>
         <p:spPr>
           <a:xfrm flipH="1">
-            <a:off x="1170432" y="2304288"/>
-            <a:ext cx="402336" cy="1005840"/>
+            <a:off x="1371600" y="2706624"/>
+            <a:ext cx="329184" cy="713232"/>
           </a:xfrm>
           <a:prstGeom prst="line">
             <a:avLst/>
           </a:prstGeom>
           <a:noFill/>
-          <a:ln w="25400">
+          <a:ln w="22225">
             <a:solidFill>
-              <a:srgbClr val="C4CFD6"/>
+              <a:srgbClr val="B9C2DC"/>
             </a:solidFill>
             <a:prstDash val="solid"/>
             <a:tailEnd type="triangle"/>
@@ -6142,22 +6463,22 @@
       </p:sp>
       <p:sp>
         <p:nvSpPr>
-          <p:cNvPr id="11" name="Shape 9"/>
-          <p:cNvSpPr/>
-          <p:nvPr/>
-        </p:nvSpPr>
-        <p:spPr>
-          <a:xfrm>
-            <a:off x="1773936" y="3858768"/>
+          <p:cNvPr id="20" name="Shape 18"/>
+          <p:cNvSpPr/>
+          <p:nvPr/>
+        </p:nvSpPr>
+        <p:spPr>
+          <a:xfrm>
+            <a:off x="1773936" y="4059936"/>
             <a:ext cx="987552" cy="914"/>
           </a:xfrm>
           <a:prstGeom prst="line">
             <a:avLst/>
           </a:prstGeom>
           <a:noFill/>
-          <a:ln w="25400">
+          <a:ln w="22225">
             <a:solidFill>
-              <a:srgbClr val="C4CFD6"/>
+              <a:srgbClr val="B9C2DC"/>
             </a:solidFill>
             <a:prstDash val="solid"/>
             <a:tailEnd type="triangle"/>
@@ -6166,22 +6487,22 @@
       </p:sp>
       <p:sp>
         <p:nvSpPr>
-          <p:cNvPr id="12" name="Shape 10"/>
+          <p:cNvPr id="21" name="Shape 19"/>
           <p:cNvSpPr/>
           <p:nvPr/>
         </p:nvSpPr>
         <p:spPr>
           <a:xfrm flipH="1" flipV="1">
-            <a:off x="2907792" y="2286000"/>
-            <a:ext cx="457200" cy="1024128"/>
+            <a:off x="2834640" y="2706624"/>
+            <a:ext cx="384048" cy="713232"/>
           </a:xfrm>
           <a:prstGeom prst="line">
             <a:avLst/>
           </a:prstGeom>
           <a:noFill/>
-          <a:ln w="25400">
+          <a:ln w="22225">
             <a:solidFill>
-              <a:srgbClr val="C4CFD6"/>
+              <a:srgbClr val="B9C2DC"/>
             </a:solidFill>
             <a:prstDash val="solid"/>
             <a:tailEnd type="triangle"/>
@@ -6190,26 +6511,26 @@
       </p:sp>
       <p:sp>
         <p:nvSpPr>
-          <p:cNvPr id="13" name="Text 11"/>
-          <p:cNvSpPr/>
-          <p:nvPr/>
-        </p:nvSpPr>
-        <p:spPr>
-          <a:xfrm>
-            <a:off x="1554480" y="2724912"/>
-            <a:ext cx="1426464" cy="768096"/>
+          <p:cNvPr id="22" name="Text 20"/>
+          <p:cNvSpPr/>
+          <p:nvPr/>
+        </p:nvSpPr>
+        <p:spPr>
+          <a:xfrm>
+            <a:off x="1536192" y="2999232"/>
+            <a:ext cx="1463040" cy="566928"/>
           </a:xfrm>
           <a:prstGeom prst="roundRect">
             <a:avLst>
-              <a:gd name="adj" fmla="val 9524"/>
+              <a:gd name="adj" fmla="val 9677"/>
             </a:avLst>
           </a:prstGeom>
           <a:solidFill>
-            <a:srgbClr val="E8F6F0"/>
-          </a:solidFill>
-          <a:ln w="15875">
+            <a:srgbClr val="EEF1FA"/>
+          </a:solidFill>
+          <a:ln w="12700">
             <a:solidFill>
-              <a:srgbClr val="02A878"/>
+              <a:srgbClr val="1428A0"/>
             </a:solidFill>
           </a:ln>
         </p:spPr>
@@ -6219,14 +6540,14 @@
           <a:p>
             <a:pPr algn="ctr" indent="0" marL="0">
               <a:lnSpc>
-                <a:spcPct val="105000"/>
+                <a:spcPct val="100000"/>
               </a:lnSpc>
               <a:buNone/>
             </a:pPr>
             <a:r>
-              <a:rPr lang="en-US" sz="1150" b="1" dirty="0">
-                <a:solidFill>
-                  <a:srgbClr val="17313B"/>
+              <a:rPr lang="en-US" sz="1000" b="1" dirty="0">
+                <a:solidFill>
+                  <a:srgbClr val="1A1A1A"/>
                 </a:solidFill>
                 <a:latin typeface="Malgun Gothic" pitchFamily="34" charset="0"/>
                 <a:ea typeface="Malgun Gothic" pitchFamily="34" charset="-122"/>
@@ -6234,19 +6555,19 @@
               </a:rPr>
               <a:t>고객 락인</a:t>
             </a:r>
-            <a:endParaRPr lang="en-US" sz="1150" dirty="0"/>
+            <a:endParaRPr lang="en-US" sz="1000" dirty="0"/>
           </a:p>
           <a:p>
             <a:pPr algn="ctr" indent="0" marL="0">
               <a:lnSpc>
-                <a:spcPct val="105000"/>
+                <a:spcPct val="100000"/>
               </a:lnSpc>
               <a:buNone/>
             </a:pPr>
             <a:r>
-              <a:rPr lang="en-US" sz="1150" b="1" dirty="0">
-                <a:solidFill>
-                  <a:srgbClr val="17313B"/>
+              <a:rPr lang="en-US" sz="1000" b="1" dirty="0">
+                <a:solidFill>
+                  <a:srgbClr val="1A1A1A"/>
                 </a:solidFill>
                 <a:latin typeface="Malgun Gothic" pitchFamily="34" charset="0"/>
                 <a:ea typeface="Malgun Gothic" pitchFamily="34" charset="-122"/>
@@ -6254,56 +6575,230 @@
               </a:rPr>
               <a:t>다운턴 방어</a:t>
             </a:r>
-            <a:endParaRPr lang="en-US" sz="1150" dirty="0"/>
-          </a:p>
-        </p:txBody>
-      </p:sp>
-      <p:sp>
-        <p:nvSpPr>
-          <p:cNvPr id="14" name="Text 12"/>
-          <p:cNvSpPr/>
-          <p:nvPr/>
-        </p:nvSpPr>
-        <p:spPr>
-          <a:xfrm>
-            <a:off x="457200" y="4754880"/>
-            <a:ext cx="3785616" cy="1371600"/>
-          </a:xfrm>
-          <a:prstGeom prst="roundRect">
-            <a:avLst>
-              <a:gd name="adj" fmla="val 5333"/>
-            </a:avLst>
-          </a:prstGeom>
-          <a:solidFill>
-            <a:srgbClr val="F5F7F8"/>
-          </a:solidFill>
-          <a:ln/>
-        </p:spPr>
-        <p:txBody>
-          <a:bodyPr wrap="square" lIns="1524" tIns="1524" rIns="1524" bIns="1524" rtlCol="0" anchor="ctr"/>
-          <a:lstStyle/>
-          <a:p>
-            <a:pPr algn="l" indent="0" marL="0">
+            <a:endParaRPr lang="en-US" sz="1000" dirty="0"/>
+          </a:p>
+        </p:txBody>
+      </p:sp>
+      <p:sp>
+        <p:nvSpPr>
+          <p:cNvPr id="23" name="Text 21"/>
+          <p:cNvSpPr/>
+          <p:nvPr/>
+        </p:nvSpPr>
+        <p:spPr>
+          <a:xfrm>
+            <a:off x="658368" y="4572000"/>
+            <a:ext cx="3200400" cy="777240"/>
+          </a:xfrm>
+          <a:prstGeom prst="rect">
+            <a:avLst/>
+          </a:prstGeom>
+          <a:noFill/>
+          <a:ln/>
+        </p:spPr>
+        <p:txBody>
+          <a:bodyPr wrap="square" lIns="0" tIns="0" rIns="0" bIns="0" rtlCol="0" anchor="t"/>
+          <a:lstStyle/>
+          <a:p>
+            <a:pPr indent="0" marL="0">
               <a:lnSpc>
                 <a:spcPct val="115000"/>
               </a:lnSpc>
               <a:buNone/>
             </a:pPr>
             <a:r>
-              <a:rPr lang="en-US" sz="1250" b="1" dirty="0">
-                <a:solidFill>
-                  <a:srgbClr val="17313B"/>
-                </a:solidFill>
-                <a:latin typeface="Malgun Gothic" pitchFamily="34" charset="0"/>
-                <a:ea typeface="Malgun Gothic" pitchFamily="34" charset="-122"/>
-                <a:cs typeface="Malgun Gothic" pitchFamily="34" charset="-120"/>
-              </a:rPr>
-              <a:t>락인 플라이휠</a:t>
-            </a:r>
-            <a:endParaRPr lang="en-US" sz="1250" dirty="0"/>
-          </a:p>
-          <a:p>
-            <a:pPr algn="l" indent="0" marL="0">
+              <a:rPr lang="en-US" sz="1050" dirty="0">
+                <a:solidFill>
+                  <a:srgbClr val="555555"/>
+                </a:solidFill>
+                <a:latin typeface="Malgun Gothic" pitchFamily="34" charset="0"/>
+                <a:ea typeface="Malgun Gothic" pitchFamily="34" charset="-122"/>
+                <a:cs typeface="Malgun Gothic" pitchFamily="34" charset="-120"/>
+              </a:rPr>
+              <a:t>워크로드가 들어올수록 최적화가 깊어지고 전환비용이 커진다. 계약이 끝나도 갈아타기 어려운 관계가 다운턴의 방어벽이 된다</a:t>
+            </a:r>
+            <a:endParaRPr lang="en-US" sz="1050" dirty="0"/>
+          </a:p>
+        </p:txBody>
+      </p:sp>
+      <p:sp>
+        <p:nvSpPr>
+          <p:cNvPr id="24" name="Shape 22"/>
+          <p:cNvSpPr/>
+          <p:nvPr/>
+        </p:nvSpPr>
+        <p:spPr>
+          <a:xfrm>
+            <a:off x="658368" y="5431536"/>
+            <a:ext cx="3200400" cy="0"/>
+          </a:xfrm>
+          <a:prstGeom prst="line">
+            <a:avLst/>
+          </a:prstGeom>
+          <a:noFill/>
+          <a:ln w="9525">
+            <a:solidFill>
+              <a:srgbClr val="D9D9D9"/>
+            </a:solidFill>
+            <a:prstDash val="solid"/>
+          </a:ln>
+        </p:spPr>
+      </p:sp>
+      <p:sp>
+        <p:nvSpPr>
+          <p:cNvPr id="25" name="Text 23"/>
+          <p:cNvSpPr/>
+          <p:nvPr/>
+        </p:nvSpPr>
+        <p:spPr>
+          <a:xfrm>
+            <a:off x="658368" y="5522976"/>
+            <a:ext cx="3246120" cy="658368"/>
+          </a:xfrm>
+          <a:prstGeom prst="rect">
+            <a:avLst/>
+          </a:prstGeom>
+          <a:noFill/>
+          <a:ln/>
+        </p:spPr>
+        <p:txBody>
+          <a:bodyPr wrap="square" lIns="0" tIns="0" rIns="0" bIns="0" rtlCol="0" anchor="t"/>
+          <a:lstStyle/>
+          <a:p>
+            <a:pPr indent="0" marL="0">
+              <a:lnSpc>
+                <a:spcPct val="125000"/>
+              </a:lnSpc>
+              <a:buNone/>
+            </a:pPr>
+            <a:r>
+              <a:rPr lang="en-US" sz="950" b="1" dirty="0">
+                <a:solidFill>
+                  <a:srgbClr val="1428A0"/>
+                </a:solidFill>
+                <a:latin typeface="Malgun Gothic" pitchFamily="34" charset="0"/>
+                <a:ea typeface="Malgun Gothic" pitchFamily="34" charset="-122"/>
+                <a:cs typeface="Malgun Gothic" pitchFamily="34" charset="-120"/>
+              </a:rPr>
+              <a:t>SCA</a:t>
+            </a:r>
+            <a:pPr indent="0" marL="0">
+              <a:lnSpc>
+                <a:spcPct val="125000"/>
+              </a:lnSpc>
+              <a:buNone/>
+            </a:pPr>
+            <a:r>
+              <a:rPr lang="en-US" sz="950" dirty="0">
+                <a:solidFill>
+                  <a:srgbClr val="555555"/>
+                </a:solidFill>
+                <a:latin typeface="Malgun Gothic" pitchFamily="34" charset="0"/>
+                <a:ea typeface="Malgun Gothic" pitchFamily="34" charset="-122"/>
+                <a:cs typeface="Malgun Gothic" pitchFamily="34" charset="-120"/>
+              </a:rPr>
+              <a:t> Strategic Customer Agreement · 전략적 고객 계약</a:t>
+            </a:r>
+            <a:endParaRPr lang="en-US" sz="950" dirty="0"/>
+          </a:p>
+          <a:p>
+            <a:pPr indent="0" marL="0">
+              <a:lnSpc>
+                <a:spcPct val="125000"/>
+              </a:lnSpc>
+              <a:buNone/>
+            </a:pPr>
+            <a:r>
+              <a:rPr lang="en-US" sz="950" b="1" dirty="0">
+                <a:solidFill>
+                  <a:srgbClr val="1428A0"/>
+                </a:solidFill>
+                <a:latin typeface="Malgun Gothic" pitchFamily="34" charset="0"/>
+                <a:ea typeface="Malgun Gothic" pitchFamily="34" charset="-122"/>
+                <a:cs typeface="Malgun Gothic" pitchFamily="34" charset="-120"/>
+              </a:rPr>
+              <a:t>FDP</a:t>
+            </a:r>
+            <a:pPr indent="0" marL="0">
+              <a:lnSpc>
+                <a:spcPct val="125000"/>
+              </a:lnSpc>
+              <a:buNone/>
+            </a:pPr>
+            <a:r>
+              <a:rPr lang="en-US" sz="950" dirty="0">
+                <a:solidFill>
+                  <a:srgbClr val="555555"/>
+                </a:solidFill>
+                <a:latin typeface="Malgun Gothic" pitchFamily="34" charset="0"/>
+                <a:ea typeface="Malgun Gothic" pitchFamily="34" charset="-122"/>
+                <a:cs typeface="Malgun Gothic" pitchFamily="34" charset="-120"/>
+              </a:rPr>
+              <a:t> Flexible Data Placement · NVMe 데이터 배치 표준</a:t>
+            </a:r>
+            <a:endParaRPr lang="en-US" sz="950" dirty="0"/>
+          </a:p>
+          <a:p>
+            <a:pPr indent="0" marL="0">
+              <a:lnSpc>
+                <a:spcPct val="125000"/>
+              </a:lnSpc>
+              <a:buNone/>
+            </a:pPr>
+            <a:r>
+              <a:rPr lang="en-US" sz="950" b="1" dirty="0">
+                <a:solidFill>
+                  <a:srgbClr val="1428A0"/>
+                </a:solidFill>
+                <a:latin typeface="Malgun Gothic" pitchFamily="34" charset="0"/>
+                <a:ea typeface="Malgun Gothic" pitchFamily="34" charset="-122"/>
+                <a:cs typeface="Malgun Gothic" pitchFamily="34" charset="-120"/>
+              </a:rPr>
+              <a:t>FDE</a:t>
+            </a:r>
+            <a:pPr indent="0" marL="0">
+              <a:lnSpc>
+                <a:spcPct val="125000"/>
+              </a:lnSpc>
+              <a:buNone/>
+            </a:pPr>
+            <a:r>
+              <a:rPr lang="en-US" sz="950" dirty="0">
+                <a:solidFill>
+                  <a:srgbClr val="555555"/>
+                </a:solidFill>
+                <a:latin typeface="Malgun Gothic" pitchFamily="34" charset="0"/>
+                <a:ea typeface="Malgun Gothic" pitchFamily="34" charset="-122"/>
+                <a:cs typeface="Malgun Gothic" pitchFamily="34" charset="-120"/>
+              </a:rPr>
+              <a:t> Forward Deployed Engineer · 고객 상주 엔지니어</a:t>
+            </a:r>
+            <a:endParaRPr lang="en-US" sz="950" dirty="0"/>
+          </a:p>
+        </p:txBody>
+      </p:sp>
+      <p:sp>
+        <p:nvSpPr>
+          <p:cNvPr id="26" name="Text 24"/>
+          <p:cNvSpPr/>
+          <p:nvPr/>
+        </p:nvSpPr>
+        <p:spPr>
+          <a:xfrm>
+            <a:off x="4498848" y="1792224"/>
+            <a:ext cx="3200400" cy="1097280"/>
+          </a:xfrm>
+          <a:prstGeom prst="rect">
+            <a:avLst/>
+          </a:prstGeom>
+          <a:noFill/>
+          <a:ln/>
+        </p:spPr>
+        <p:txBody>
+          <a:bodyPr wrap="square" lIns="0" tIns="0" rIns="0" bIns="0" rtlCol="0" anchor="t"/>
+          <a:lstStyle/>
+          <a:p>
+            <a:pPr indent="0" marL="0">
               <a:lnSpc>
                 <a:spcPct val="115000"/>
               </a:lnSpc>
@@ -6312,135 +6807,94 @@
             <a:r>
               <a:rPr lang="en-US" sz="1050" dirty="0">
                 <a:solidFill>
-                  <a:srgbClr val="5A7184"/>
-                </a:solidFill>
-                <a:latin typeface="Malgun Gothic" pitchFamily="34" charset="0"/>
-                <a:ea typeface="Malgun Gothic" pitchFamily="34" charset="-122"/>
-                <a:cs typeface="Malgun Gothic" pitchFamily="34" charset="-120"/>
-              </a:rPr>
-              <a:t>워크로드 유입 → 최적화 심화 → 전환비용 증가. 계약이 끝나도 갈아타기 어려운 관계가 다운턴의 방어벽이 된다</a:t>
-            </a:r>
-            <a:endParaRPr lang="en-US" sz="1250" dirty="0"/>
-          </a:p>
-        </p:txBody>
-      </p:sp>
-      <p:sp>
-        <p:nvSpPr>
-          <p:cNvPr id="15" name="Shape 13"/>
-          <p:cNvSpPr/>
-          <p:nvPr/>
-        </p:nvSpPr>
-        <p:spPr>
-          <a:xfrm>
-            <a:off x="4434840" y="1207008"/>
-            <a:ext cx="7296912" cy="1645920"/>
+                  <a:srgbClr val="1A1A1A"/>
+                </a:solidFill>
+                <a:latin typeface="Malgun Gothic" pitchFamily="34" charset="0"/>
+                <a:ea typeface="Malgun Gothic" pitchFamily="34" charset="-122"/>
+                <a:cs typeface="Malgun Gothic" pitchFamily="34" charset="-120"/>
+              </a:rPr>
+              <a:t>공급부족 협상력의 창이 열려 있을 때 워크로드 교환을 제안한다: 고객이 워크로드를 공유하면 그 워크로드에 최적화한 FDP SSD를 공급. 성능·수명 개선과 TCO 절감으로 거절하기 어려운 딜</a:t>
+            </a:r>
+            <a:endParaRPr lang="en-US" sz="1050" dirty="0"/>
+          </a:p>
+        </p:txBody>
+      </p:sp>
+      <p:sp>
+        <p:nvSpPr>
+          <p:cNvPr id="27" name="Text 25"/>
+          <p:cNvSpPr/>
+          <p:nvPr/>
+        </p:nvSpPr>
+        <p:spPr>
+          <a:xfrm>
+            <a:off x="4498848" y="2926080"/>
+            <a:ext cx="3200400" cy="274320"/>
+          </a:xfrm>
+          <a:prstGeom prst="rect">
+            <a:avLst/>
+          </a:prstGeom>
+          <a:noFill/>
+          <a:ln/>
+        </p:spPr>
+        <p:txBody>
+          <a:bodyPr wrap="square" lIns="0" tIns="0" rIns="0" bIns="0" rtlCol="0" anchor="ctr"/>
+          <a:lstStyle/>
+          <a:p>
+            <a:pPr indent="0" marL="0">
+              <a:buNone/>
+            </a:pPr>
+            <a:r>
+              <a:rPr lang="en-US" sz="950" dirty="0">
+                <a:solidFill>
+                  <a:srgbClr val="555555"/>
+                </a:solidFill>
+                <a:latin typeface="Malgun Gothic" pitchFamily="34" charset="0"/>
+                <a:ea typeface="Malgun Gothic" pitchFamily="34" charset="-122"/>
+                <a:cs typeface="Malgun Gothic" pitchFamily="34" charset="-120"/>
+              </a:rPr>
+              <a:t>대상: 하이퍼스케일러 · Pure Storage · VAST Data · DDN</a:t>
+            </a:r>
+            <a:endParaRPr lang="en-US" sz="950" dirty="0"/>
+          </a:p>
+        </p:txBody>
+      </p:sp>
+      <p:sp>
+        <p:nvSpPr>
+          <p:cNvPr id="28" name="Shape 26"/>
+          <p:cNvSpPr/>
+          <p:nvPr/>
+        </p:nvSpPr>
+        <p:spPr>
+          <a:xfrm>
+            <a:off x="4480560" y="3291840"/>
+            <a:ext cx="3236976" cy="2798064"/>
           </a:xfrm>
           <a:prstGeom prst="roundRect">
             <a:avLst>
-              <a:gd name="adj" fmla="val 5000"/>
+              <a:gd name="adj" fmla="val 2288"/>
             </a:avLst>
           </a:prstGeom>
           <a:solidFill>
-            <a:srgbClr val="F5F7F8"/>
-          </a:solidFill>
-          <a:ln/>
-        </p:spPr>
-      </p:sp>
-      <p:sp>
-        <p:nvSpPr>
-          <p:cNvPr id="16" name="Text 14"/>
-          <p:cNvSpPr/>
-          <p:nvPr/>
-        </p:nvSpPr>
-        <p:spPr>
-          <a:xfrm>
-            <a:off x="4599432" y="1353312"/>
-            <a:ext cx="329184" cy="329184"/>
-          </a:xfrm>
-          <a:prstGeom prst="ellipse">
-            <a:avLst/>
-          </a:prstGeom>
-          <a:solidFill>
-            <a:srgbClr val="17313B"/>
-          </a:solidFill>
-          <a:ln/>
-        </p:spPr>
-        <p:txBody>
-          <a:bodyPr wrap="square" lIns="0" tIns="0" rIns="0" bIns="0" rtlCol="0" anchor="ctr"/>
-          <a:lstStyle/>
-          <a:p>
-            <a:pPr algn="ctr" indent="0" marL="0">
-              <a:buNone/>
-            </a:pPr>
-            <a:r>
-              <a:rPr lang="en-US" sz="1500" b="1" dirty="0">
-                <a:solidFill>
-                  <a:srgbClr val="FFFFFF"/>
-                </a:solidFill>
-                <a:latin typeface="Malgun Gothic" pitchFamily="34" charset="0"/>
-                <a:ea typeface="Malgun Gothic" pitchFamily="34" charset="-122"/>
-                <a:cs typeface="Malgun Gothic" pitchFamily="34" charset="-120"/>
-              </a:rPr>
-              <a:t>1</a:t>
-            </a:r>
-            <a:endParaRPr lang="en-US" sz="1500" dirty="0"/>
-          </a:p>
-        </p:txBody>
-      </p:sp>
-      <p:sp>
-        <p:nvSpPr>
-          <p:cNvPr id="17" name="Shape 15"/>
-          <p:cNvSpPr/>
-          <p:nvPr/>
-        </p:nvSpPr>
-        <p:spPr>
-          <a:xfrm>
-            <a:off x="5020056" y="1325880"/>
-            <a:ext cx="384048" cy="384048"/>
-          </a:xfrm>
-          <a:prstGeom prst="ellipse">
-            <a:avLst/>
-          </a:prstGeom>
-          <a:solidFill>
-            <a:srgbClr val="028090"/>
-          </a:solidFill>
-          <a:ln/>
-        </p:spPr>
-      </p:sp>
-      <p:pic>
-        <p:nvPicPr>
-          <p:cNvPr id="18" name="Image 0" descr="preencoded.png">    </p:cNvPr>
-          <p:cNvPicPr>
-            <a:picLocks noChangeAspect="1"/>
-          </p:cNvPicPr>
-          <p:nvPr/>
-        </p:nvPicPr>
-        <p:blipFill>
-          <a:blip r:embed="rId1"/>
-          <a:stretch>
-            <a:fillRect/>
-          </a:stretch>
-        </p:blipFill>
-        <p:spPr>
-          <a:xfrm>
-            <a:off x="5112228" y="1418052"/>
-            <a:ext cx="199705" cy="199705"/>
-          </a:xfrm>
-          <a:prstGeom prst="rect">
-            <a:avLst/>
-          </a:prstGeom>
-        </p:spPr>
-      </p:pic>
-      <p:sp>
-        <p:nvSpPr>
-          <p:cNvPr id="19" name="Text 16"/>
-          <p:cNvSpPr/>
-          <p:nvPr/>
-        </p:nvSpPr>
-        <p:spPr>
-          <a:xfrm>
-            <a:off x="5532120" y="1335024"/>
-            <a:ext cx="6035040" cy="365760"/>
+            <a:srgbClr val="EEF1FA"/>
+          </a:solidFill>
+          <a:ln w="15875">
+            <a:solidFill>
+              <a:srgbClr val="1428A0"/>
+            </a:solidFill>
+            <a:prstDash val="solid"/>
+          </a:ln>
+        </p:spPr>
+      </p:sp>
+      <p:sp>
+        <p:nvSpPr>
+          <p:cNvPr id="29" name="Text 27"/>
+          <p:cNvSpPr/>
+          <p:nvPr/>
+        </p:nvSpPr>
+        <p:spPr>
+          <a:xfrm>
+            <a:off x="4645152" y="3419856"/>
+            <a:ext cx="3017520" cy="274320"/>
           </a:xfrm>
           <a:prstGeom prst="rect">
             <a:avLst/>
@@ -6456,30 +6910,30 @@
               <a:buNone/>
             </a:pPr>
             <a:r>
-              <a:rPr lang="en-US" sz="1400" b="1" dirty="0">
-                <a:solidFill>
-                  <a:srgbClr val="17313B"/>
-                </a:solidFill>
-                <a:latin typeface="Malgun Gothic" pitchFamily="34" charset="0"/>
-                <a:ea typeface="Malgun Gothic" pitchFamily="34" charset="-122"/>
-                <a:cs typeface="Malgun Gothic" pitchFamily="34" charset="-120"/>
-              </a:rPr>
-              <a:t>협상력의 창이 열려 있을 때 워크로드 교환을 제안한다</a:t>
-            </a:r>
-            <a:endParaRPr lang="en-US" sz="1400" dirty="0"/>
-          </a:p>
-        </p:txBody>
-      </p:sp>
-      <p:sp>
-        <p:nvSpPr>
-          <p:cNvPr id="20" name="Text 17"/>
-          <p:cNvSpPr/>
-          <p:nvPr/>
-        </p:nvSpPr>
-        <p:spPr>
-          <a:xfrm>
-            <a:off x="4645152" y="1755648"/>
-            <a:ext cx="6903720" cy="1024128"/>
+              <a:rPr lang="en-US" sz="1150" b="1" dirty="0">
+                <a:solidFill>
+                  <a:srgbClr val="1428A0"/>
+                </a:solidFill>
+                <a:latin typeface="Malgun Gothic" pitchFamily="34" charset="0"/>
+                <a:ea typeface="Malgun Gothic" pitchFamily="34" charset="-122"/>
+                <a:cs typeface="Malgun Gothic" pitchFamily="34" charset="-120"/>
+              </a:rPr>
+              <a:t>선례: Micron ↔ Anthropic (’26.06)</a:t>
+            </a:r>
+            <a:endParaRPr lang="en-US" sz="1150" dirty="0"/>
+          </a:p>
+        </p:txBody>
+      </p:sp>
+      <p:sp>
+        <p:nvSpPr>
+          <p:cNvPr id="30" name="Text 28"/>
+          <p:cNvSpPr/>
+          <p:nvPr/>
+        </p:nvSpPr>
+        <p:spPr>
+          <a:xfrm>
+            <a:off x="4700016" y="3730752"/>
+            <a:ext cx="2962656" cy="1188720"/>
           </a:xfrm>
           <a:prstGeom prst="rect">
             <a:avLst/>
@@ -6502,17 +6956,17 @@
               <a:buChar char="•"/>
             </a:pPr>
             <a:r>
-              <a:rPr lang="en-US" sz="1050" dirty="0">
-                <a:solidFill>
-                  <a:srgbClr val="17313B"/>
-                </a:solidFill>
-                <a:latin typeface="Malgun Gothic" pitchFamily="34" charset="0"/>
-                <a:ea typeface="Malgun Gothic" pitchFamily="34" charset="-122"/>
-                <a:cs typeface="Malgun Gothic" pitchFamily="34" charset="-120"/>
-              </a:rPr>
-              <a:t>대상: 하이퍼스케일러 + 스토리지 박스 업체(Pure Storage·VAST Data·DDN)</a:t>
-            </a:r>
-            <a:endParaRPr lang="en-US" sz="1050" dirty="0"/>
+              <a:rPr lang="en-US" sz="1000" dirty="0">
+                <a:solidFill>
+                  <a:srgbClr val="1A1A1A"/>
+                </a:solidFill>
+                <a:latin typeface="Malgun Gothic" pitchFamily="34" charset="0"/>
+                <a:ea typeface="Malgun Gothic" pitchFamily="34" charset="-122"/>
+                <a:cs typeface="Malgun Gothic" pitchFamily="34" charset="-120"/>
+              </a:rPr>
+              <a:t>다년 공급 (HBM·DRAM·SSD 전 포트폴리오)</a:t>
+            </a:r>
+            <a:endParaRPr lang="en-US" sz="1000" dirty="0"/>
           </a:p>
           <a:p>
             <a:pPr marL="342900" indent="-342900">
@@ -6526,17 +6980,17 @@
               <a:buChar char="•"/>
             </a:pPr>
             <a:r>
-              <a:rPr lang="en-US" sz="1050" dirty="0">
-                <a:solidFill>
-                  <a:srgbClr val="17313B"/>
-                </a:solidFill>
-                <a:latin typeface="Malgun Gothic" pitchFamily="34" charset="0"/>
-                <a:ea typeface="Malgun Gothic" pitchFamily="34" charset="-122"/>
-                <a:cs typeface="Malgun Gothic" pitchFamily="34" charset="-120"/>
-              </a:rPr>
-              <a:t>딜 구조: 고객 워크로드 공유 ↔ 그 워크로드에 최적화한 FDP SSD 공급</a:t>
-            </a:r>
-            <a:endParaRPr lang="en-US" sz="1050" dirty="0"/>
+              <a:rPr lang="en-US" sz="1000" dirty="0">
+                <a:solidFill>
+                  <a:srgbClr val="1A1A1A"/>
+                </a:solidFill>
+                <a:latin typeface="Malgun Gothic" pitchFamily="34" charset="0"/>
+                <a:ea typeface="Malgun Gothic" pitchFamily="34" charset="-122"/>
+                <a:cs typeface="Malgun Gothic" pitchFamily="34" charset="-120"/>
+              </a:rPr>
+              <a:t>Claude 워크로드 공동 최적화</a:t>
+            </a:r>
+            <a:endParaRPr lang="en-US" sz="1000" dirty="0"/>
           </a:p>
           <a:p>
             <a:pPr marL="342900" indent="-342900">
@@ -6550,186 +7004,18 @@
               <a:buChar char="•"/>
             </a:pPr>
             <a:r>
-              <a:rPr lang="en-US" sz="1050" dirty="0">
-                <a:solidFill>
-                  <a:srgbClr val="17313B"/>
-                </a:solidFill>
-                <a:latin typeface="Malgun Gothic" pitchFamily="34" charset="0"/>
-                <a:ea typeface="Malgun Gothic" pitchFamily="34" charset="-122"/>
-                <a:cs typeface="Malgun Gothic" pitchFamily="34" charset="-120"/>
-              </a:rPr>
-              <a:t>고객 효익: 성능·수명 개선과 TCO 절감으로 거절하기 어려운 제안 (공급부족 국면 한정의 창)</a:t>
-            </a:r>
-            <a:endParaRPr lang="en-US" sz="1050" dirty="0"/>
-          </a:p>
-        </p:txBody>
-      </p:sp>
-      <p:sp>
-        <p:nvSpPr>
-          <p:cNvPr id="21" name="Shape 18"/>
-          <p:cNvSpPr/>
-          <p:nvPr/>
-        </p:nvSpPr>
-        <p:spPr>
-          <a:xfrm>
-            <a:off x="4434840" y="2980944"/>
-            <a:ext cx="7296912" cy="1645920"/>
-          </a:xfrm>
-          <a:prstGeom prst="roundRect">
-            <a:avLst>
-              <a:gd name="adj" fmla="val 5000"/>
-            </a:avLst>
-          </a:prstGeom>
-          <a:solidFill>
-            <a:srgbClr val="F5F7F8"/>
-          </a:solidFill>
-          <a:ln/>
-        </p:spPr>
-      </p:sp>
-      <p:sp>
-        <p:nvSpPr>
-          <p:cNvPr id="22" name="Text 19"/>
-          <p:cNvSpPr/>
-          <p:nvPr/>
-        </p:nvSpPr>
-        <p:spPr>
-          <a:xfrm>
-            <a:off x="4599432" y="3127248"/>
-            <a:ext cx="329184" cy="329184"/>
-          </a:xfrm>
-          <a:prstGeom prst="ellipse">
-            <a:avLst/>
-          </a:prstGeom>
-          <a:solidFill>
-            <a:srgbClr val="17313B"/>
-          </a:solidFill>
-          <a:ln/>
-        </p:spPr>
-        <p:txBody>
-          <a:bodyPr wrap="square" lIns="0" tIns="0" rIns="0" bIns="0" rtlCol="0" anchor="ctr"/>
-          <a:lstStyle/>
-          <a:p>
-            <a:pPr algn="ctr" indent="0" marL="0">
-              <a:buNone/>
-            </a:pPr>
-            <a:r>
-              <a:rPr lang="en-US" sz="1500" b="1" dirty="0">
-                <a:solidFill>
-                  <a:srgbClr val="FFFFFF"/>
-                </a:solidFill>
-                <a:latin typeface="Malgun Gothic" pitchFamily="34" charset="0"/>
-                <a:ea typeface="Malgun Gothic" pitchFamily="34" charset="-122"/>
-                <a:cs typeface="Malgun Gothic" pitchFamily="34" charset="-120"/>
-              </a:rPr>
-              <a:t>2</a:t>
-            </a:r>
-            <a:endParaRPr lang="en-US" sz="1500" dirty="0"/>
-          </a:p>
-        </p:txBody>
-      </p:sp>
-      <p:sp>
-        <p:nvSpPr>
-          <p:cNvPr id="23" name="Shape 20"/>
-          <p:cNvSpPr/>
-          <p:nvPr/>
-        </p:nvSpPr>
-        <p:spPr>
-          <a:xfrm>
-            <a:off x="5020056" y="3099816"/>
-            <a:ext cx="384048" cy="384048"/>
-          </a:xfrm>
-          <a:prstGeom prst="ellipse">
-            <a:avLst/>
-          </a:prstGeom>
-          <a:solidFill>
-            <a:srgbClr val="4C7C94"/>
-          </a:solidFill>
-          <a:ln/>
-        </p:spPr>
-      </p:sp>
-      <p:pic>
-        <p:nvPicPr>
-          <p:cNvPr id="24" name="Image 1" descr="preencoded.png">    </p:cNvPr>
-          <p:cNvPicPr>
-            <a:picLocks noChangeAspect="1"/>
-          </p:cNvPicPr>
-          <p:nvPr/>
-        </p:nvPicPr>
-        <p:blipFill>
-          <a:blip r:embed="rId2"/>
-          <a:stretch>
-            <a:fillRect/>
-          </a:stretch>
-        </p:blipFill>
-        <p:spPr>
-          <a:xfrm>
-            <a:off x="5112228" y="3191988"/>
-            <a:ext cx="199705" cy="199705"/>
-          </a:xfrm>
-          <a:prstGeom prst="rect">
-            <a:avLst/>
-          </a:prstGeom>
-        </p:spPr>
-      </p:pic>
-      <p:sp>
-        <p:nvSpPr>
-          <p:cNvPr id="25" name="Text 21"/>
-          <p:cNvSpPr/>
-          <p:nvPr/>
-        </p:nvSpPr>
-        <p:spPr>
-          <a:xfrm>
-            <a:off x="5532120" y="3108960"/>
-            <a:ext cx="6035040" cy="365760"/>
-          </a:xfrm>
-          <a:prstGeom prst="rect">
-            <a:avLst/>
-          </a:prstGeom>
-          <a:noFill/>
-          <a:ln/>
-        </p:spPr>
-        <p:txBody>
-          <a:bodyPr wrap="square" lIns="0" tIns="0" rIns="0" bIns="0" rtlCol="0" anchor="ctr"/>
-          <a:lstStyle/>
-          <a:p>
-            <a:pPr indent="0" marL="0">
-              <a:buNone/>
-            </a:pPr>
-            <a:r>
-              <a:rPr lang="en-US" sz="1400" b="1" dirty="0">
-                <a:solidFill>
-                  <a:srgbClr val="17313B"/>
-                </a:solidFill>
-                <a:latin typeface="Malgun Gothic" pitchFamily="34" charset="0"/>
-                <a:ea typeface="Malgun Gothic" pitchFamily="34" charset="-122"/>
-                <a:cs typeface="Malgun Gothic" pitchFamily="34" charset="-120"/>
-              </a:rPr>
-              <a:t>호스트를 이해하는 최적화 개발 역량을 채용·양성으로 확보한다</a:t>
-            </a:r>
-            <a:endParaRPr lang="en-US" sz="1400" dirty="0"/>
-          </a:p>
-        </p:txBody>
-      </p:sp>
-      <p:sp>
-        <p:nvSpPr>
-          <p:cNvPr id="26" name="Text 22"/>
-          <p:cNvSpPr/>
-          <p:nvPr/>
-        </p:nvSpPr>
-        <p:spPr>
-          <a:xfrm>
-            <a:off x="4645152" y="3529584"/>
-            <a:ext cx="6903720" cy="1024128"/>
-          </a:xfrm>
-          <a:prstGeom prst="rect">
-            <a:avLst/>
-          </a:prstGeom>
-          <a:noFill/>
-          <a:ln/>
-        </p:spPr>
-        <p:txBody>
-          <a:bodyPr wrap="square" lIns="0" tIns="0" rIns="0" bIns="0" rtlCol="0" anchor="t"/>
-          <a:lstStyle/>
+              <a:rPr lang="en-US" sz="1000" dirty="0">
+                <a:solidFill>
+                  <a:srgbClr val="1A1A1A"/>
+                </a:solidFill>
+                <a:latin typeface="Malgun Gothic" pitchFamily="34" charset="0"/>
+                <a:ea typeface="Malgun Gothic" pitchFamily="34" charset="-122"/>
+                <a:cs typeface="Malgun Gothic" pitchFamily="34" charset="-120"/>
+              </a:rPr>
+              <a:t>운영 통합 (Micron 전사에 Claude 배치)</a:t>
+            </a:r>
+            <a:endParaRPr lang="en-US" sz="1000" dirty="0"/>
+          </a:p>
           <a:p>
             <a:pPr marL="342900" indent="-342900">
               <a:lnSpc>
@@ -6742,39 +7028,138 @@
               <a:buChar char="•"/>
             </a:pPr>
             <a:r>
-              <a:rPr lang="en-US" sz="1050" dirty="0">
-                <a:solidFill>
-                  <a:srgbClr val="17313B"/>
-                </a:solidFill>
-                <a:latin typeface="Malgun Gothic" pitchFamily="34" charset="0"/>
-                <a:ea typeface="Malgun Gothic" pitchFamily="34" charset="-122"/>
-                <a:cs typeface="Malgun Gothic" pitchFamily="34" charset="-120"/>
-              </a:rPr>
-              <a:t>전문가 5종: ① 커널 블록계층·io_uring·NVMe ② SPDK 유저스페이스 ③ DB·캐시 내부(RocksDB·CacheLib·Ceph) ④ 성능·워크로드 분석(fio·eBPF·WAF) ⑤ FTL·미디어 모델(사내 강점 브리지)</a:t>
+              <a:rPr lang="en-US" sz="1000" dirty="0">
+                <a:solidFill>
+                  <a:srgbClr val="1A1A1A"/>
+                </a:solidFill>
+                <a:latin typeface="Malgun Gothic" pitchFamily="34" charset="0"/>
+                <a:ea typeface="Malgun Gothic" pitchFamily="34" charset="-122"/>
+                <a:cs typeface="Malgun Gothic" pitchFamily="34" charset="-120"/>
+              </a:rPr>
+              <a:t>자본 연계 (Series H 전략 투자)</a:t>
+            </a:r>
+            <a:endParaRPr lang="en-US" sz="1000" dirty="0"/>
+          </a:p>
+        </p:txBody>
+      </p:sp>
+      <p:sp>
+        <p:nvSpPr>
+          <p:cNvPr id="31" name="Text 29"/>
+          <p:cNvSpPr/>
+          <p:nvPr/>
+        </p:nvSpPr>
+        <p:spPr>
+          <a:xfrm>
+            <a:off x="4645152" y="5029200"/>
+            <a:ext cx="2962656" cy="457200"/>
+          </a:xfrm>
+          <a:prstGeom prst="rect">
+            <a:avLst/>
+          </a:prstGeom>
+          <a:noFill/>
+          <a:ln/>
+        </p:spPr>
+        <p:txBody>
+          <a:bodyPr wrap="square" lIns="0" tIns="0" rIns="0" bIns="0" rtlCol="0" anchor="ctr"/>
+          <a:lstStyle/>
+          <a:p>
+            <a:pPr indent="0" marL="0">
+              <a:lnSpc>
+                <a:spcPct val="110000"/>
+              </a:lnSpc>
+              <a:buNone/>
+            </a:pPr>
+            <a:r>
+              <a:rPr lang="en-US" sz="1050" b="1" dirty="0">
+                <a:solidFill>
+                  <a:srgbClr val="1A1A1A"/>
+                </a:solidFill>
+                <a:latin typeface="Malgun Gothic" pitchFamily="34" charset="0"/>
+                <a:ea typeface="Malgun Gothic" pitchFamily="34" charset="-122"/>
+                <a:cs typeface="Malgun Gothic" pitchFamily="34" charset="-120"/>
+              </a:rPr>
+              <a:t>전략적 고객 계약 16건 · 최소 매출 $100B · 예치금 $22B</a:t>
             </a:r>
             <a:endParaRPr lang="en-US" sz="1050" dirty="0"/>
           </a:p>
-          <a:p>
-            <a:pPr marL="342900" indent="-342900">
+        </p:txBody>
+      </p:sp>
+      <p:sp>
+        <p:nvSpPr>
+          <p:cNvPr id="32" name="Text 30"/>
+          <p:cNvSpPr/>
+          <p:nvPr/>
+        </p:nvSpPr>
+        <p:spPr>
+          <a:xfrm>
+            <a:off x="4645152" y="5541264"/>
+            <a:ext cx="2999232" cy="475488"/>
+          </a:xfrm>
+          <a:prstGeom prst="rect">
+            <a:avLst/>
+          </a:prstGeom>
+          <a:noFill/>
+          <a:ln/>
+        </p:spPr>
+        <p:txBody>
+          <a:bodyPr wrap="square" lIns="0" tIns="0" rIns="0" bIns="0" rtlCol="0" anchor="ctr"/>
+          <a:lstStyle/>
+          <a:p>
+            <a:pPr indent="0" marL="0">
               <a:lnSpc>
-                <a:spcPct val="108000"/>
+                <a:spcPct val="112000"/>
               </a:lnSpc>
-              <a:spcAft>
-                <a:spcPts val="400"/>
-              </a:spcAft>
-              <a:buSzPct val="100000"/>
-              <a:buChar char="•"/>
-            </a:pPr>
-            <a:r>
-              <a:rPr lang="en-US" sz="1050" dirty="0">
-                <a:solidFill>
-                  <a:srgbClr val="17313B"/>
-                </a:solidFill>
-                <a:latin typeface="Malgun Gothic" pitchFamily="34" charset="0"/>
-                <a:ea typeface="Malgun Gothic" pitchFamily="34" charset="-122"/>
-                <a:cs typeface="Malgun Gothic" pitchFamily="34" charset="-120"/>
-              </a:rPr>
-              <a:t>확보: 오픈소스 커미터·하이퍼스케일러 스토리지팀 출신 채용 + 사내 FW 인력의 호스트 SW 전환 트랙(오픈소스 기여를 평가에 반영)</a:t>
+              <a:buNone/>
+            </a:pPr>
+            <a:r>
+              <a:rPr lang="en-US" sz="1000" i="1" dirty="0">
+                <a:solidFill>
+                  <a:srgbClr val="555555"/>
+                </a:solidFill>
+                <a:latin typeface="Malgun Gothic" pitchFamily="34" charset="0"/>
+                <a:ea typeface="Malgun Gothic" pitchFamily="34" charset="-122"/>
+                <a:cs typeface="Malgun Gothic" pitchFamily="34" charset="-120"/>
+              </a:rPr>
+              <a:t>워크로드를 열고 공급을 잠근 계약. 우리가 맺으려는 관계의 실물 견본이다</a:t>
+            </a:r>
+            <a:endParaRPr lang="en-US" sz="1000" dirty="0"/>
+          </a:p>
+        </p:txBody>
+      </p:sp>
+      <p:sp>
+        <p:nvSpPr>
+          <p:cNvPr id="33" name="Text 31"/>
+          <p:cNvSpPr/>
+          <p:nvPr/>
+        </p:nvSpPr>
+        <p:spPr>
+          <a:xfrm>
+            <a:off x="8330184" y="1773936"/>
+            <a:ext cx="3200400" cy="256032"/>
+          </a:xfrm>
+          <a:prstGeom prst="rect">
+            <a:avLst/>
+          </a:prstGeom>
+          <a:noFill/>
+          <a:ln/>
+        </p:spPr>
+        <p:txBody>
+          <a:bodyPr wrap="square" lIns="0" tIns="0" rIns="0" bIns="0" rtlCol="0" anchor="ctr"/>
+          <a:lstStyle/>
+          <a:p>
+            <a:pPr indent="0" marL="0">
+              <a:buNone/>
+            </a:pPr>
+            <a:r>
+              <a:rPr lang="en-US" sz="1050" b="1" dirty="0">
+                <a:solidFill>
+                  <a:srgbClr val="1428A0"/>
+                </a:solidFill>
+                <a:latin typeface="Malgun Gothic" pitchFamily="34" charset="0"/>
+                <a:ea typeface="Malgun Gothic" pitchFamily="34" charset="-122"/>
+                <a:cs typeface="Malgun Gothic" pitchFamily="34" charset="-120"/>
+              </a:rPr>
+              <a:t>추가로 필요한 기술 (기존 SSD 기술 대비)</a:t>
             </a:r>
             <a:endParaRPr lang="en-US" sz="1050" dirty="0"/>
           </a:p>
@@ -6782,42 +7167,142 @@
       </p:sp>
       <p:sp>
         <p:nvSpPr>
-          <p:cNvPr id="27" name="Shape 23"/>
-          <p:cNvSpPr/>
-          <p:nvPr/>
-        </p:nvSpPr>
-        <p:spPr>
-          <a:xfrm>
-            <a:off x="4434840" y="4754880"/>
-            <a:ext cx="7296912" cy="1645920"/>
+          <p:cNvPr id="34" name="Text 32"/>
+          <p:cNvSpPr/>
+          <p:nvPr/>
+        </p:nvSpPr>
+        <p:spPr>
+          <a:xfrm>
+            <a:off x="8330184" y="2066544"/>
+            <a:ext cx="3200400" cy="329184"/>
           </a:xfrm>
           <a:prstGeom prst="roundRect">
             <a:avLst>
-              <a:gd name="adj" fmla="val 5000"/>
+              <a:gd name="adj" fmla="val 13889"/>
             </a:avLst>
           </a:prstGeom>
           <a:solidFill>
-            <a:srgbClr val="F5F7F8"/>
-          </a:solidFill>
-          <a:ln/>
-        </p:spPr>
-      </p:sp>
-      <p:sp>
-        <p:nvSpPr>
-          <p:cNvPr id="28" name="Text 24"/>
-          <p:cNvSpPr/>
-          <p:nvPr/>
-        </p:nvSpPr>
-        <p:spPr>
-          <a:xfrm>
-            <a:off x="4599432" y="4901184"/>
-            <a:ext cx="329184" cy="329184"/>
-          </a:xfrm>
-          <a:prstGeom prst="ellipse">
-            <a:avLst/>
-          </a:prstGeom>
-          <a:solidFill>
-            <a:srgbClr val="17313B"/>
+            <a:srgbClr val="F4F4F6"/>
+          </a:solidFill>
+          <a:ln/>
+        </p:spPr>
+        <p:txBody>
+          <a:bodyPr wrap="square" lIns="1016" tIns="1016" rIns="1016" bIns="1016" rtlCol="0" anchor="ctr"/>
+          <a:lstStyle/>
+          <a:p>
+            <a:pPr indent="0" marL="0">
+              <a:buNone/>
+            </a:pPr>
+            <a:r>
+              <a:rPr lang="en-US" sz="950" b="1" dirty="0">
+                <a:solidFill>
+                  <a:srgbClr val="555555"/>
+                </a:solidFill>
+                <a:latin typeface="Malgun Gothic" pitchFamily="34" charset="0"/>
+                <a:ea typeface="Malgun Gothic" pitchFamily="34" charset="-122"/>
+                <a:cs typeface="Malgun Gothic" pitchFamily="34" charset="-120"/>
+              </a:rPr>
+              <a:t>기존  </a:t>
+            </a:r>
+            <a:pPr indent="0" marL="0">
+              <a:buNone/>
+            </a:pPr>
+            <a:r>
+              <a:rPr lang="en-US" sz="950" dirty="0">
+                <a:solidFill>
+                  <a:srgbClr val="555555"/>
+                </a:solidFill>
+                <a:latin typeface="Malgun Gothic" pitchFamily="34" charset="0"/>
+                <a:ea typeface="Malgun Gothic" pitchFamily="34" charset="-122"/>
+                <a:cs typeface="Malgun Gothic" pitchFamily="34" charset="-120"/>
+              </a:rPr>
+              <a:t>NAND · 컨트롤러 · 펌웨어 · 수율</a:t>
+            </a:r>
+            <a:endParaRPr lang="en-US" sz="950" dirty="0"/>
+          </a:p>
+        </p:txBody>
+      </p:sp>
+      <p:sp>
+        <p:nvSpPr>
+          <p:cNvPr id="35" name="Text 33"/>
+          <p:cNvSpPr/>
+          <p:nvPr/>
+        </p:nvSpPr>
+        <p:spPr>
+          <a:xfrm>
+            <a:off x="8330184" y="2450592"/>
+            <a:ext cx="3200400" cy="749808"/>
+          </a:xfrm>
+          <a:prstGeom prst="roundRect">
+            <a:avLst>
+              <a:gd name="adj" fmla="val 6098"/>
+            </a:avLst>
+          </a:prstGeom>
+          <a:solidFill>
+            <a:srgbClr val="EEF1FA"/>
+          </a:solidFill>
+          <a:ln/>
+        </p:spPr>
+        <p:txBody>
+          <a:bodyPr wrap="square" lIns="1016" tIns="1016" rIns="1016" bIns="1016" rtlCol="0" anchor="ctr"/>
+          <a:lstStyle/>
+          <a:p>
+            <a:pPr indent="0" marL="0">
+              <a:lnSpc>
+                <a:spcPct val="112000"/>
+              </a:lnSpc>
+              <a:buNone/>
+            </a:pPr>
+            <a:r>
+              <a:rPr lang="en-US" sz="950" b="1" dirty="0">
+                <a:solidFill>
+                  <a:srgbClr val="1428A0"/>
+                </a:solidFill>
+                <a:latin typeface="Malgun Gothic" pitchFamily="34" charset="0"/>
+                <a:ea typeface="Malgun Gothic" pitchFamily="34" charset="-122"/>
+                <a:cs typeface="Malgun Gothic" pitchFamily="34" charset="-120"/>
+              </a:rPr>
+              <a:t>추가  </a:t>
+            </a:r>
+            <a:pPr indent="0" marL="0">
+              <a:lnSpc>
+                <a:spcPct val="112000"/>
+              </a:lnSpc>
+              <a:buNone/>
+            </a:pPr>
+            <a:r>
+              <a:rPr lang="en-US" sz="950" dirty="0">
+                <a:solidFill>
+                  <a:srgbClr val="1A1A1A"/>
+                </a:solidFill>
+                <a:latin typeface="Malgun Gothic" pitchFamily="34" charset="0"/>
+                <a:ea typeface="Malgun Gothic" pitchFamily="34" charset="-122"/>
+                <a:cs typeface="Malgun Gothic" pitchFamily="34" charset="-120"/>
+              </a:rPr>
+              <a:t>커널 블록계층·io_uring·NVMe / SPDK / DB·캐시 내부 (RocksDB·CacheLib·Ceph) / 워크로드 분석 (fio·eBPF·WAF)</a:t>
+            </a:r>
+            <a:endParaRPr lang="en-US" sz="950" dirty="0"/>
+          </a:p>
+        </p:txBody>
+      </p:sp>
+      <p:sp>
+        <p:nvSpPr>
+          <p:cNvPr id="36" name="Text 34"/>
+          <p:cNvSpPr/>
+          <p:nvPr/>
+        </p:nvSpPr>
+        <p:spPr>
+          <a:xfrm>
+            <a:off x="8330184" y="3401568"/>
+            <a:ext cx="566928" cy="292608"/>
+          </a:xfrm>
+          <a:prstGeom prst="roundRect">
+            <a:avLst>
+              <a:gd name="adj" fmla="val 15625"/>
+            </a:avLst>
+          </a:prstGeom>
+          <a:solidFill>
+            <a:srgbClr val="1428A0"/>
           </a:solidFill>
           <a:ln/>
         </p:spPr>
@@ -6829,7 +7314,7 @@
               <a:buNone/>
             </a:pPr>
             <a:r>
-              <a:rPr lang="en-US" sz="1500" b="1" dirty="0">
+              <a:rPr lang="en-US" sz="1000" b="1" dirty="0">
                 <a:solidFill>
                   <a:srgbClr val="FFFFFF"/>
                 </a:solidFill>
@@ -6837,105 +7322,107 @@
                 <a:ea typeface="Malgun Gothic" pitchFamily="34" charset="-122"/>
                 <a:cs typeface="Malgun Gothic" pitchFamily="34" charset="-120"/>
               </a:rPr>
-              <a:t>3</a:t>
-            </a:r>
-            <a:endParaRPr lang="en-US" sz="1500" dirty="0"/>
-          </a:p>
-        </p:txBody>
-      </p:sp>
-      <p:sp>
-        <p:nvSpPr>
-          <p:cNvPr id="29" name="Shape 25"/>
-          <p:cNvSpPr/>
-          <p:nvPr/>
-        </p:nvSpPr>
-        <p:spPr>
-          <a:xfrm>
-            <a:off x="5020056" y="4873752"/>
-            <a:ext cx="384048" cy="384048"/>
-          </a:xfrm>
-          <a:prstGeom prst="ellipse">
-            <a:avLst/>
-          </a:prstGeom>
-          <a:solidFill>
-            <a:srgbClr val="02A878"/>
-          </a:solidFill>
-          <a:ln/>
-        </p:spPr>
-      </p:sp>
-      <p:pic>
-        <p:nvPicPr>
-          <p:cNvPr id="30" name="Image 2" descr="preencoded.png">    </p:cNvPr>
-          <p:cNvPicPr>
-            <a:picLocks noChangeAspect="1"/>
-          </p:cNvPicPr>
-          <p:nvPr/>
-        </p:nvPicPr>
-        <p:blipFill>
-          <a:blip r:embed="rId3"/>
-          <a:stretch>
-            <a:fillRect/>
-          </a:stretch>
-        </p:blipFill>
-        <p:spPr>
-          <a:xfrm>
-            <a:off x="5112228" y="4965924"/>
-            <a:ext cx="199705" cy="199705"/>
-          </a:xfrm>
-          <a:prstGeom prst="rect">
-            <a:avLst/>
-          </a:prstGeom>
-        </p:spPr>
-      </p:pic>
-      <p:sp>
-        <p:nvSpPr>
-          <p:cNvPr id="31" name="Text 26"/>
-          <p:cNvSpPr/>
-          <p:nvPr/>
-        </p:nvSpPr>
-        <p:spPr>
-          <a:xfrm>
-            <a:off x="5532120" y="4882896"/>
-            <a:ext cx="6035040" cy="365760"/>
-          </a:xfrm>
-          <a:prstGeom prst="rect">
-            <a:avLst/>
-          </a:prstGeom>
-          <a:noFill/>
-          <a:ln/>
-        </p:spPr>
-        <p:txBody>
-          <a:bodyPr wrap="square" lIns="0" tIns="0" rIns="0" bIns="0" rtlCol="0" anchor="ctr"/>
+              <a:t>채용</a:t>
+            </a:r>
+            <a:endParaRPr lang="en-US" sz="1000" dirty="0"/>
+          </a:p>
+        </p:txBody>
+      </p:sp>
+      <p:sp>
+        <p:nvSpPr>
+          <p:cNvPr id="37" name="Text 35"/>
+          <p:cNvSpPr/>
+          <p:nvPr/>
+        </p:nvSpPr>
+        <p:spPr>
+          <a:xfrm>
+            <a:off x="9006840" y="3383280"/>
+            <a:ext cx="2578608" cy="859536"/>
+          </a:xfrm>
+          <a:prstGeom prst="rect">
+            <a:avLst/>
+          </a:prstGeom>
+          <a:noFill/>
+          <a:ln/>
+        </p:spPr>
+        <p:txBody>
+          <a:bodyPr wrap="square" lIns="0" tIns="0" rIns="0" bIns="0" rtlCol="0" anchor="t"/>
           <a:lstStyle/>
           <a:p>
             <a:pPr indent="0" marL="0">
-              <a:buNone/>
-            </a:pPr>
-            <a:r>
-              <a:rPr lang="en-US" sz="1400" b="1" dirty="0">
-                <a:solidFill>
-                  <a:srgbClr val="17313B"/>
-                </a:solidFill>
-                <a:latin typeface="Malgun Gothic" pitchFamily="34" charset="0"/>
-                <a:ea typeface="Malgun Gothic" pitchFamily="34" charset="-122"/>
-                <a:cs typeface="Malgun Gothic" pitchFamily="34" charset="-120"/>
-              </a:rPr>
-              <a:t>FDE를 고객 옆에 두고 FDP 생태계에 함께 기여한다</a:t>
-            </a:r>
-            <a:endParaRPr lang="en-US" sz="1400" dirty="0"/>
-          </a:p>
-        </p:txBody>
-      </p:sp>
-      <p:sp>
-        <p:nvSpPr>
-          <p:cNvPr id="32" name="Text 27"/>
-          <p:cNvSpPr/>
-          <p:nvPr/>
-        </p:nvSpPr>
-        <p:spPr>
-          <a:xfrm>
-            <a:off x="4645152" y="5303520"/>
-            <a:ext cx="6903720" cy="1024128"/>
+              <a:lnSpc>
+                <a:spcPct val="112000"/>
+              </a:lnSpc>
+              <a:buNone/>
+            </a:pPr>
+            <a:r>
+              <a:rPr lang="en-US" sz="1000" dirty="0">
+                <a:solidFill>
+                  <a:srgbClr val="1A1A1A"/>
+                </a:solidFill>
+                <a:latin typeface="Malgun Gothic" pitchFamily="34" charset="0"/>
+                <a:ea typeface="Malgun Gothic" pitchFamily="34" charset="-122"/>
+                <a:cs typeface="Malgun Gothic" pitchFamily="34" charset="-120"/>
+              </a:rPr>
+              <a:t>실리콘밸리 현지 중심, 오픈소스 스토리지 기여자 우대, 영어 커뮤니케이션 필수</a:t>
+            </a:r>
+            <a:endParaRPr lang="en-US" sz="1000" dirty="0"/>
+          </a:p>
+        </p:txBody>
+      </p:sp>
+      <p:sp>
+        <p:nvSpPr>
+          <p:cNvPr id="38" name="Text 36"/>
+          <p:cNvSpPr/>
+          <p:nvPr/>
+        </p:nvSpPr>
+        <p:spPr>
+          <a:xfrm>
+            <a:off x="8330184" y="4315968"/>
+            <a:ext cx="566928" cy="292608"/>
+          </a:xfrm>
+          <a:prstGeom prst="roundRect">
+            <a:avLst>
+              <a:gd name="adj" fmla="val 15625"/>
+            </a:avLst>
+          </a:prstGeom>
+          <a:solidFill>
+            <a:srgbClr val="1428A0"/>
+          </a:solidFill>
+          <a:ln/>
+        </p:spPr>
+        <p:txBody>
+          <a:bodyPr wrap="square" lIns="0" tIns="0" rIns="0" bIns="0" rtlCol="0" anchor="ctr"/>
+          <a:lstStyle/>
+          <a:p>
+            <a:pPr algn="ctr" indent="0" marL="0">
+              <a:buNone/>
+            </a:pPr>
+            <a:r>
+              <a:rPr lang="en-US" sz="1000" b="1" dirty="0">
+                <a:solidFill>
+                  <a:srgbClr val="FFFFFF"/>
+                </a:solidFill>
+                <a:latin typeface="Malgun Gothic" pitchFamily="34" charset="0"/>
+                <a:ea typeface="Malgun Gothic" pitchFamily="34" charset="-122"/>
+                <a:cs typeface="Malgun Gothic" pitchFamily="34" charset="-120"/>
+              </a:rPr>
+              <a:t>양성</a:t>
+            </a:r>
+            <a:endParaRPr lang="en-US" sz="1000" dirty="0"/>
+          </a:p>
+        </p:txBody>
+      </p:sp>
+      <p:sp>
+        <p:nvSpPr>
+          <p:cNvPr id="39" name="Text 37"/>
+          <p:cNvSpPr/>
+          <p:nvPr/>
+        </p:nvSpPr>
+        <p:spPr>
+          <a:xfrm>
+            <a:off x="9006840" y="4297680"/>
+            <a:ext cx="2578608" cy="859536"/>
           </a:xfrm>
           <a:prstGeom prst="rect">
             <a:avLst/>
@@ -6947,76 +7434,109 @@
           <a:bodyPr wrap="square" lIns="0" tIns="0" rIns="0" bIns="0" rtlCol="0" anchor="t"/>
           <a:lstStyle/>
           <a:p>
-            <a:pPr marL="342900" indent="-342900">
+            <a:pPr indent="0" marL="0">
               <a:lnSpc>
-                <a:spcPct val="108000"/>
+                <a:spcPct val="112000"/>
               </a:lnSpc>
-              <a:spcAft>
-                <a:spcPts val="400"/>
-              </a:spcAft>
-              <a:buSzPct val="100000"/>
-              <a:buChar char="•"/>
-            </a:pPr>
-            <a:r>
-              <a:rPr lang="en-US" sz="1050" dirty="0">
-                <a:solidFill>
-                  <a:srgbClr val="17313B"/>
-                </a:solidFill>
-                <a:latin typeface="Malgun Gothic" pitchFamily="34" charset="0"/>
-                <a:ea typeface="Malgun Gothic" pitchFamily="34" charset="-122"/>
-                <a:cs typeface="Malgun Gothic" pitchFamily="34" charset="-120"/>
-              </a:rPr>
-              <a:t>채용: 실리콘밸리 현지 중심, 오픈소스 스토리지 기여자 우대, 영어 커뮤니케이션 필수</a:t>
-            </a:r>
-            <a:endParaRPr lang="en-US" sz="1050" dirty="0"/>
-          </a:p>
-          <a:p>
-            <a:pPr marL="342900" indent="-342900">
+              <a:buNone/>
+            </a:pPr>
+            <a:r>
+              <a:rPr lang="en-US" sz="1000" dirty="0">
+                <a:solidFill>
+                  <a:srgbClr val="1A1A1A"/>
+                </a:solidFill>
+                <a:latin typeface="Malgun Gothic" pitchFamily="34" charset="0"/>
+                <a:ea typeface="Malgun Gothic" pitchFamily="34" charset="-122"/>
+                <a:cs typeface="Malgun Gothic" pitchFamily="34" charset="-120"/>
+              </a:rPr>
+              <a:t>본사 엔지니어 미국 로테이션 6~12개월 + 현지 FDE 멘토 페어링, 사내 FW 인력의 호스트 SW 전환 트랙</a:t>
+            </a:r>
+            <a:endParaRPr lang="en-US" sz="1000" dirty="0"/>
+          </a:p>
+        </p:txBody>
+      </p:sp>
+      <p:sp>
+        <p:nvSpPr>
+          <p:cNvPr id="40" name="Text 38"/>
+          <p:cNvSpPr/>
+          <p:nvPr/>
+        </p:nvSpPr>
+        <p:spPr>
+          <a:xfrm>
+            <a:off x="8330184" y="5230368"/>
+            <a:ext cx="566928" cy="292608"/>
+          </a:xfrm>
+          <a:prstGeom prst="roundRect">
+            <a:avLst>
+              <a:gd name="adj" fmla="val 15625"/>
+            </a:avLst>
+          </a:prstGeom>
+          <a:solidFill>
+            <a:srgbClr val="1428A0"/>
+          </a:solidFill>
+          <a:ln/>
+        </p:spPr>
+        <p:txBody>
+          <a:bodyPr wrap="square" lIns="0" tIns="0" rIns="0" bIns="0" rtlCol="0" anchor="ctr"/>
+          <a:lstStyle/>
+          <a:p>
+            <a:pPr algn="ctr" indent="0" marL="0">
+              <a:buNone/>
+            </a:pPr>
+            <a:r>
+              <a:rPr lang="en-US" sz="1000" b="1" dirty="0">
+                <a:solidFill>
+                  <a:srgbClr val="FFFFFF"/>
+                </a:solidFill>
+                <a:latin typeface="Malgun Gothic" pitchFamily="34" charset="0"/>
+                <a:ea typeface="Malgun Gothic" pitchFamily="34" charset="-122"/>
+                <a:cs typeface="Malgun Gothic" pitchFamily="34" charset="-120"/>
+              </a:rPr>
+              <a:t>운영</a:t>
+            </a:r>
+            <a:endParaRPr lang="en-US" sz="1000" dirty="0"/>
+          </a:p>
+        </p:txBody>
+      </p:sp>
+      <p:sp>
+        <p:nvSpPr>
+          <p:cNvPr id="41" name="Text 39"/>
+          <p:cNvSpPr/>
+          <p:nvPr/>
+        </p:nvSpPr>
+        <p:spPr>
+          <a:xfrm>
+            <a:off x="9006840" y="5212080"/>
+            <a:ext cx="2578608" cy="859536"/>
+          </a:xfrm>
+          <a:prstGeom prst="rect">
+            <a:avLst/>
+          </a:prstGeom>
+          <a:noFill/>
+          <a:ln/>
+        </p:spPr>
+        <p:txBody>
+          <a:bodyPr wrap="square" lIns="0" tIns="0" rIns="0" bIns="0" rtlCol="0" anchor="t"/>
+          <a:lstStyle/>
+          <a:p>
+            <a:pPr indent="0" marL="0">
               <a:lnSpc>
-                <a:spcPct val="108000"/>
+                <a:spcPct val="112000"/>
               </a:lnSpc>
-              <a:spcAft>
-                <a:spcPts val="400"/>
-              </a:spcAft>
-              <a:buSzPct val="100000"/>
-              <a:buChar char="•"/>
-            </a:pPr>
-            <a:r>
-              <a:rPr lang="en-US" sz="1050" dirty="0">
-                <a:solidFill>
-                  <a:srgbClr val="17313B"/>
-                </a:solidFill>
-                <a:latin typeface="Malgun Gothic" pitchFamily="34" charset="0"/>
-                <a:ea typeface="Malgun Gothic" pitchFamily="34" charset="-122"/>
-                <a:cs typeface="Malgun Gothic" pitchFamily="34" charset="-120"/>
-              </a:rPr>
-              <a:t>양성: 본사 엔지니어 미국 로테이션(6~12개월) + 현지 FDE 멘토 페어링</a:t>
-            </a:r>
-            <a:endParaRPr lang="en-US" sz="1050" dirty="0"/>
-          </a:p>
-          <a:p>
-            <a:pPr marL="342900" indent="-342900">
-              <a:lnSpc>
-                <a:spcPct val="108000"/>
-              </a:lnSpc>
-              <a:spcAft>
-                <a:spcPts val="400"/>
-              </a:spcAft>
-              <a:buSzPct val="100000"/>
-              <a:buChar char="•"/>
-            </a:pPr>
-            <a:r>
-              <a:rPr lang="en-US" sz="1050" dirty="0">
-                <a:solidFill>
-                  <a:srgbClr val="17313B"/>
-                </a:solidFill>
-                <a:latin typeface="Malgun Gothic" pitchFamily="34" charset="0"/>
-                <a:ea typeface="Malgun Gothic" pitchFamily="34" charset="-122"/>
-                <a:cs typeface="Malgun Gothic" pitchFamily="34" charset="-120"/>
-              </a:rPr>
-              <a:t>운영: 파일럿 1~2사 상주(Pod 소속·dual-ladder), outcome 평가(FDP 활성화 용량), 커널·SPDK·CacheLib 업스트림 기여로 호명</a:t>
-            </a:r>
-            <a:endParaRPr lang="en-US" sz="1050" dirty="0"/>
+              <a:buNone/>
+            </a:pPr>
+            <a:r>
+              <a:rPr lang="en-US" sz="1000" dirty="0">
+                <a:solidFill>
+                  <a:srgbClr val="1A1A1A"/>
+                </a:solidFill>
+                <a:latin typeface="Malgun Gothic" pitchFamily="34" charset="0"/>
+                <a:ea typeface="Malgun Gothic" pitchFamily="34" charset="-122"/>
+                <a:cs typeface="Malgun Gothic" pitchFamily="34" charset="-120"/>
+              </a:rPr>
+              <a:t>파일럿 1~2사 상주 (Pod 소속·dual-ladder), 평가는 outcome (FDP 활성화 용량), 커널·SPDK·CacheLib 업스트림 기여</a:t>
+            </a:r>
+            <a:endParaRPr lang="en-US" sz="1000" dirty="0"/>
           </a:p>
         </p:txBody>
       </p:sp>

--- a/dashboard/public/downloads/dev-transformation-summary-fdp.pptx
+++ b/dashboard/public/downloads/dev-transformation-summary-fdp.pptx
@@ -7293,7 +7293,74 @@
         </p:nvSpPr>
         <p:spPr>
           <a:xfrm>
-            <a:off x="8330184" y="3401568"/>
+            <a:off x="8330184" y="3310128"/>
+            <a:ext cx="3200400" cy="694944"/>
+          </a:xfrm>
+          <a:prstGeom prst="roundRect">
+            <a:avLst>
+              <a:gd name="adj" fmla="val 6579"/>
+            </a:avLst>
+          </a:prstGeom>
+          <a:solidFill>
+            <a:srgbClr val="EEF1FA"/>
+          </a:solidFill>
+          <a:ln w="12700">
+            <a:solidFill>
+              <a:srgbClr val="1428A0"/>
+            </a:solidFill>
+          </a:ln>
+        </p:spPr>
+        <p:txBody>
+          <a:bodyPr wrap="square" lIns="1016" tIns="1016" rIns="1016" bIns="1016" rtlCol="0" anchor="ctr"/>
+          <a:lstStyle/>
+          <a:p>
+            <a:pPr indent="0" marL="0">
+              <a:lnSpc>
+                <a:spcPct val="110000"/>
+              </a:lnSpc>
+              <a:buNone/>
+            </a:pPr>
+            <a:r>
+              <a:rPr lang="en-US" sz="950" b="1" dirty="0">
+                <a:solidFill>
+                  <a:srgbClr val="1428A0"/>
+                </a:solidFill>
+                <a:latin typeface="Malgun Gothic" pitchFamily="34" charset="0"/>
+                <a:ea typeface="Malgun Gothic" pitchFamily="34" charset="-122"/>
+                <a:cs typeface="Malgun Gothic" pitchFamily="34" charset="-120"/>
+              </a:rPr>
+              <a:t>FDE 선례  </a:t>
+            </a:r>
+            <a:pPr indent="0" marL="0">
+              <a:lnSpc>
+                <a:spcPct val="110000"/>
+              </a:lnSpc>
+              <a:buNone/>
+            </a:pPr>
+            <a:r>
+              <a:rPr lang="en-US" sz="950" dirty="0">
+                <a:solidFill>
+                  <a:srgbClr val="1A1A1A"/>
+                </a:solidFill>
+                <a:latin typeface="Malgun Gothic" pitchFamily="34" charset="0"/>
+                <a:ea typeface="Malgun Gothic" pitchFamily="34" charset="-122"/>
+                <a:cs typeface="Malgun Gothic" pitchFamily="34" charset="-120"/>
+              </a:rPr>
+              <a:t>Palantir가 창안한 직군 (코드명 Delta, 640% 주가 동력으로 회자) · Anthropic·OpenAI도 엔터프라이즈 GTM으로 채택</a:t>
+            </a:r>
+            <a:endParaRPr lang="en-US" sz="950" dirty="0"/>
+          </a:p>
+        </p:txBody>
+      </p:sp>
+      <p:sp>
+        <p:nvSpPr>
+          <p:cNvPr id="37" name="Text 35"/>
+          <p:cNvSpPr/>
+          <p:nvPr/>
+        </p:nvSpPr>
+        <p:spPr>
+          <a:xfrm>
+            <a:off x="8330184" y="4133088"/>
             <a:ext cx="566928" cy="292608"/>
           </a:xfrm>
           <a:prstGeom prst="roundRect">
@@ -7330,14 +7397,14 @@
       </p:sp>
       <p:sp>
         <p:nvSpPr>
-          <p:cNvPr id="37" name="Text 35"/>
-          <p:cNvSpPr/>
-          <p:nvPr/>
-        </p:nvSpPr>
-        <p:spPr>
-          <a:xfrm>
-            <a:off x="9006840" y="3383280"/>
-            <a:ext cx="2578608" cy="859536"/>
+          <p:cNvPr id="38" name="Text 36"/>
+          <p:cNvSpPr/>
+          <p:nvPr/>
+        </p:nvSpPr>
+        <p:spPr>
+          <a:xfrm>
+            <a:off x="9006840" y="4114800"/>
+            <a:ext cx="2578608" cy="658368"/>
           </a:xfrm>
           <a:prstGeom prst="rect">
             <a:avLst/>
@@ -7364,7 +7431,7 @@
                 <a:ea typeface="Malgun Gothic" pitchFamily="34" charset="-122"/>
                 <a:cs typeface="Malgun Gothic" pitchFamily="34" charset="-120"/>
               </a:rPr>
-              <a:t>실리콘밸리 현지 중심, 오픈소스 스토리지 기여자 우대, 영어 커뮤니케이션 필수</a:t>
+              <a:t>실리콘밸리 현지, 오픈소스 스토리지 기여자 우대, 영어 필수</a:t>
             </a:r>
             <a:endParaRPr lang="en-US" sz="1000" dirty="0"/>
           </a:p>
@@ -7372,13 +7439,13 @@
       </p:sp>
       <p:sp>
         <p:nvSpPr>
-          <p:cNvPr id="38" name="Text 36"/>
-          <p:cNvSpPr/>
-          <p:nvPr/>
-        </p:nvSpPr>
-        <p:spPr>
-          <a:xfrm>
-            <a:off x="8330184" y="4315968"/>
+          <p:cNvPr id="39" name="Text 37"/>
+          <p:cNvSpPr/>
+          <p:nvPr/>
+        </p:nvSpPr>
+        <p:spPr>
+          <a:xfrm>
+            <a:off x="8330184" y="4846320"/>
             <a:ext cx="566928" cy="292608"/>
           </a:xfrm>
           <a:prstGeom prst="roundRect">
@@ -7415,14 +7482,14 @@
       </p:sp>
       <p:sp>
         <p:nvSpPr>
-          <p:cNvPr id="39" name="Text 37"/>
-          <p:cNvSpPr/>
-          <p:nvPr/>
-        </p:nvSpPr>
-        <p:spPr>
-          <a:xfrm>
-            <a:off x="9006840" y="4297680"/>
-            <a:ext cx="2578608" cy="859536"/>
+          <p:cNvPr id="40" name="Text 38"/>
+          <p:cNvSpPr/>
+          <p:nvPr/>
+        </p:nvSpPr>
+        <p:spPr>
+          <a:xfrm>
+            <a:off x="9006840" y="4828032"/>
+            <a:ext cx="2578608" cy="658368"/>
           </a:xfrm>
           <a:prstGeom prst="rect">
             <a:avLst/>
@@ -7449,7 +7516,7 @@
                 <a:ea typeface="Malgun Gothic" pitchFamily="34" charset="-122"/>
                 <a:cs typeface="Malgun Gothic" pitchFamily="34" charset="-120"/>
               </a:rPr>
-              <a:t>본사 엔지니어 미국 로테이션 6~12개월 + 현지 FDE 멘토 페어링, 사내 FW 인력의 호스트 SW 전환 트랙</a:t>
+              <a:t>본사 엔지니어 미국 로테이션 6~12개월 + 현지 FDE 멘토 페어링</a:t>
             </a:r>
             <a:endParaRPr lang="en-US" sz="1000" dirty="0"/>
           </a:p>
@@ -7457,13 +7524,13 @@
       </p:sp>
       <p:sp>
         <p:nvSpPr>
-          <p:cNvPr id="40" name="Text 38"/>
-          <p:cNvSpPr/>
-          <p:nvPr/>
-        </p:nvSpPr>
-        <p:spPr>
-          <a:xfrm>
-            <a:off x="8330184" y="5230368"/>
+          <p:cNvPr id="41" name="Text 39"/>
+          <p:cNvSpPr/>
+          <p:nvPr/>
+        </p:nvSpPr>
+        <p:spPr>
+          <a:xfrm>
+            <a:off x="8330184" y="5559552"/>
             <a:ext cx="566928" cy="292608"/>
           </a:xfrm>
           <a:prstGeom prst="roundRect">
@@ -7500,14 +7567,14 @@
       </p:sp>
       <p:sp>
         <p:nvSpPr>
-          <p:cNvPr id="41" name="Text 39"/>
-          <p:cNvSpPr/>
-          <p:nvPr/>
-        </p:nvSpPr>
-        <p:spPr>
-          <a:xfrm>
-            <a:off x="9006840" y="5212080"/>
-            <a:ext cx="2578608" cy="859536"/>
+          <p:cNvPr id="42" name="Text 40"/>
+          <p:cNvSpPr/>
+          <p:nvPr/>
+        </p:nvSpPr>
+        <p:spPr>
+          <a:xfrm>
+            <a:off x="9006840" y="5541264"/>
+            <a:ext cx="2578608" cy="658368"/>
           </a:xfrm>
           <a:prstGeom prst="rect">
             <a:avLst/>
@@ -7534,7 +7601,7 @@
                 <a:ea typeface="Malgun Gothic" pitchFamily="34" charset="-122"/>
                 <a:cs typeface="Malgun Gothic" pitchFamily="34" charset="-120"/>
               </a:rPr>
-              <a:t>파일럿 1~2사 상주 (Pod 소속·dual-ladder), 평가는 outcome (FDP 활성화 용량), 커널·SPDK·CacheLib 업스트림 기여</a:t>
+              <a:t>파일럿 1~2사 상주 (Pod 소속), outcome 평가 (활성화 용량), 업스트림 기여</a:t>
             </a:r>
             <a:endParaRPr lang="en-US" sz="1000" dirty="0"/>
           </a:p>
